--- a/slide/slide-6-rds.pptx
+++ b/slide/slide-6-rds.pptx
@@ -1139,7 +1139,7 @@
           <a:p>
             <a:r>
               <a:rPr lang="en-US" dirty="0"/>
-              <a:t>Il codice, in due parti. Il subnet group: l'elenco delle subnet database, con un'espressione for come nella lezione 3. Poi il database: identifier è il nome in AWS; engine postgres; engine_version 17, solo la versione principale, la minore la sceglie e aggiorna AWS; instance_class db.t4g.micro, piccola e Graviton come il server. Il disco: 20 GB iniziali, cresce da solo fino a 100, gp3, cifrato. Il primo database si chiama app, l'utente dbadmin, e la password non c'è: la genera RDS.</a:t>
+              <a:t>Il codice, in due parti. Il subnet group: l'elenco delle subnet database, con un'espressione for come nella lezione 3. Poi il database: identifier è il nome in AWS; engine postgres; engine_version 18, solo la versione principale, la minore la sceglie e aggiorna AWS; instance_class db.t4g.micro, piccola e Graviton come il server. Il disco: 20 GB iniziali, cresce da solo fino a 100, gp3, cifrato. Il primo database si chiama app, l'utente dbadmin, e la password non c'è: la genera RDS.</a:t>
             </a:r>
             <a:endParaRPr lang="en-US" dirty="0"/>
           </a:p>
@@ -8940,7 +8940,7 @@
                 <a:ea typeface="Courier New" pitchFamily="34" charset="-122"/>
                 <a:cs typeface="Courier New" pitchFamily="34" charset="-120"/>
               </a:rPr>
-              <a:t># "17"</a:t>
+              <a:t># "18"</a:t>
             </a:r>
             <a:endParaRPr lang="en-US" sz="1600" dirty="0"/>
           </a:p>

--- a/slide/slide-6-rds.pptx
+++ b/slide/slide-6-rds.pptx
@@ -27,9 +27,11 @@
     <p:sldId id="275" r:id="rId21"/>
     <p:sldId id="276" r:id="rId22"/>
     <p:sldId id="277" r:id="rId23"/>
+    <p:sldId id="278" r:id="rId24"/>
+    <p:sldId id="279" r:id="rId25"/>
   </p:sldIdLst>
   <p:notesMasterIdLst>
-    <p:notesMasterId r:id="rId24"/>
+    <p:notesMasterId r:id="rId26"/>
   </p:notesMasterIdLst>
   <p:sldSz cx="12192000" cy="6858000"/>
   <p:notesSz cx="6858000" cy="12192000"/>
@@ -787,7 +789,7 @@
           <a:p>
             <a:r>
               <a:rPr lang="en-US" dirty="0"/>
-              <a:t>Il database ha un utente amministratore con una password. Dove la mettiamo? Scritta nel codice finisce in Git. In una variabile nel tfvars non va in Git, ma finisce comunque nello state, come abbiamo visto nella lezione 0. Generata da Terraform con random_password, stesso problema: nello state. La soluzione: la genera RDS e la mette in Secrets Manager. Nessuno la scrive, e nello state c'è solo l'indirizzo del segreto.</a:t>
+              <a:t>Il disco cifrato protegge i dati fermi. Ma i dati viaggiano anche sulla rete: le query, i risultati, e soprattutto la password al login. Li protegge TLS, la stessa cifratura dei siti https. Due cose diverse. Cifrare: chi sta sulla strada non legge, è la busta chiusa; si ottiene con sslmode require. Verificare: stai parlando con il database vero e non con un impostore, è il controllo del documento di chi riceve la busta; si ottiene con sslmode verify-full e il certificato di AWS. Una busta chiusa consegnata all'impostore la apre l'impostore: servono tutte e due. Dal lato del database, rds.force_ssl a 1 rifiuta le connessioni in chiaro. E Tailscale? Cifra solo da casa al router; TLS cifra tutto il percorso, anche dal server dell'applicazione.</a:t>
             </a:r>
             <a:endParaRPr lang="en-US" dirty="0"/>
           </a:p>
@@ -875,7 +877,7 @@
           <a:p>
             <a:r>
               <a:rPr lang="en-US" dirty="0"/>
-              <a:t>Secrets Manager è il servizio AWS per custodire segreti. Con manage_master_user_password RDS genera la password, la chiude in un segreto e la cambia da solo ogni 7 giorni. Terraform conosce solo l'ARN del segreto, il numero della cassetta. Per aprirla serve il badge giusto, cioè il permesso IAM. Lo diamo al server dell'applicazione, solo su quel segreto: è il file secrets.tf. Gli amministratori la leggono con il loro login AWS. Siccome cambia ogni 7 giorni, nessuno la copia in un file: si legge dal segreto ogni volta.</a:t>
+              <a:t>Il database ha un utente amministratore con una password. Dove la mettiamo? Scritta nel codice finisce in Git. In una variabile nel tfvars non va in Git, ma finisce comunque nello state, come abbiamo visto nella lezione 0. Generata da Terraform con random_password, stesso problema: nello state. La soluzione: la genera RDS e la mette in Secrets Manager. Nessuno la scrive, e nello state c'è solo l'indirizzo del segreto.</a:t>
             </a:r>
             <a:endParaRPr lang="en-US" dirty="0"/>
           </a:p>
@@ -963,7 +965,7 @@
           <a:p>
             <a:r>
               <a:rPr lang="en-US" dirty="0"/>
-              <a:t>Due protezioni. deletion_protection: AWS rifiuta di cancellare il database, a chiunque lo chieda, Terraform, console o CLI. Per cancellarlo bisogna prima togliere la protezione con una modifica a parte: una scelta, non un incidente. Lo snapshot finale: anche quando la cancellazione è voluta, RDS fa un'ultima foto, che resta dopo. Il nome deve essere unico nell'account, per questo gli aggiungiamo un suffisso casuale con random_id, come per il bucket della lezione 0. Attenzione: lo snapshot finale resta finché non lo cancellate voi, e si paga.</a:t>
+              <a:t>Secrets Manager è il servizio AWS per custodire segreti. Con manage_master_user_password RDS genera la password, la chiude in un segreto e la cambia da solo ogni 7 giorni. Terraform conosce solo l'ARN del segreto, il numero della cassetta. Per aprirla serve il badge giusto, cioè il permesso IAM. Lo diamo al server dell'applicazione, solo su quel segreto: è il file secrets.tf. Gli amministratori la leggono con il loro login AWS. Siccome cambia ogni 7 giorni, nessuno la copia in un file: si legge dal segreto ogni volta.</a:t>
             </a:r>
             <a:endParaRPr lang="en-US" dirty="0"/>
           </a:p>
@@ -1051,7 +1053,7 @@
           <a:p>
             <a:r>
               <a:rPr lang="en-US" dirty="0"/>
-              <a:t>Le regole di rete per il database le abbiamo scritte prima di averlo, e ora le usiamo senza toccarle. Le subnet database non hanno strade verso internet, lezione 2. La NACL accetta la 5432 dalle subnet private e fa uscire le risposte verso le porte effimere, lezione 3. Il Security Group db accetta la 5432 solo da chi ha il SG app o il SG vpn, lezione 3. E la policy di Tailscale fa passare la 5432 solo agli amministratori, lezione 5. In più publicly_accessible false e connessioni solo cifrate.</a:t>
+              <a:t>Due protezioni. deletion_protection: AWS rifiuta di cancellare il database, a chiunque lo chieda, Terraform, console o CLI. Per cancellarlo bisogna prima togliere la protezione con una modifica a parte: una scelta, non un incidente. Lo snapshot finale: anche quando la cancellazione è voluta, RDS fa un'ultima foto, che resta dopo. Il nome deve essere unico nell'account, per questo gli aggiungiamo un suffisso casuale con random_id, come per il bucket della lezione 0. Attenzione: lo snapshot finale resta finché non lo cancellate voi, e si paga.</a:t>
             </a:r>
             <a:endParaRPr lang="en-US" dirty="0"/>
           </a:p>
@@ -1139,7 +1141,7 @@
           <a:p>
             <a:r>
               <a:rPr lang="en-US" dirty="0"/>
-              <a:t>Il codice, in due parti. Il subnet group: l'elenco delle subnet database, con un'espressione for come nella lezione 3. Poi il database: identifier è il nome in AWS; engine postgres; engine_version 18, solo la versione principale, la minore la sceglie e aggiorna AWS; instance_class db.t4g.micro, piccola e Graviton come il server. Il disco: 20 GB iniziali, cresce da solo fino a 100, gp3, cifrato. Il primo database si chiama app, l'utente dbadmin, e la password non c'è: la genera RDS.</a:t>
+              <a:t>Le regole di rete per il database le abbiamo scritte prima di averlo, e ora le usiamo senza toccarle. Le subnet database non hanno strade verso internet, lezione 2. La NACL accetta la 5432 dalle subnet private e fa uscire le risposte verso le porte effimere, lezione 3. Il Security Group db accetta la 5432 solo da chi ha il SG app o il SG vpn, lezione 3. E la policy di Tailscale fa passare la 5432 solo agli amministratori, lezione 5. In più publicly_accessible false e connessioni solo cifrate.</a:t>
             </a:r>
             <a:endParaRPr lang="en-US" dirty="0"/>
           </a:p>
@@ -1227,7 +1229,7 @@
           <a:p>
             <a:r>
               <a:rPr lang="en-US" dirty="0"/>
-              <a:t>Seconda parte, dentro lo stesso blocco. La rete: il subnet group, il Security Group db e nessun indirizzo pubblico. multi_az da una variabile. I backup: 7 giorni; la finestra di backup e quella di manutenzione, in UTC, che non devono sovrapporsi. Le protezioni che abbiamo visto. E apply_immediately: alcune modifiche richiedono un riavvio, e senza questa riga RDS le rimanda alla finestra di manutenzione; in laboratorio le vogliamo subito, in produzione si toglie.</a:t>
+              <a:t>Il codice, in due parti. Il subnet group: l'elenco delle subnet database, con un'espressione for come nella lezione 3. Poi il database: identifier è il nome in AWS; engine postgres; engine_version 18, solo la versione principale, la minore la sceglie e aggiorna AWS; instance_class db.t4g.micro, piccola e Graviton come il server. Il disco: 20 GB iniziali, cresce da solo fino a 100, gp3, cifrato. Il primo database si chiama app, l'utente dbadmin, e la password non c'è: la genera RDS.</a:t>
             </a:r>
             <a:endParaRPr lang="en-US" dirty="0"/>
           </a:p>
@@ -1315,7 +1317,7 @@
           <a:p>
             <a:r>
               <a:rPr lang="en-US" dirty="0"/>
-              <a:t>Il file secrets.tf dà al server il permesso di leggere la password. Una permission policy, lezione 1, con una sola azione, GetSecretValue, su una sola risorsa: il segreto del database. Privilegio minimo. La risorsa è un attributo calcolato da AWS: master_user_secret, una lista con un solo elemento, per questo c'è zero tra quadre, e dentro secret_arn. La policy si crea e si attacca al role del server della lezione 4, che ora ha due policy: SSM e questa.</a:t>
+              <a:t>Seconda parte, dentro lo stesso blocco. La rete: il subnet group, il Security Group db e nessun indirizzo pubblico. multi_az da una variabile. I backup: 7 giorni; la finestra di backup e quella di manutenzione, in UTC, che non devono sovrapporsi. Le protezioni che abbiamo visto. E apply_immediately: alcune modifiche richiedono un riavvio, e senza questa riga RDS le rimanda alla finestra di manutenzione; in laboratorio le vogliamo subito, in produzione si toglie.</a:t>
             </a:r>
             <a:endParaRPr lang="en-US" dirty="0"/>
           </a:p>
@@ -1403,7 +1405,7 @@
           <a:p>
             <a:r>
               <a:rPr lang="en-US" dirty="0"/>
-              <a:t>L'esercizio completo, con tutti i comandi, è nella dispensa 6. Prima parte. Uno: plan e apply, poi 15-20 minuti di attesa; c'è una password nel plan? No. Due: in Secrets Manager trovate il segreto creato da RDS, con la rotazione ogni 7 giorni; nello state c'è solo l'ARN. Tre: dal server, con SSM, leggete la password dal segreto e vi collegate con psql. Quattro: da casa, come amministratore via Tailscale, funziona. Cinque: come sviluppatore la connessione scade, la blocca Tailscale. Sei: togliete le porte effimere dalla NACL, stavolta applicando, e la connessione dal server resta appesa. Poi rimettetele.</a:t>
+              <a:t>Su un PostgreSQL normale le impostazioni stanno in un file di configurazione; su RDS il file non si tocca, e le impostazioni si scrivono in un parameter group, collegato al database. La famiglia è legata alla versione principale: con 18 diventa postgres18. Un solo parametro: rds.force_ssl uguale 1, tra virgolette come testo. Dalla versione 15 è già il default, ma lo scriviamo: un'impostazione di sicurezza che dipende da un default invisibile può sparire. create_before_destroy serve quando si cambia versione: prima si crea il gruppo nuovo e lo si collega, poi si cancella il vecchio, che altrimenti non si potrebbe cancellare perché in uso. Nel database, parameter_group_name lo collega.</a:t>
             </a:r>
             <a:endParaRPr lang="en-US" dirty="0"/>
           </a:p>
@@ -1579,7 +1581,7 @@
           <a:p>
             <a:r>
               <a:rPr lang="en-US" dirty="0"/>
-              <a:t>Seconda parte. Sette: sul server lanciate un ciclo che ogni 2 secondi si collega e stampa l'indirizzo del database che ha risposto. Dal vostro computer provocate il failover con reboot-db-instance e force-failover. Guardate il ciclo: prima 10.20.20, poi errori per uno o due minuti, poi 10.20.21. Si è riconnesso da solo perché ogni volta apre una connessione nuova e rilegge il nome. Otto: negli eventi di RDS trovate inizio e fine del failover. Nove: provate a cancellare il database dalla CLI, AWS rifiuta. Dieci: pulizia in due tempi, togliete la protezione nel tfvars, apply, destroy, e cancellate lo snapshot finale che resta.</a:t>
+              <a:t>Il file secrets.tf dà al server il permesso di leggere la password. Una permission policy, lezione 1, con una sola azione, GetSecretValue, su una sola risorsa: il segreto del database. Privilegio minimo. La risorsa è un attributo calcolato da AWS: master_user_secret, una lista con un solo elemento, per questo c'è zero tra quadre, e dentro secret_arn. La policy si crea e si attacca al role del server della lezione 4, che ora ha due policy: SSM e questa.</a:t>
             </a:r>
             <a:endParaRPr lang="en-US" dirty="0"/>
           </a:p>
@@ -1667,7 +1669,7 @@
           <a:p>
             <a:r>
               <a:rPr lang="en-US" dirty="0"/>
-              <a:t>Un ripasso delle parole della lezione, una riga ciascuna.</a:t>
+              <a:t>L'esercizio completo, con tutti i comandi, è nella dispensa 6. Prima parte. Uno: plan e apply, poi 15-20 minuti di attesa; c'è una password nel plan? No. Due: in Secrets Manager trovate il segreto creato da RDS, con la rotazione ogni 7 giorni; nello state c'è solo l'ARN. Tre: dal server, con SSM, scaricate il certificato di AWS, leggete la password dal segreto e vi collegate con psql in verify-full; poi provate senza cifratura e con l'indirizzo IP al posto del nome: entrambe rifiutate, la prima dal database, la seconda dal client. Quattro: da casa, come amministratore via Tailscale, funziona. Cinque: come sviluppatore la connessione scade, la blocca Tailscale. Sei: togliete le porte effimere dalla NACL, stavolta applicando, e la connessione dal server resta appesa. Poi rimettetele.</a:t>
             </a:r>
             <a:endParaRPr lang="en-US" dirty="0"/>
           </a:p>
@@ -1755,7 +1757,7 @@
           <a:p>
             <a:r>
               <a:rPr lang="en-US" dirty="0"/>
-              <a:t>Riassumendo. Il materiale di studio è la dispensa 6, con il codice completo di rds.tf e secrets.tf spiegato blocco per blocco e l'esercizio con tutti i comandi. La prossima volta prepariamo il bucket S3 da cui il server scaricherà le nuove versioni dell'applicazione.</a:t>
+              <a:t>Seconda parte. Sette: sul server lanciate un ciclo che ogni 2 secondi si collega e stampa l'indirizzo del database che ha risposto. Dal vostro computer provocate il failover con reboot-db-instance e force-failover. Guardate il ciclo: prima 10.20.20, poi errori per uno o due minuti, poi 10.20.21. Si è riconnesso da solo perché ogni volta apre una connessione nuova e rilegge il nome. Otto: negli eventi di RDS trovate inizio e fine del failover. Nove: provate a cancellare il database dalla CLI, AWS rifiuta. Dieci: pulizia in due tempi, togliete la protezione nel tfvars, apply, destroy, e cancellate lo snapshot finale che resta.</a:t>
             </a:r>
             <a:endParaRPr lang="en-US" dirty="0"/>
           </a:p>
@@ -1779,6 +1781,182 @@
             <a:fld id="{F7021451-1387-4CA6-816F-3879F97B5CBC}" type="slidenum">
               <a:rPr lang="en-US"/>
               <a:t>22</a:t>
+            </a:fld>
+            <a:endParaRPr lang="en-US"/>
+          </a:p>
+        </p:txBody>
+      </p:sp>
+    </p:spTree>
+    <p:extLst>
+      <p:ext uri="{BB962C8B-B14F-4D97-AF65-F5344CB8AC3E}">
+        <p14:creationId xmlns:p14="http://schemas.microsoft.com/office/powerpoint/2010/main" val="1024086991"/>
+      </p:ext>
+    </p:extLst>
+  </p:cSld>
+  <p:clrMapOvr>
+    <a:masterClrMapping/>
+  </p:clrMapOvr>
+</p:notes>
+</file>
+
+<file path=ppt/notesSlides/notesSlide23.xml><?xml version="1.0" encoding="utf-8"?>
+<p:notes xmlns:a="http://schemas.openxmlformats.org/drawingml/2006/main" xmlns:r="http://schemas.openxmlformats.org/officeDocument/2006/relationships" xmlns:p="http://schemas.openxmlformats.org/presentationml/2006/main">
+  <p:cSld>
+    <p:spTree>
+      <p:nvGrpSpPr>
+        <p:cNvPr id="1" name=""/>
+        <p:cNvGrpSpPr/>
+        <p:nvPr/>
+      </p:nvGrpSpPr>
+      <p:grpSpPr>
+        <a:xfrm>
+          <a:off x="0" y="0"/>
+          <a:ext cx="0" cy="0"/>
+          <a:chOff x="0" y="0"/>
+          <a:chExt cx="0" cy="0"/>
+        </a:xfrm>
+      </p:grpSpPr>
+      <p:sp>
+        <p:nvSpPr>
+          <p:cNvPr id="2" name="Slide Image Placeholder 1"/>
+          <p:cNvSpPr>
+            <a:spLocks noGrp="1" noRot="1" noChangeAspect="1"/>
+          </p:cNvSpPr>
+          <p:nvPr>
+            <p:ph type="sldImg"/>
+          </p:nvPr>
+        </p:nvSpPr>
+        <p:spPr/>
+      </p:sp>
+      <p:sp>
+        <p:nvSpPr>
+          <p:cNvPr id="3" name="Notes Placeholder 2"/>
+          <p:cNvSpPr>
+            <a:spLocks noGrp="1"/>
+          </p:cNvSpPr>
+          <p:nvPr>
+            <p:ph type="body" idx="1"/>
+          </p:nvPr>
+        </p:nvSpPr>
+        <p:spPr/>
+        <p:txBody>
+          <a:bodyPr/>
+          <a:lstStyle/>
+          <a:p>
+            <a:r>
+              <a:rPr lang="en-US" dirty="0"/>
+              <a:t>Un ripasso delle parole della lezione, una riga ciascuna.</a:t>
+            </a:r>
+            <a:endParaRPr lang="en-US" dirty="0"/>
+          </a:p>
+        </p:txBody>
+      </p:sp>
+      <p:sp>
+        <p:nvSpPr>
+          <p:cNvPr id="4" name="Slide Number Placeholder 3"/>
+          <p:cNvSpPr>
+            <a:spLocks noGrp="1"/>
+          </p:cNvSpPr>
+          <p:nvPr>
+            <p:ph type="sldNum" sz="quarter" idx="10"/>
+          </p:nvPr>
+        </p:nvSpPr>
+        <p:spPr/>
+        <p:txBody>
+          <a:bodyPr/>
+          <a:lstStyle/>
+          <a:p>
+            <a:fld id="{F7021451-1387-4CA6-816F-3879F97B5CBC}" type="slidenum">
+              <a:rPr lang="en-US"/>
+              <a:t>23</a:t>
+            </a:fld>
+            <a:endParaRPr lang="en-US"/>
+          </a:p>
+        </p:txBody>
+      </p:sp>
+    </p:spTree>
+    <p:extLst>
+      <p:ext uri="{BB962C8B-B14F-4D97-AF65-F5344CB8AC3E}">
+        <p14:creationId xmlns:p14="http://schemas.microsoft.com/office/powerpoint/2010/main" val="1024086991"/>
+      </p:ext>
+    </p:extLst>
+  </p:cSld>
+  <p:clrMapOvr>
+    <a:masterClrMapping/>
+  </p:clrMapOvr>
+</p:notes>
+</file>
+
+<file path=ppt/notesSlides/notesSlide24.xml><?xml version="1.0" encoding="utf-8"?>
+<p:notes xmlns:a="http://schemas.openxmlformats.org/drawingml/2006/main" xmlns:r="http://schemas.openxmlformats.org/officeDocument/2006/relationships" xmlns:p="http://schemas.openxmlformats.org/presentationml/2006/main">
+  <p:cSld>
+    <p:spTree>
+      <p:nvGrpSpPr>
+        <p:cNvPr id="1" name=""/>
+        <p:cNvGrpSpPr/>
+        <p:nvPr/>
+      </p:nvGrpSpPr>
+      <p:grpSpPr>
+        <a:xfrm>
+          <a:off x="0" y="0"/>
+          <a:ext cx="0" cy="0"/>
+          <a:chOff x="0" y="0"/>
+          <a:chExt cx="0" cy="0"/>
+        </a:xfrm>
+      </p:grpSpPr>
+      <p:sp>
+        <p:nvSpPr>
+          <p:cNvPr id="2" name="Slide Image Placeholder 1"/>
+          <p:cNvSpPr>
+            <a:spLocks noGrp="1" noRot="1" noChangeAspect="1"/>
+          </p:cNvSpPr>
+          <p:nvPr>
+            <p:ph type="sldImg"/>
+          </p:nvPr>
+        </p:nvSpPr>
+        <p:spPr/>
+      </p:sp>
+      <p:sp>
+        <p:nvSpPr>
+          <p:cNvPr id="3" name="Notes Placeholder 2"/>
+          <p:cNvSpPr>
+            <a:spLocks noGrp="1"/>
+          </p:cNvSpPr>
+          <p:nvPr>
+            <p:ph type="body" idx="1"/>
+          </p:nvPr>
+        </p:nvSpPr>
+        <p:spPr/>
+        <p:txBody>
+          <a:bodyPr/>
+          <a:lstStyle/>
+          <a:p>
+            <a:r>
+              <a:rPr lang="en-US" dirty="0"/>
+              <a:t>Riassumendo. Il materiale di studio è la dispensa 6, con il codice completo di rds.tf e secrets.tf spiegato blocco per blocco e l'esercizio con tutti i comandi. La prossima volta prepariamo il bucket S3 da cui il server scaricherà le nuove versioni dell'applicazione.</a:t>
+            </a:r>
+            <a:endParaRPr lang="en-US" dirty="0"/>
+          </a:p>
+        </p:txBody>
+      </p:sp>
+      <p:sp>
+        <p:nvSpPr>
+          <p:cNvPr id="4" name="Slide Number Placeholder 3"/>
+          <p:cNvSpPr>
+            <a:spLocks noGrp="1"/>
+          </p:cNvSpPr>
+          <p:nvPr>
+            <p:ph type="sldNum" sz="quarter" idx="10"/>
+          </p:nvPr>
+        </p:nvSpPr>
+        <p:spPr/>
+        <p:txBody>
+          <a:bodyPr/>
+          <a:lstStyle/>
+          <a:p>
+            <a:fld id="{F7021451-1387-4CA6-816F-3879F97B5CBC}" type="slidenum">
+              <a:rPr lang="en-US"/>
+              <a:t>24</a:t>
             </a:fld>
             <a:endParaRPr lang="en-US"/>
           </a:p>
@@ -4574,7 +4752,7 @@
                 <a:ea typeface="Calibri" pitchFamily="34" charset="-122"/>
                 <a:cs typeface="Calibri" pitchFamily="34" charset="-120"/>
               </a:rPr>
-              <a:t>La password: dove NON metterla</a:t>
+              <a:t>In viaggio: TLS, cifrato E verificato</a:t>
             </a:r>
             <a:endParaRPr lang="en-US" sz="3200" dirty="0"/>
           </a:p>
@@ -4619,9 +4797,1035 @@
           </a:p>
         </p:txBody>
       </p:sp>
+      <p:sp>
+        <p:nvSpPr>
+          <p:cNvPr id="5" name="Shape 2"/>
+          <p:cNvSpPr/>
+          <p:nvPr/>
+        </p:nvSpPr>
+        <p:spPr>
+          <a:xfrm>
+            <a:off x="548640" y="1280160"/>
+            <a:ext cx="11094415" cy="731520"/>
+          </a:xfrm>
+          <a:prstGeom prst="roundRect">
+            <a:avLst>
+              <a:gd name="adj" fmla="val 12500"/>
+            </a:avLst>
+          </a:prstGeom>
+          <a:solidFill>
+            <a:srgbClr val="5B3FD0"/>
+          </a:solidFill>
+          <a:ln w="12700">
+            <a:solidFill>
+              <a:srgbClr val="5B3FD0"/>
+            </a:solidFill>
+            <a:prstDash val="solid"/>
+          </a:ln>
+        </p:spPr>
+      </p:sp>
+      <p:sp>
+        <p:nvSpPr>
+          <p:cNvPr id="6" name="Text 3"/>
+          <p:cNvSpPr txBox="1"/>
+          <p:nvPr/>
+        </p:nvSpPr>
+        <p:spPr>
+          <a:xfrm>
+            <a:off x="822960" y="1280160"/>
+            <a:ext cx="10545775" cy="731520"/>
+          </a:xfrm>
+          <a:prstGeom prst="rect">
+            <a:avLst/>
+          </a:prstGeom>
+          <a:noFill/>
+          <a:ln/>
+        </p:spPr>
+        <p:txBody>
+          <a:bodyPr wrap="square" lIns="0" tIns="0" rIns="0" bIns="0" rtlCol="0" anchor="ctr"/>
+          <a:lstStyle/>
+          <a:p>
+            <a:pPr algn="l" indent="0" marL="0">
+              <a:buNone/>
+            </a:pPr>
+            <a:r>
+              <a:rPr lang="en-US" sz="1700" b="1" dirty="0">
+                <a:solidFill>
+                  <a:srgbClr val="FFFFFF"/>
+                </a:solidFill>
+                <a:latin typeface="Calibri" pitchFamily="34" charset="0"/>
+                <a:ea typeface="Calibri" pitchFamily="34" charset="-122"/>
+                <a:cs typeface="Calibri" pitchFamily="34" charset="-120"/>
+              </a:rPr>
+              <a:t>Il disco cifrato protegge i dati FERMI. I dati IN VIAGGIO (query, risultati, password) li protegge TLS.</a:t>
+            </a:r>
+            <a:endParaRPr lang="en-US" sz="1700" dirty="0"/>
+          </a:p>
+        </p:txBody>
+      </p:sp>
+      <p:sp>
+        <p:nvSpPr>
+          <p:cNvPr id="7" name="Shape 4"/>
+          <p:cNvSpPr/>
+          <p:nvPr/>
+        </p:nvSpPr>
+        <p:spPr>
+          <a:xfrm>
+            <a:off x="548640" y="2240280"/>
+            <a:ext cx="5440680" cy="2103120"/>
+          </a:xfrm>
+          <a:prstGeom prst="roundRect">
+            <a:avLst>
+              <a:gd name="adj" fmla="val 5217"/>
+            </a:avLst>
+          </a:prstGeom>
+          <a:solidFill>
+            <a:srgbClr val="EEEAFB"/>
+          </a:solidFill>
+          <a:ln w="12700">
+            <a:solidFill>
+              <a:srgbClr val="EEEAFB"/>
+            </a:solidFill>
+            <a:prstDash val="solid"/>
+          </a:ln>
+        </p:spPr>
+      </p:sp>
+      <p:sp>
+        <p:nvSpPr>
+          <p:cNvPr id="8" name="Shape 5"/>
+          <p:cNvSpPr/>
+          <p:nvPr/>
+        </p:nvSpPr>
+        <p:spPr>
+          <a:xfrm>
+            <a:off x="777240" y="2468880"/>
+            <a:ext cx="548640" cy="548640"/>
+          </a:xfrm>
+          <a:prstGeom prst="ellipse">
+            <a:avLst/>
+          </a:prstGeom>
+          <a:solidFill>
+            <a:srgbClr val="5B3FD0"/>
+          </a:solidFill>
+          <a:ln w="12700">
+            <a:solidFill>
+              <a:srgbClr val="5B3FD0"/>
+            </a:solidFill>
+            <a:prstDash val="solid"/>
+          </a:ln>
+        </p:spPr>
+      </p:sp>
+      <p:pic>
+        <p:nvPicPr>
+          <p:cNvPr id="9" name="Image 0" descr="preencoded.png">    </p:cNvPr>
+          <p:cNvPicPr>
+            <a:picLocks noChangeAspect="1"/>
+          </p:cNvPicPr>
+          <p:nvPr/>
+        </p:nvPicPr>
+        <p:blipFill>
+          <a:blip r:embed="rId1"/>
+          <a:stretch>
+            <a:fillRect/>
+          </a:stretch>
+        </p:blipFill>
+        <p:spPr>
+          <a:xfrm>
+            <a:off x="914400" y="2606040"/>
+            <a:ext cx="274320" cy="274320"/>
+          </a:xfrm>
+          <a:prstGeom prst="rect">
+            <a:avLst/>
+          </a:prstGeom>
+        </p:spPr>
+      </p:pic>
+      <p:sp>
+        <p:nvSpPr>
+          <p:cNvPr id="10" name="Text 6"/>
+          <p:cNvSpPr txBox="1"/>
+          <p:nvPr/>
+        </p:nvSpPr>
+        <p:spPr>
+          <a:xfrm>
+            <a:off x="1508760" y="2468880"/>
+            <a:ext cx="4251960" cy="548640"/>
+          </a:xfrm>
+          <a:prstGeom prst="rect">
+            <a:avLst/>
+          </a:prstGeom>
+          <a:noFill/>
+          <a:ln/>
+        </p:spPr>
+        <p:txBody>
+          <a:bodyPr wrap="square" lIns="0" tIns="0" rIns="0" bIns="0" rtlCol="0" anchor="ctr"/>
+          <a:lstStyle/>
+          <a:p>
+            <a:pPr indent="0" marL="0">
+              <a:buNone/>
+            </a:pPr>
+            <a:r>
+              <a:rPr lang="en-US" sz="1800" b="1" dirty="0">
+                <a:solidFill>
+                  <a:srgbClr val="22253A"/>
+                </a:solidFill>
+                <a:latin typeface="Calibri" pitchFamily="34" charset="0"/>
+                <a:ea typeface="Calibri" pitchFamily="34" charset="-122"/>
+                <a:cs typeface="Calibri" pitchFamily="34" charset="-120"/>
+              </a:rPr>
+              <a:t>Cifrare = la busta chiusa</a:t>
+            </a:r>
+            <a:endParaRPr lang="en-US" sz="1800" dirty="0"/>
+          </a:p>
+        </p:txBody>
+      </p:sp>
+      <p:sp>
+        <p:nvSpPr>
+          <p:cNvPr id="11" name="Text 7"/>
+          <p:cNvSpPr txBox="1"/>
+          <p:nvPr/>
+        </p:nvSpPr>
+        <p:spPr>
+          <a:xfrm>
+            <a:off x="777240" y="3154680"/>
+            <a:ext cx="4983480" cy="1005840"/>
+          </a:xfrm>
+          <a:prstGeom prst="rect">
+            <a:avLst/>
+          </a:prstGeom>
+          <a:noFill/>
+          <a:ln/>
+        </p:spPr>
+        <p:txBody>
+          <a:bodyPr wrap="square" lIns="0" tIns="0" rIns="0" bIns="0" rtlCol="0" anchor="t"/>
+          <a:lstStyle/>
+          <a:p>
+            <a:pPr marL="342900" indent="-342900">
+              <a:spcAft>
+                <a:spcPts val="600"/>
+              </a:spcAft>
+              <a:buSzPct val="100000"/>
+              <a:buChar char="•"/>
+            </a:pPr>
+            <a:r>
+              <a:rPr lang="en-US" sz="1600" dirty="0">
+                <a:solidFill>
+                  <a:srgbClr val="22253A"/>
+                </a:solidFill>
+                <a:latin typeface="Calibri" pitchFamily="34" charset="0"/>
+                <a:ea typeface="Calibri" pitchFamily="34" charset="-122"/>
+                <a:cs typeface="Calibri" pitchFamily="34" charset="-120"/>
+              </a:rPr>
+              <a:t>Chi sta sulla strada non legge</a:t>
+            </a:r>
+            <a:endParaRPr lang="en-US" sz="1600" dirty="0"/>
+          </a:p>
+          <a:p>
+            <a:pPr marL="342900" indent="-342900">
+              <a:spcAft>
+                <a:spcPts val="600"/>
+              </a:spcAft>
+              <a:buSzPct val="100000"/>
+              <a:buChar char="•"/>
+            </a:pPr>
+            <a:r>
+              <a:rPr lang="en-US" sz="1600" dirty="0">
+                <a:solidFill>
+                  <a:srgbClr val="22253A"/>
+                </a:solidFill>
+                <a:latin typeface="Calibri" pitchFamily="34" charset="0"/>
+                <a:ea typeface="Calibri" pitchFamily="34" charset="-122"/>
+                <a:cs typeface="Calibri" pitchFamily="34" charset="-120"/>
+              </a:rPr>
+              <a:t>sslmode=require</a:t>
+            </a:r>
+            <a:endParaRPr lang="en-US" sz="1600" dirty="0"/>
+          </a:p>
+        </p:txBody>
+      </p:sp>
+      <p:sp>
+        <p:nvSpPr>
+          <p:cNvPr id="12" name="Shape 8"/>
+          <p:cNvSpPr/>
+          <p:nvPr/>
+        </p:nvSpPr>
+        <p:spPr>
+          <a:xfrm>
+            <a:off x="6172200" y="2240280"/>
+            <a:ext cx="5468112" cy="2103120"/>
+          </a:xfrm>
+          <a:prstGeom prst="roundRect">
+            <a:avLst>
+              <a:gd name="adj" fmla="val 5217"/>
+            </a:avLst>
+          </a:prstGeom>
+          <a:solidFill>
+            <a:srgbClr val="E5F4EC"/>
+          </a:solidFill>
+          <a:ln w="12700">
+            <a:solidFill>
+              <a:srgbClr val="E5F4EC"/>
+            </a:solidFill>
+            <a:prstDash val="solid"/>
+          </a:ln>
+        </p:spPr>
+      </p:sp>
+      <p:sp>
+        <p:nvSpPr>
+          <p:cNvPr id="13" name="Shape 9"/>
+          <p:cNvSpPr/>
+          <p:nvPr/>
+        </p:nvSpPr>
+        <p:spPr>
+          <a:xfrm>
+            <a:off x="6400800" y="2468880"/>
+            <a:ext cx="548640" cy="548640"/>
+          </a:xfrm>
+          <a:prstGeom prst="ellipse">
+            <a:avLst/>
+          </a:prstGeom>
+          <a:solidFill>
+            <a:srgbClr val="2E9E6B"/>
+          </a:solidFill>
+          <a:ln w="12700">
+            <a:solidFill>
+              <a:srgbClr val="2E9E6B"/>
+            </a:solidFill>
+            <a:prstDash val="solid"/>
+          </a:ln>
+        </p:spPr>
+      </p:sp>
+      <p:pic>
+        <p:nvPicPr>
+          <p:cNvPr id="14" name="Image 1" descr="preencoded.png">    </p:cNvPr>
+          <p:cNvPicPr>
+            <a:picLocks noChangeAspect="1"/>
+          </p:cNvPicPr>
+          <p:nvPr/>
+        </p:nvPicPr>
+        <p:blipFill>
+          <a:blip r:embed="rId2"/>
+          <a:stretch>
+            <a:fillRect/>
+          </a:stretch>
+        </p:blipFill>
+        <p:spPr>
+          <a:xfrm>
+            <a:off x="6537960" y="2606040"/>
+            <a:ext cx="274320" cy="274320"/>
+          </a:xfrm>
+          <a:prstGeom prst="rect">
+            <a:avLst/>
+          </a:prstGeom>
+        </p:spPr>
+      </p:pic>
+      <p:sp>
+        <p:nvSpPr>
+          <p:cNvPr id="15" name="Text 10"/>
+          <p:cNvSpPr txBox="1"/>
+          <p:nvPr/>
+        </p:nvSpPr>
+        <p:spPr>
+          <a:xfrm>
+            <a:off x="7132320" y="2468880"/>
+            <a:ext cx="4279392" cy="548640"/>
+          </a:xfrm>
+          <a:prstGeom prst="rect">
+            <a:avLst/>
+          </a:prstGeom>
+          <a:noFill/>
+          <a:ln/>
+        </p:spPr>
+        <p:txBody>
+          <a:bodyPr wrap="square" lIns="0" tIns="0" rIns="0" bIns="0" rtlCol="0" anchor="ctr"/>
+          <a:lstStyle/>
+          <a:p>
+            <a:pPr indent="0" marL="0">
+              <a:buNone/>
+            </a:pPr>
+            <a:r>
+              <a:rPr lang="en-US" sz="1800" b="1" dirty="0">
+                <a:solidFill>
+                  <a:srgbClr val="22253A"/>
+                </a:solidFill>
+                <a:latin typeface="Calibri" pitchFamily="34" charset="0"/>
+                <a:ea typeface="Calibri" pitchFamily="34" charset="-122"/>
+                <a:cs typeface="Calibri" pitchFamily="34" charset="-120"/>
+              </a:rPr>
+              <a:t>Verificare = controllare il documento</a:t>
+            </a:r>
+            <a:endParaRPr lang="en-US" sz="1800" dirty="0"/>
+          </a:p>
+        </p:txBody>
+      </p:sp>
+      <p:sp>
+        <p:nvSpPr>
+          <p:cNvPr id="16" name="Text 11"/>
+          <p:cNvSpPr txBox="1"/>
+          <p:nvPr/>
+        </p:nvSpPr>
+        <p:spPr>
+          <a:xfrm>
+            <a:off x="6400800" y="3154680"/>
+            <a:ext cx="5010912" cy="1005840"/>
+          </a:xfrm>
+          <a:prstGeom prst="rect">
+            <a:avLst/>
+          </a:prstGeom>
+          <a:noFill/>
+          <a:ln/>
+        </p:spPr>
+        <p:txBody>
+          <a:bodyPr wrap="square" lIns="0" tIns="0" rIns="0" bIns="0" rtlCol="0" anchor="t"/>
+          <a:lstStyle/>
+          <a:p>
+            <a:pPr marL="342900" indent="-342900">
+              <a:spcAft>
+                <a:spcPts val="600"/>
+              </a:spcAft>
+              <a:buSzPct val="100000"/>
+              <a:buChar char="•"/>
+            </a:pPr>
+            <a:r>
+              <a:rPr lang="en-US" sz="1600" dirty="0">
+                <a:solidFill>
+                  <a:srgbClr val="22253A"/>
+                </a:solidFill>
+                <a:latin typeface="Calibri" pitchFamily="34" charset="0"/>
+                <a:ea typeface="Calibri" pitchFamily="34" charset="-122"/>
+                <a:cs typeface="Calibri" pitchFamily="34" charset="-120"/>
+              </a:rPr>
+              <a:t>Parli con il database VERO, non con un impostore</a:t>
+            </a:r>
+            <a:endParaRPr lang="en-US" sz="1600" dirty="0"/>
+          </a:p>
+          <a:p>
+            <a:pPr marL="342900" indent="-342900">
+              <a:spcAft>
+                <a:spcPts val="600"/>
+              </a:spcAft>
+              <a:buSzPct val="100000"/>
+              <a:buChar char="•"/>
+            </a:pPr>
+            <a:r>
+              <a:rPr lang="en-US" sz="1600" dirty="0">
+                <a:solidFill>
+                  <a:srgbClr val="22253A"/>
+                </a:solidFill>
+                <a:latin typeface="Calibri" pitchFamily="34" charset="0"/>
+                <a:ea typeface="Calibri" pitchFamily="34" charset="-122"/>
+                <a:cs typeface="Calibri" pitchFamily="34" charset="-120"/>
+              </a:rPr>
+              <a:t>sslmode=verify-full + certificato di AWS</a:t>
+            </a:r>
+            <a:endParaRPr lang="en-US" sz="1600" dirty="0"/>
+          </a:p>
+        </p:txBody>
+      </p:sp>
       <p:graphicFrame>
         <p:nvGraphicFramePr>
           <p:cNvPr id="13" name="Table 0"/>
+          <p:cNvGraphicFramePr>
+            <a:graphicFrameLocks noGrp="1"/>
+          </p:cNvGraphicFramePr>
+          <p:nvPr>
+            <p:extLst>
+              <p:ext uri="{D42A27DB-BD31-4B8C-83A1-F6EECF244321}">
+                <p14:modId xmlns:p14="http://schemas.microsoft.com/office/powerpoint/2010/main" val="1579011935"/>
+              </p:ext>
+            </p:extLst>
+          </p:nvPr>
+        </p:nvGraphicFramePr>
+        <p:xfrm>
+          <a:off x="548640" y="4572000"/>
+          <a:ext cx="11094415" cy="914400"/>
+        </p:xfrm>
+        <a:graphic>
+          <a:graphicData uri="http://schemas.openxmlformats.org/drawingml/2006/table">
+            <a:tbl>
+              <a:tblPr/>
+              <a:tblGrid>
+                <a:gridCol w="2743200"/>
+                <a:gridCol w="8348472"/>
+              </a:tblGrid>
+              <a:tr h="475488">
+                <a:tc>
+                  <a:txBody>
+                    <a:bodyPr/>
+                    <a:lstStyle/>
+                    <a:p>
+                      <a:pPr indent="0" marL="0">
+                        <a:buNone/>
+                      </a:pPr>
+                      <a:r>
+                        <a:rPr lang="en-US" sz="1500" b="1" dirty="0">
+                          <a:solidFill>
+                            <a:srgbClr val="FFFFFF"/>
+                          </a:solidFill>
+                          <a:latin typeface="Calibri" pitchFamily="34" charset="0"/>
+                          <a:ea typeface="Calibri" pitchFamily="34" charset="-122"/>
+                          <a:cs typeface="Calibri" pitchFamily="34" charset="-120"/>
+                        </a:rPr>
+                        <a:t>Lato</a:t>
+                      </a:r>
+                      <a:endParaRPr lang="en-US" sz="1500" dirty="0">
+                        <a:latin typeface="Calibri" charset="0"/>
+                        <a:ea typeface="Calibri" charset="0"/>
+                        <a:cs typeface="Calibri" charset="0"/>
+                      </a:endParaRPr>
+                    </a:p>
+                  </a:txBody>
+                  <a:tcPr marL="73152" marR="73152" marT="73152" marB="73152" anchor="ctr">
+                    <a:lnL w="9525" cap="flat" cmpd="sng" algn="ctr">
+                      <a:solidFill>
+                        <a:srgbClr val="D9D6EC"/>
+                      </a:solidFill>
+                      <a:prstDash val="solid"/>
+                      <a:round/>
+                      <a:headEnd type="none" w="med" len="med"/>
+                      <a:tailEnd type="none" w="med" len="med"/>
+                    </a:lnL>
+                    <a:lnR w="9525" cap="flat" cmpd="sng" algn="ctr">
+                      <a:solidFill>
+                        <a:srgbClr val="D9D6EC"/>
+                      </a:solidFill>
+                      <a:prstDash val="solid"/>
+                      <a:round/>
+                      <a:headEnd type="none" w="med" len="med"/>
+                      <a:tailEnd type="none" w="med" len="med"/>
+                    </a:lnR>
+                    <a:lnT w="9525" cap="flat" cmpd="sng" algn="ctr">
+                      <a:solidFill>
+                        <a:srgbClr val="D9D6EC"/>
+                      </a:solidFill>
+                      <a:prstDash val="solid"/>
+                      <a:round/>
+                      <a:headEnd type="none" w="med" len="med"/>
+                      <a:tailEnd type="none" w="med" len="med"/>
+                    </a:lnT>
+                    <a:lnB w="9525" cap="flat" cmpd="sng" algn="ctr">
+                      <a:solidFill>
+                        <a:srgbClr val="D9D6EC"/>
+                      </a:solidFill>
+                      <a:prstDash val="solid"/>
+                      <a:round/>
+                      <a:headEnd type="none" w="med" len="med"/>
+                      <a:tailEnd type="none" w="med" len="med"/>
+                    </a:lnB>
+                    <a:solidFill>
+                      <a:srgbClr val="5B3FD0"/>
+                    </a:solidFill>
+                  </a:tcPr>
+                </a:tc>
+                <a:tc>
+                  <a:txBody>
+                    <a:bodyPr/>
+                    <a:lstStyle/>
+                    <a:p>
+                      <a:pPr indent="0" marL="0">
+                        <a:buNone/>
+                      </a:pPr>
+                      <a:r>
+                        <a:rPr lang="en-US" sz="1500" b="1" dirty="0">
+                          <a:solidFill>
+                            <a:srgbClr val="FFFFFF"/>
+                          </a:solidFill>
+                          <a:latin typeface="Calibri" pitchFamily="34" charset="0"/>
+                          <a:ea typeface="Calibri" pitchFamily="34" charset="-122"/>
+                          <a:cs typeface="Calibri" pitchFamily="34" charset="-120"/>
+                        </a:rPr>
+                        <a:t>Cosa facciamo</a:t>
+                      </a:r>
+                      <a:endParaRPr lang="en-US" sz="1500" dirty="0">
+                        <a:latin typeface="Calibri" charset="0"/>
+                        <a:ea typeface="Calibri" charset="0"/>
+                        <a:cs typeface="Calibri" charset="0"/>
+                      </a:endParaRPr>
+                    </a:p>
+                  </a:txBody>
+                  <a:tcPr marL="73152" marR="73152" marT="73152" marB="73152" anchor="ctr">
+                    <a:lnL w="9525" cap="flat" cmpd="sng" algn="ctr">
+                      <a:solidFill>
+                        <a:srgbClr val="D9D6EC"/>
+                      </a:solidFill>
+                      <a:prstDash val="solid"/>
+                      <a:round/>
+                      <a:headEnd type="none" w="med" len="med"/>
+                      <a:tailEnd type="none" w="med" len="med"/>
+                    </a:lnL>
+                    <a:lnR w="9525" cap="flat" cmpd="sng" algn="ctr">
+                      <a:solidFill>
+                        <a:srgbClr val="D9D6EC"/>
+                      </a:solidFill>
+                      <a:prstDash val="solid"/>
+                      <a:round/>
+                      <a:headEnd type="none" w="med" len="med"/>
+                      <a:tailEnd type="none" w="med" len="med"/>
+                    </a:lnR>
+                    <a:lnT w="9525" cap="flat" cmpd="sng" algn="ctr">
+                      <a:solidFill>
+                        <a:srgbClr val="D9D6EC"/>
+                      </a:solidFill>
+                      <a:prstDash val="solid"/>
+                      <a:round/>
+                      <a:headEnd type="none" w="med" len="med"/>
+                      <a:tailEnd type="none" w="med" len="med"/>
+                    </a:lnT>
+                    <a:lnB w="9525" cap="flat" cmpd="sng" algn="ctr">
+                      <a:solidFill>
+                        <a:srgbClr val="D9D6EC"/>
+                      </a:solidFill>
+                      <a:prstDash val="solid"/>
+                      <a:round/>
+                      <a:headEnd type="none" w="med" len="med"/>
+                      <a:tailEnd type="none" w="med" len="med"/>
+                    </a:lnB>
+                    <a:solidFill>
+                      <a:srgbClr val="5B3FD0"/>
+                    </a:solidFill>
+                  </a:tcPr>
+                </a:tc>
+              </a:tr>
+              <a:tr h="475488">
+                <a:tc>
+                  <a:txBody>
+                    <a:bodyPr/>
+                    <a:lstStyle/>
+                    <a:p>
+                      <a:pPr indent="0" marL="0">
+                        <a:buNone/>
+                      </a:pPr>
+                      <a:r>
+                        <a:rPr lang="en-US" sz="1500" b="1" dirty="0">
+                          <a:solidFill>
+                            <a:srgbClr val="22253A"/>
+                          </a:solidFill>
+                          <a:latin typeface="Calibri" pitchFamily="34" charset="0"/>
+                          <a:ea typeface="Calibri" pitchFamily="34" charset="-122"/>
+                          <a:cs typeface="Calibri" pitchFamily="34" charset="-120"/>
+                        </a:rPr>
+                        <a:t>database</a:t>
+                      </a:r>
+                      <a:endParaRPr lang="en-US" sz="1500" dirty="0">
+                        <a:latin typeface="Calibri" charset="0"/>
+                        <a:ea typeface="Calibri" charset="0"/>
+                        <a:cs typeface="Calibri" charset="0"/>
+                      </a:endParaRPr>
+                    </a:p>
+                  </a:txBody>
+                  <a:tcPr marL="73152" marR="73152" marT="73152" marB="73152" anchor="ctr">
+                    <a:lnL w="9525" cap="flat" cmpd="sng" algn="ctr">
+                      <a:solidFill>
+                        <a:srgbClr val="D9D6EC"/>
+                      </a:solidFill>
+                      <a:prstDash val="solid"/>
+                      <a:round/>
+                      <a:headEnd type="none" w="med" len="med"/>
+                      <a:tailEnd type="none" w="med" len="med"/>
+                    </a:lnL>
+                    <a:lnR w="9525" cap="flat" cmpd="sng" algn="ctr">
+                      <a:solidFill>
+                        <a:srgbClr val="D9D6EC"/>
+                      </a:solidFill>
+                      <a:prstDash val="solid"/>
+                      <a:round/>
+                      <a:headEnd type="none" w="med" len="med"/>
+                      <a:tailEnd type="none" w="med" len="med"/>
+                    </a:lnR>
+                    <a:lnT w="9525" cap="flat" cmpd="sng" algn="ctr">
+                      <a:solidFill>
+                        <a:srgbClr val="D9D6EC"/>
+                      </a:solidFill>
+                      <a:prstDash val="solid"/>
+                      <a:round/>
+                      <a:headEnd type="none" w="med" len="med"/>
+                      <a:tailEnd type="none" w="med" len="med"/>
+                    </a:lnT>
+                    <a:lnB w="9525" cap="flat" cmpd="sng" algn="ctr">
+                      <a:solidFill>
+                        <a:srgbClr val="D9D6EC"/>
+                      </a:solidFill>
+                      <a:prstDash val="solid"/>
+                      <a:round/>
+                      <a:headEnd type="none" w="med" len="med"/>
+                      <a:tailEnd type="none" w="med" len="med"/>
+                    </a:lnB>
+                    <a:solidFill>
+                      <a:srgbClr val="FFFFFF"/>
+                    </a:solidFill>
+                  </a:tcPr>
+                </a:tc>
+                <a:tc>
+                  <a:txBody>
+                    <a:bodyPr/>
+                    <a:lstStyle/>
+                    <a:p>
+                      <a:pPr indent="0" marL="0">
+                        <a:buNone/>
+                      </a:pPr>
+                      <a:r>
+                        <a:rPr lang="en-US" sz="1500" dirty="0">
+                          <a:solidFill>
+                            <a:srgbClr val="22253A"/>
+                          </a:solidFill>
+                          <a:latin typeface="Calibri" pitchFamily="34" charset="0"/>
+                          <a:ea typeface="Calibri" pitchFamily="34" charset="-122"/>
+                          <a:cs typeface="Calibri" pitchFamily="34" charset="-120"/>
+                        </a:rPr>
+                        <a:t>rds.force_ssl = 1: rifiuta ogni connessione in chiaro (nel nostro parameter group)</a:t>
+                      </a:r>
+                      <a:endParaRPr lang="en-US" sz="1500" dirty="0">
+                        <a:latin typeface="Calibri" charset="0"/>
+                        <a:ea typeface="Calibri" charset="0"/>
+                        <a:cs typeface="Calibri" charset="0"/>
+                      </a:endParaRPr>
+                    </a:p>
+                  </a:txBody>
+                  <a:tcPr marL="73152" marR="73152" marT="73152" marB="73152" anchor="ctr">
+                    <a:lnL w="9525" cap="flat" cmpd="sng" algn="ctr">
+                      <a:solidFill>
+                        <a:srgbClr val="D9D6EC"/>
+                      </a:solidFill>
+                      <a:prstDash val="solid"/>
+                      <a:round/>
+                      <a:headEnd type="none" w="med" len="med"/>
+                      <a:tailEnd type="none" w="med" len="med"/>
+                    </a:lnL>
+                    <a:lnR w="9525" cap="flat" cmpd="sng" algn="ctr">
+                      <a:solidFill>
+                        <a:srgbClr val="D9D6EC"/>
+                      </a:solidFill>
+                      <a:prstDash val="solid"/>
+                      <a:round/>
+                      <a:headEnd type="none" w="med" len="med"/>
+                      <a:tailEnd type="none" w="med" len="med"/>
+                    </a:lnR>
+                    <a:lnT w="9525" cap="flat" cmpd="sng" algn="ctr">
+                      <a:solidFill>
+                        <a:srgbClr val="D9D6EC"/>
+                      </a:solidFill>
+                      <a:prstDash val="solid"/>
+                      <a:round/>
+                      <a:headEnd type="none" w="med" len="med"/>
+                      <a:tailEnd type="none" w="med" len="med"/>
+                    </a:lnT>
+                    <a:lnB w="9525" cap="flat" cmpd="sng" algn="ctr">
+                      <a:solidFill>
+                        <a:srgbClr val="D9D6EC"/>
+                      </a:solidFill>
+                      <a:prstDash val="solid"/>
+                      <a:round/>
+                      <a:headEnd type="none" w="med" len="med"/>
+                      <a:tailEnd type="none" w="med" len="med"/>
+                    </a:lnB>
+                    <a:solidFill>
+                      <a:srgbClr val="FFFFFF"/>
+                    </a:solidFill>
+                  </a:tcPr>
+                </a:tc>
+              </a:tr>
+              <a:tr h="475488">
+                <a:tc>
+                  <a:txBody>
+                    <a:bodyPr/>
+                    <a:lstStyle/>
+                    <a:p>
+                      <a:pPr indent="0" marL="0">
+                        <a:buNone/>
+                      </a:pPr>
+                      <a:r>
+                        <a:rPr lang="en-US" sz="1500" b="1" dirty="0">
+                          <a:solidFill>
+                            <a:srgbClr val="22253A"/>
+                          </a:solidFill>
+                          <a:latin typeface="Calibri" pitchFamily="34" charset="0"/>
+                          <a:ea typeface="Calibri" pitchFamily="34" charset="-122"/>
+                          <a:cs typeface="Calibri" pitchFamily="34" charset="-120"/>
+                        </a:rPr>
+                        <a:t>applicazione e admin</a:t>
+                      </a:r>
+                      <a:endParaRPr lang="en-US" sz="1500" dirty="0">
+                        <a:latin typeface="Calibri" charset="0"/>
+                        <a:ea typeface="Calibri" charset="0"/>
+                        <a:cs typeface="Calibri" charset="0"/>
+                      </a:endParaRPr>
+                    </a:p>
+                  </a:txBody>
+                  <a:tcPr marL="73152" marR="73152" marT="73152" marB="73152" anchor="ctr">
+                    <a:lnL w="9525" cap="flat" cmpd="sng" algn="ctr">
+                      <a:solidFill>
+                        <a:srgbClr val="D9D6EC"/>
+                      </a:solidFill>
+                      <a:prstDash val="solid"/>
+                      <a:round/>
+                      <a:headEnd type="none" w="med" len="med"/>
+                      <a:tailEnd type="none" w="med" len="med"/>
+                    </a:lnL>
+                    <a:lnR w="9525" cap="flat" cmpd="sng" algn="ctr">
+                      <a:solidFill>
+                        <a:srgbClr val="D9D6EC"/>
+                      </a:solidFill>
+                      <a:prstDash val="solid"/>
+                      <a:round/>
+                      <a:headEnd type="none" w="med" len="med"/>
+                      <a:tailEnd type="none" w="med" len="med"/>
+                    </a:lnR>
+                    <a:lnT w="9525" cap="flat" cmpd="sng" algn="ctr">
+                      <a:solidFill>
+                        <a:srgbClr val="D9D6EC"/>
+                      </a:solidFill>
+                      <a:prstDash val="solid"/>
+                      <a:round/>
+                      <a:headEnd type="none" w="med" len="med"/>
+                      <a:tailEnd type="none" w="med" len="med"/>
+                    </a:lnT>
+                    <a:lnB w="9525" cap="flat" cmpd="sng" algn="ctr">
+                      <a:solidFill>
+                        <a:srgbClr val="D9D6EC"/>
+                      </a:solidFill>
+                      <a:prstDash val="solid"/>
+                      <a:round/>
+                      <a:headEnd type="none" w="med" len="med"/>
+                      <a:tailEnd type="none" w="med" len="med"/>
+                    </a:lnB>
+                    <a:solidFill>
+                      <a:srgbClr val="F7F6FD"/>
+                    </a:solidFill>
+                  </a:tcPr>
+                </a:tc>
+                <a:tc>
+                  <a:txBody>
+                    <a:bodyPr/>
+                    <a:lstStyle/>
+                    <a:p>
+                      <a:pPr indent="0" marL="0">
+                        <a:buNone/>
+                      </a:pPr>
+                      <a:r>
+                        <a:rPr lang="en-US" sz="1500" dirty="0">
+                          <a:solidFill>
+                            <a:srgbClr val="22253A"/>
+                          </a:solidFill>
+                          <a:latin typeface="Calibri" pitchFamily="34" charset="0"/>
+                          <a:ea typeface="Calibri" pitchFamily="34" charset="-122"/>
+                          <a:cs typeface="Calibri" pitchFamily="34" charset="-120"/>
+                        </a:rPr>
+                        <a:t>sslmode=verify-full con global-bundle.pem, collegandosi al NOME dell'endpoint</a:t>
+                      </a:r>
+                      <a:endParaRPr lang="en-US" sz="1500" dirty="0">
+                        <a:latin typeface="Calibri" charset="0"/>
+                        <a:ea typeface="Calibri" charset="0"/>
+                        <a:cs typeface="Calibri" charset="0"/>
+                      </a:endParaRPr>
+                    </a:p>
+                  </a:txBody>
+                  <a:tcPr marL="73152" marR="73152" marT="73152" marB="73152" anchor="ctr">
+                    <a:lnL w="9525" cap="flat" cmpd="sng" algn="ctr">
+                      <a:solidFill>
+                        <a:srgbClr val="D9D6EC"/>
+                      </a:solidFill>
+                      <a:prstDash val="solid"/>
+                      <a:round/>
+                      <a:headEnd type="none" w="med" len="med"/>
+                      <a:tailEnd type="none" w="med" len="med"/>
+                    </a:lnL>
+                    <a:lnR w="9525" cap="flat" cmpd="sng" algn="ctr">
+                      <a:solidFill>
+                        <a:srgbClr val="D9D6EC"/>
+                      </a:solidFill>
+                      <a:prstDash val="solid"/>
+                      <a:round/>
+                      <a:headEnd type="none" w="med" len="med"/>
+                      <a:tailEnd type="none" w="med" len="med"/>
+                    </a:lnR>
+                    <a:lnT w="9525" cap="flat" cmpd="sng" algn="ctr">
+                      <a:solidFill>
+                        <a:srgbClr val="D9D6EC"/>
+                      </a:solidFill>
+                      <a:prstDash val="solid"/>
+                      <a:round/>
+                      <a:headEnd type="none" w="med" len="med"/>
+                      <a:tailEnd type="none" w="med" len="med"/>
+                    </a:lnT>
+                    <a:lnB w="9525" cap="flat" cmpd="sng" algn="ctr">
+                      <a:solidFill>
+                        <a:srgbClr val="D9D6EC"/>
+                      </a:solidFill>
+                      <a:prstDash val="solid"/>
+                      <a:round/>
+                      <a:headEnd type="none" w="med" len="med"/>
+                      <a:tailEnd type="none" w="med" len="med"/>
+                    </a:lnB>
+                    <a:solidFill>
+                      <a:srgbClr val="F7F6FD"/>
+                    </a:solidFill>
+                  </a:tcPr>
+                </a:tc>
+              </a:tr>
+            </a:tbl>
+          </a:graphicData>
+        </a:graphic>
+      </p:graphicFrame>
+      <p:sp>
+        <p:nvSpPr>
+          <p:cNvPr id="25" name="Slide Number Placeholder 0"/>
+          <p:cNvSpPr>
+            <a:spLocks noGrp="1"/>
+          </p:cNvSpPr>
+          <p:nvPr>
+            <p:ph type="sldNum" sz="quarter" idx="4294967295"/>
+          </p:nvPr>
+        </p:nvSpPr>
+        <p:spPr>
+          <a:xfrm>
+            <a:off x="11155680" y="6400800"/>
+            <a:ext cx="548640" cy="274320"/>
+          </a:xfrm>
+          <a:prstGeom prst="rect">
+            <a:avLst/>
+          </a:prstGeom>
+          <a:extLst>
+            <a:ext uri="{C572A759-6A51-4108-AA02-DFA0A04FC94B}">
+              <ma14:wrappingTextBoxFlag xmlns:ma14="http://schemas.microsoft.com/office/mac/drawingml/2011/main" val="0"/>
+            </a:ext>
+          </a:extLst>
+        </p:spPr>
+        <p:txBody>
+          <a:bodyPr/>
+          <a:lstStyle>
+            <a:lvl1pPr>
+              <a:defRPr sz="1000">
+                <a:solidFill>
+                  <a:srgbClr val="5F6478"/>
+                </a:solidFill>
+                <a:latin typeface="Calibri"/>
+                <a:ea typeface="Calibri"/>
+                <a:cs typeface="Calibri"/>
+              </a:defRPr>
+            </a:lvl1pPr>
+          </a:lstStyle>
+          <a:p>
+            <a:pPr algn="r"/>
+            <a:fld id="{F7021451-1387-4CA6-816F-3879F97B5CBC}" type="slidenum">
+              <a:rPr b="0" lang="en-US"/>
+              <a:t>12</a:t>
+            </a:fld>
+            <a:endParaRPr lang="en-US"/>
+          </a:p>
+        </p:txBody>
+      </p:sp>
+    </p:spTree>
+  </p:cSld>
+  <p:clrMapOvr>
+    <a:masterClrMapping/>
+  </p:clrMapOvr>
+</p:sld>
+</file>
+
+<file path=ppt/slides/slide13.xml><?xml version="1.0" encoding="utf-8"?>
+<p:sld xmlns:a="http://schemas.openxmlformats.org/drawingml/2006/main" xmlns:r="http://schemas.openxmlformats.org/officeDocument/2006/relationships" xmlns:p="http://schemas.openxmlformats.org/presentationml/2006/main">
+  <p:cSld name="Slide 13">
+    <p:bg>
+      <p:bgPr>
+        <a:solidFill>
+          <a:srgbClr val="FFFFFF"/>
+        </a:solidFill>
+      </p:bgPr>
+    </p:bg>
+    <p:spTree>
+      <p:nvGrpSpPr>
+        <p:cNvPr id="1" name=""/>
+        <p:cNvGrpSpPr/>
+        <p:nvPr/>
+      </p:nvGrpSpPr>
+      <p:grpSpPr>
+        <a:xfrm>
+          <a:off x="0" y="0"/>
+          <a:ext cx="0" cy="0"/>
+          <a:chOff x="0" y="0"/>
+          <a:chExt cx="0" cy="0"/>
+        </a:xfrm>
+      </p:grpSpPr>
+      <p:sp>
+        <p:nvSpPr>
+          <p:cNvPr id="2" name="Text 0"/>
+          <p:cNvSpPr txBox="1"/>
+          <p:nvPr/>
+        </p:nvSpPr>
+        <p:spPr>
+          <a:xfrm>
+            <a:off x="548640" y="365760"/>
+            <a:ext cx="11094415" cy="777240"/>
+          </a:xfrm>
+          <a:prstGeom prst="rect">
+            <a:avLst/>
+          </a:prstGeom>
+          <a:noFill/>
+          <a:ln/>
+        </p:spPr>
+        <p:txBody>
+          <a:bodyPr wrap="square" lIns="0" tIns="0" rIns="0" bIns="0" rtlCol="0" anchor="ctr"/>
+          <a:lstStyle/>
+          <a:p>
+            <a:pPr indent="0" marL="0">
+              <a:buNone/>
+            </a:pPr>
+            <a:r>
+              <a:rPr lang="en-US" sz="3200" b="1" dirty="0">
+                <a:solidFill>
+                  <a:srgbClr val="22253A"/>
+                </a:solidFill>
+                <a:latin typeface="Calibri" pitchFamily="34" charset="0"/>
+                <a:ea typeface="Calibri" pitchFamily="34" charset="-122"/>
+                <a:cs typeface="Calibri" pitchFamily="34" charset="-120"/>
+              </a:rPr>
+              <a:t>La password: dove NON metterla</a:t>
+            </a:r>
+            <a:endParaRPr lang="en-US" sz="3200" dirty="0"/>
+          </a:p>
+        </p:txBody>
+      </p:sp>
+      <p:sp>
+        <p:nvSpPr>
+          <p:cNvPr id="3" name="Text 1"/>
+          <p:cNvSpPr txBox="1"/>
+          <p:nvPr/>
+        </p:nvSpPr>
+        <p:spPr>
+          <a:xfrm>
+            <a:off x="548640" y="6400800"/>
+            <a:ext cx="7315200" cy="274320"/>
+          </a:xfrm>
+          <a:prstGeom prst="rect">
+            <a:avLst/>
+          </a:prstGeom>
+          <a:noFill/>
+          <a:ln/>
+        </p:spPr>
+        <p:txBody>
+          <a:bodyPr wrap="square" lIns="0" tIns="0" rIns="0" bIns="0" rtlCol="0" anchor="ctr"/>
+          <a:lstStyle/>
+          <a:p>
+            <a:pPr indent="0" marL="0">
+              <a:buNone/>
+            </a:pPr>
+            <a:r>
+              <a:rPr lang="en-US" sz="1000" dirty="0">
+                <a:solidFill>
+                  <a:srgbClr val="5F6478"/>
+                </a:solidFill>
+                <a:latin typeface="Calibri" pitchFamily="34" charset="0"/>
+                <a:ea typeface="Calibri" pitchFamily="34" charset="-122"/>
+                <a:cs typeface="Calibri" pitchFamily="34" charset="-120"/>
+              </a:rPr>
+              <a:t>Dispensa 6 · RDS PostgreSQL in alta affidabilità</a:t>
+            </a:r>
+            <a:endParaRPr lang="en-US" sz="1000" dirty="0"/>
+          </a:p>
+        </p:txBody>
+      </p:sp>
+      <p:graphicFrame>
+        <p:nvGraphicFramePr>
+          <p:cNvPr id="14" name="Table 0"/>
           <p:cNvGraphicFramePr>
             <a:graphicFrameLocks noGrp="1"/>
           </p:cNvGraphicFramePr>
@@ -5447,973 +6651,6 @@
             <a:pPr algn="r"/>
             <a:fld id="{F7021451-1387-4CA6-816F-3879F97B5CBC}" type="slidenum">
               <a:rPr b="0" lang="en-US"/>
-              <a:t>12</a:t>
-            </a:fld>
-            <a:endParaRPr lang="en-US"/>
-          </a:p>
-        </p:txBody>
-      </p:sp>
-    </p:spTree>
-  </p:cSld>
-  <p:clrMapOvr>
-    <a:masterClrMapping/>
-  </p:clrMapOvr>
-</p:sld>
-</file>
-
-<file path=ppt/slides/slide13.xml><?xml version="1.0" encoding="utf-8"?>
-<p:sld xmlns:a="http://schemas.openxmlformats.org/drawingml/2006/main" xmlns:r="http://schemas.openxmlformats.org/officeDocument/2006/relationships" xmlns:p="http://schemas.openxmlformats.org/presentationml/2006/main">
-  <p:cSld name="Slide 13">
-    <p:bg>
-      <p:bgPr>
-        <a:solidFill>
-          <a:srgbClr val="FFFFFF"/>
-        </a:solidFill>
-      </p:bgPr>
-    </p:bg>
-    <p:spTree>
-      <p:nvGrpSpPr>
-        <p:cNvPr id="1" name=""/>
-        <p:cNvGrpSpPr/>
-        <p:nvPr/>
-      </p:nvGrpSpPr>
-      <p:grpSpPr>
-        <a:xfrm>
-          <a:off x="0" y="0"/>
-          <a:ext cx="0" cy="0"/>
-          <a:chOff x="0" y="0"/>
-          <a:chExt cx="0" cy="0"/>
-        </a:xfrm>
-      </p:grpSpPr>
-      <p:sp>
-        <p:nvSpPr>
-          <p:cNvPr id="2" name="Text 0"/>
-          <p:cNvSpPr txBox="1"/>
-          <p:nvPr/>
-        </p:nvSpPr>
-        <p:spPr>
-          <a:xfrm>
-            <a:off x="548640" y="365760"/>
-            <a:ext cx="11094415" cy="777240"/>
-          </a:xfrm>
-          <a:prstGeom prst="rect">
-            <a:avLst/>
-          </a:prstGeom>
-          <a:noFill/>
-          <a:ln/>
-        </p:spPr>
-        <p:txBody>
-          <a:bodyPr wrap="square" lIns="0" tIns="0" rIns="0" bIns="0" rtlCol="0" anchor="ctr"/>
-          <a:lstStyle/>
-          <a:p>
-            <a:pPr indent="0" marL="0">
-              <a:buNone/>
-            </a:pPr>
-            <a:r>
-              <a:rPr lang="en-US" sz="3200" b="1" dirty="0">
-                <a:solidFill>
-                  <a:srgbClr val="22253A"/>
-                </a:solidFill>
-                <a:latin typeface="Calibri" pitchFamily="34" charset="0"/>
-                <a:ea typeface="Calibri" pitchFamily="34" charset="-122"/>
-                <a:cs typeface="Calibri" pitchFamily="34" charset="-120"/>
-              </a:rPr>
-              <a:t>Secrets Manager: la cassetta di sicurezza</a:t>
-            </a:r>
-            <a:endParaRPr lang="en-US" sz="3200" dirty="0"/>
-          </a:p>
-        </p:txBody>
-      </p:sp>
-      <p:sp>
-        <p:nvSpPr>
-          <p:cNvPr id="3" name="Text 1"/>
-          <p:cNvSpPr txBox="1"/>
-          <p:nvPr/>
-        </p:nvSpPr>
-        <p:spPr>
-          <a:xfrm>
-            <a:off x="548640" y="6400800"/>
-            <a:ext cx="7315200" cy="274320"/>
-          </a:xfrm>
-          <a:prstGeom prst="rect">
-            <a:avLst/>
-          </a:prstGeom>
-          <a:noFill/>
-          <a:ln/>
-        </p:spPr>
-        <p:txBody>
-          <a:bodyPr wrap="square" lIns="0" tIns="0" rIns="0" bIns="0" rtlCol="0" anchor="ctr"/>
-          <a:lstStyle/>
-          <a:p>
-            <a:pPr indent="0" marL="0">
-              <a:buNone/>
-            </a:pPr>
-            <a:r>
-              <a:rPr lang="en-US" sz="1000" dirty="0">
-                <a:solidFill>
-                  <a:srgbClr val="5F6478"/>
-                </a:solidFill>
-                <a:latin typeface="Calibri" pitchFamily="34" charset="0"/>
-                <a:ea typeface="Calibri" pitchFamily="34" charset="-122"/>
-                <a:cs typeface="Calibri" pitchFamily="34" charset="-120"/>
-              </a:rPr>
-              <a:t>Dispensa 6 · RDS PostgreSQL in alta affidabilità</a:t>
-            </a:r>
-            <a:endParaRPr lang="en-US" sz="1000" dirty="0"/>
-          </a:p>
-        </p:txBody>
-      </p:sp>
-      <p:sp>
-        <p:nvSpPr>
-          <p:cNvPr id="5" name="Shape 2"/>
-          <p:cNvSpPr/>
-          <p:nvPr/>
-        </p:nvSpPr>
-        <p:spPr>
-          <a:xfrm>
-            <a:off x="548640" y="1280160"/>
-            <a:ext cx="11094415" cy="731520"/>
-          </a:xfrm>
-          <a:prstGeom prst="roundRect">
-            <a:avLst>
-              <a:gd name="adj" fmla="val 12500"/>
-            </a:avLst>
-          </a:prstGeom>
-          <a:solidFill>
-            <a:srgbClr val="5B3FD0"/>
-          </a:solidFill>
-          <a:ln w="12700">
-            <a:solidFill>
-              <a:srgbClr val="5B3FD0"/>
-            </a:solidFill>
-            <a:prstDash val="solid"/>
-          </a:ln>
-        </p:spPr>
-      </p:sp>
-      <p:sp>
-        <p:nvSpPr>
-          <p:cNvPr id="6" name="Text 3"/>
-          <p:cNvSpPr txBox="1"/>
-          <p:nvPr/>
-        </p:nvSpPr>
-        <p:spPr>
-          <a:xfrm>
-            <a:off x="822960" y="1280160"/>
-            <a:ext cx="10545775" cy="731520"/>
-          </a:xfrm>
-          <a:prstGeom prst="rect">
-            <a:avLst/>
-          </a:prstGeom>
-          <a:noFill/>
-          <a:ln/>
-        </p:spPr>
-        <p:txBody>
-          <a:bodyPr wrap="square" lIns="0" tIns="0" rIns="0" bIns="0" rtlCol="0" anchor="ctr"/>
-          <a:lstStyle/>
-          <a:p>
-            <a:pPr algn="l" indent="0" marL="0">
-              <a:buNone/>
-            </a:pPr>
-            <a:r>
-              <a:rPr lang="en-US" sz="1700" b="1" dirty="0">
-                <a:solidFill>
-                  <a:srgbClr val="FFFFFF"/>
-                </a:solidFill>
-                <a:latin typeface="Calibri" pitchFamily="34" charset="0"/>
-                <a:ea typeface="Calibri" pitchFamily="34" charset="-122"/>
-                <a:cs typeface="Calibri" pitchFamily="34" charset="-120"/>
-              </a:rPr>
-              <a:t>Come una cassetta di sicurezza: la combinazione la sceglie il fabbro, Terraform ha solo il NUMERO della cassetta.</a:t>
-            </a:r>
-            <a:endParaRPr lang="en-US" sz="1700" dirty="0"/>
-          </a:p>
-        </p:txBody>
-      </p:sp>
-      <p:sp>
-        <p:nvSpPr>
-          <p:cNvPr id="7" name="Shape 4"/>
-          <p:cNvSpPr/>
-          <p:nvPr/>
-        </p:nvSpPr>
-        <p:spPr>
-          <a:xfrm>
-            <a:off x="1828800" y="2240280"/>
-            <a:ext cx="914400" cy="914400"/>
-          </a:xfrm>
-          <a:prstGeom prst="ellipse">
-            <a:avLst/>
-          </a:prstGeom>
-          <a:solidFill>
-            <a:srgbClr val="5B3FD0"/>
-          </a:solidFill>
-          <a:ln w="12700">
-            <a:solidFill>
-              <a:srgbClr val="5B3FD0"/>
-            </a:solidFill>
-            <a:prstDash val="solid"/>
-          </a:ln>
-        </p:spPr>
-      </p:sp>
-      <p:pic>
-        <p:nvPicPr>
-          <p:cNvPr id="8" name="Image 0" descr="preencoded.png">    </p:cNvPr>
-          <p:cNvPicPr>
-            <a:picLocks noChangeAspect="1"/>
-          </p:cNvPicPr>
-          <p:nvPr/>
-        </p:nvPicPr>
-        <p:blipFill>
-          <a:blip r:embed="rId1"/>
-          <a:stretch>
-            <a:fillRect/>
-          </a:stretch>
-        </p:blipFill>
-        <p:spPr>
-          <a:xfrm>
-            <a:off x="2057400" y="2468880"/>
-            <a:ext cx="457200" cy="457200"/>
-          </a:xfrm>
-          <a:prstGeom prst="rect">
-            <a:avLst/>
-          </a:prstGeom>
-        </p:spPr>
-      </p:pic>
-      <p:sp>
-        <p:nvSpPr>
-          <p:cNvPr id="9" name="Text 5"/>
-          <p:cNvSpPr txBox="1"/>
-          <p:nvPr/>
-        </p:nvSpPr>
-        <p:spPr>
-          <a:xfrm>
-            <a:off x="548640" y="3246120"/>
-            <a:ext cx="3566160" cy="457200"/>
-          </a:xfrm>
-          <a:prstGeom prst="rect">
-            <a:avLst/>
-          </a:prstGeom>
-          <a:noFill/>
-          <a:ln/>
-        </p:spPr>
-        <p:txBody>
-          <a:bodyPr wrap="square" lIns="0" tIns="0" rIns="0" bIns="0" rtlCol="0" anchor="ctr"/>
-          <a:lstStyle/>
-          <a:p>
-            <a:pPr algn="ctr" indent="0" marL="0">
-              <a:buNone/>
-            </a:pPr>
-            <a:r>
-              <a:rPr lang="en-US" sz="1900" b="1" dirty="0">
-                <a:solidFill>
-                  <a:srgbClr val="22253A"/>
-                </a:solidFill>
-                <a:latin typeface="Calibri" pitchFamily="34" charset="0"/>
-                <a:ea typeface="Calibri" pitchFamily="34" charset="-122"/>
-                <a:cs typeface="Calibri" pitchFamily="34" charset="-120"/>
-              </a:rPr>
-              <a:t>RDS</a:t>
-            </a:r>
-            <a:endParaRPr lang="en-US" sz="1900" dirty="0"/>
-          </a:p>
-        </p:txBody>
-      </p:sp>
-      <p:sp>
-        <p:nvSpPr>
-          <p:cNvPr id="10" name="Text 6"/>
-          <p:cNvSpPr txBox="1"/>
-          <p:nvPr/>
-        </p:nvSpPr>
-        <p:spPr>
-          <a:xfrm>
-            <a:off x="548640" y="3703320"/>
-            <a:ext cx="3566160" cy="640080"/>
-          </a:xfrm>
-          <a:prstGeom prst="rect">
-            <a:avLst/>
-          </a:prstGeom>
-          <a:noFill/>
-          <a:ln/>
-        </p:spPr>
-        <p:txBody>
-          <a:bodyPr wrap="square" lIns="0" tIns="0" rIns="0" bIns="0" rtlCol="0" anchor="ctr"/>
-          <a:lstStyle/>
-          <a:p>
-            <a:pPr algn="ctr" indent="0" marL="0">
-              <a:buNone/>
-            </a:pPr>
-            <a:r>
-              <a:rPr lang="en-US" sz="1500" dirty="0">
-                <a:solidFill>
-                  <a:srgbClr val="5F6478"/>
-                </a:solidFill>
-                <a:latin typeface="Calibri" pitchFamily="34" charset="0"/>
-                <a:ea typeface="Calibri" pitchFamily="34" charset="-122"/>
-                <a:cs typeface="Calibri" pitchFamily="34" charset="-120"/>
-              </a:rPr>
-              <a:t>genera la password</a:t>
-            </a:r>
-            <a:endParaRPr lang="en-US" sz="1500" dirty="0"/>
-          </a:p>
-        </p:txBody>
-      </p:sp>
-      <p:sp>
-        <p:nvSpPr>
-          <p:cNvPr id="11" name="Shape 7"/>
-          <p:cNvSpPr/>
-          <p:nvPr/>
-        </p:nvSpPr>
-        <p:spPr>
-          <a:xfrm>
-            <a:off x="2926080" y="2697480"/>
-            <a:ext cx="2194560" cy="0"/>
-          </a:xfrm>
-          <a:prstGeom prst="line">
-            <a:avLst/>
-          </a:prstGeom>
-          <a:noFill/>
-          <a:ln w="25400">
-            <a:solidFill>
-              <a:srgbClr val="D9D6EC"/>
-            </a:solidFill>
-            <a:prstDash val="solid"/>
-            <a:tailEnd type="triangle"/>
-          </a:ln>
-        </p:spPr>
-      </p:sp>
-      <p:sp>
-        <p:nvSpPr>
-          <p:cNvPr id="12" name="Shape 8"/>
-          <p:cNvSpPr/>
-          <p:nvPr/>
-        </p:nvSpPr>
-        <p:spPr>
-          <a:xfrm>
-            <a:off x="5577840" y="2240280"/>
-            <a:ext cx="914400" cy="914400"/>
-          </a:xfrm>
-          <a:prstGeom prst="ellipse">
-            <a:avLst/>
-          </a:prstGeom>
-          <a:solidFill>
-            <a:srgbClr val="F28C28"/>
-          </a:solidFill>
-          <a:ln w="12700">
-            <a:solidFill>
-              <a:srgbClr val="F28C28"/>
-            </a:solidFill>
-            <a:prstDash val="solid"/>
-          </a:ln>
-        </p:spPr>
-      </p:sp>
-      <p:pic>
-        <p:nvPicPr>
-          <p:cNvPr id="13" name="Image 1" descr="preencoded.png">    </p:cNvPr>
-          <p:cNvPicPr>
-            <a:picLocks noChangeAspect="1"/>
-          </p:cNvPicPr>
-          <p:nvPr/>
-        </p:nvPicPr>
-        <p:blipFill>
-          <a:blip r:embed="rId2"/>
-          <a:stretch>
-            <a:fillRect/>
-          </a:stretch>
-        </p:blipFill>
-        <p:spPr>
-          <a:xfrm>
-            <a:off x="5806440" y="2468880"/>
-            <a:ext cx="457200" cy="457200"/>
-          </a:xfrm>
-          <a:prstGeom prst="rect">
-            <a:avLst/>
-          </a:prstGeom>
-        </p:spPr>
-      </p:pic>
-      <p:sp>
-        <p:nvSpPr>
-          <p:cNvPr id="14" name="Text 9"/>
-          <p:cNvSpPr txBox="1"/>
-          <p:nvPr/>
-        </p:nvSpPr>
-        <p:spPr>
-          <a:xfrm>
-            <a:off x="4297680" y="3246120"/>
-            <a:ext cx="3566160" cy="457200"/>
-          </a:xfrm>
-          <a:prstGeom prst="rect">
-            <a:avLst/>
-          </a:prstGeom>
-          <a:noFill/>
-          <a:ln/>
-        </p:spPr>
-        <p:txBody>
-          <a:bodyPr wrap="square" lIns="0" tIns="0" rIns="0" bIns="0" rtlCol="0" anchor="ctr"/>
-          <a:lstStyle/>
-          <a:p>
-            <a:pPr algn="ctr" indent="0" marL="0">
-              <a:buNone/>
-            </a:pPr>
-            <a:r>
-              <a:rPr lang="en-US" sz="1900" b="1" dirty="0">
-                <a:solidFill>
-                  <a:srgbClr val="22253A"/>
-                </a:solidFill>
-                <a:latin typeface="Calibri" pitchFamily="34" charset="0"/>
-                <a:ea typeface="Calibri" pitchFamily="34" charset="-122"/>
-                <a:cs typeface="Calibri" pitchFamily="34" charset="-120"/>
-              </a:rPr>
-              <a:t>Secrets Manager</a:t>
-            </a:r>
-            <a:endParaRPr lang="en-US" sz="1900" dirty="0"/>
-          </a:p>
-        </p:txBody>
-      </p:sp>
-      <p:sp>
-        <p:nvSpPr>
-          <p:cNvPr id="15" name="Text 10"/>
-          <p:cNvSpPr txBox="1"/>
-          <p:nvPr/>
-        </p:nvSpPr>
-        <p:spPr>
-          <a:xfrm>
-            <a:off x="4297680" y="3703320"/>
-            <a:ext cx="3566160" cy="640080"/>
-          </a:xfrm>
-          <a:prstGeom prst="rect">
-            <a:avLst/>
-          </a:prstGeom>
-          <a:noFill/>
-          <a:ln/>
-        </p:spPr>
-        <p:txBody>
-          <a:bodyPr wrap="square" lIns="0" tIns="0" rIns="0" bIns="0" rtlCol="0" anchor="ctr"/>
-          <a:lstStyle/>
-          <a:p>
-            <a:pPr algn="ctr" indent="0" marL="0">
-              <a:buNone/>
-            </a:pPr>
-            <a:r>
-              <a:rPr lang="en-US" sz="1500" dirty="0">
-                <a:solidFill>
-                  <a:srgbClr val="5F6478"/>
-                </a:solidFill>
-                <a:latin typeface="Calibri" pitchFamily="34" charset="0"/>
-                <a:ea typeface="Calibri" pitchFamily="34" charset="-122"/>
-                <a:cs typeface="Calibri" pitchFamily="34" charset="-120"/>
-              </a:rPr>
-              <a:t>la custodisce e la cambia ogni 7 giorni</a:t>
-            </a:r>
-            <a:endParaRPr lang="en-US" sz="1500" dirty="0"/>
-          </a:p>
-        </p:txBody>
-      </p:sp>
-      <p:sp>
-        <p:nvSpPr>
-          <p:cNvPr id="16" name="Shape 11"/>
-          <p:cNvSpPr/>
-          <p:nvPr/>
-        </p:nvSpPr>
-        <p:spPr>
-          <a:xfrm>
-            <a:off x="6675120" y="2697480"/>
-            <a:ext cx="2194560" cy="0"/>
-          </a:xfrm>
-          <a:prstGeom prst="line">
-            <a:avLst/>
-          </a:prstGeom>
-          <a:noFill/>
-          <a:ln w="25400">
-            <a:solidFill>
-              <a:srgbClr val="D9D6EC"/>
-            </a:solidFill>
-            <a:prstDash val="solid"/>
-            <a:tailEnd type="triangle"/>
-          </a:ln>
-        </p:spPr>
-      </p:sp>
-      <p:sp>
-        <p:nvSpPr>
-          <p:cNvPr id="17" name="Shape 12"/>
-          <p:cNvSpPr/>
-          <p:nvPr/>
-        </p:nvSpPr>
-        <p:spPr>
-          <a:xfrm>
-            <a:off x="9326880" y="2240280"/>
-            <a:ext cx="914400" cy="914400"/>
-          </a:xfrm>
-          <a:prstGeom prst="ellipse">
-            <a:avLst/>
-          </a:prstGeom>
-          <a:solidFill>
-            <a:srgbClr val="5B3FD0"/>
-          </a:solidFill>
-          <a:ln w="12700">
-            <a:solidFill>
-              <a:srgbClr val="5B3FD0"/>
-            </a:solidFill>
-            <a:prstDash val="solid"/>
-          </a:ln>
-        </p:spPr>
-      </p:sp>
-      <p:pic>
-        <p:nvPicPr>
-          <p:cNvPr id="18" name="Image 2" descr="preencoded.png">    </p:cNvPr>
-          <p:cNvPicPr>
-            <a:picLocks noChangeAspect="1"/>
-          </p:cNvPicPr>
-          <p:nvPr/>
-        </p:nvPicPr>
-        <p:blipFill>
-          <a:blip r:embed="rId3"/>
-          <a:stretch>
-            <a:fillRect/>
-          </a:stretch>
-        </p:blipFill>
-        <p:spPr>
-          <a:xfrm>
-            <a:off x="9555480" y="2468880"/>
-            <a:ext cx="457200" cy="457200"/>
-          </a:xfrm>
-          <a:prstGeom prst="rect">
-            <a:avLst/>
-          </a:prstGeom>
-        </p:spPr>
-      </p:pic>
-      <p:sp>
-        <p:nvSpPr>
-          <p:cNvPr id="19" name="Text 13"/>
-          <p:cNvSpPr txBox="1"/>
-          <p:nvPr/>
-        </p:nvSpPr>
-        <p:spPr>
-          <a:xfrm>
-            <a:off x="8046720" y="3246120"/>
-            <a:ext cx="3566160" cy="457200"/>
-          </a:xfrm>
-          <a:prstGeom prst="rect">
-            <a:avLst/>
-          </a:prstGeom>
-          <a:noFill/>
-          <a:ln/>
-        </p:spPr>
-        <p:txBody>
-          <a:bodyPr wrap="square" lIns="0" tIns="0" rIns="0" bIns="0" rtlCol="0" anchor="ctr"/>
-          <a:lstStyle/>
-          <a:p>
-            <a:pPr algn="ctr" indent="0" marL="0">
-              <a:buNone/>
-            </a:pPr>
-            <a:r>
-              <a:rPr lang="en-US" sz="1900" b="1" dirty="0">
-                <a:solidFill>
-                  <a:srgbClr val="22253A"/>
-                </a:solidFill>
-                <a:latin typeface="Calibri" pitchFamily="34" charset="0"/>
-                <a:ea typeface="Calibri" pitchFamily="34" charset="-122"/>
-                <a:cs typeface="Calibri" pitchFamily="34" charset="-120"/>
-              </a:rPr>
-              <a:t>Server app</a:t>
-            </a:r>
-            <a:endParaRPr lang="en-US" sz="1900" dirty="0"/>
-          </a:p>
-        </p:txBody>
-      </p:sp>
-      <p:sp>
-        <p:nvSpPr>
-          <p:cNvPr id="20" name="Text 14"/>
-          <p:cNvSpPr txBox="1"/>
-          <p:nvPr/>
-        </p:nvSpPr>
-        <p:spPr>
-          <a:xfrm>
-            <a:off x="8046720" y="3703320"/>
-            <a:ext cx="3566160" cy="640080"/>
-          </a:xfrm>
-          <a:prstGeom prst="rect">
-            <a:avLst/>
-          </a:prstGeom>
-          <a:noFill/>
-          <a:ln/>
-        </p:spPr>
-        <p:txBody>
-          <a:bodyPr wrap="square" lIns="0" tIns="0" rIns="0" bIns="0" rtlCol="0" anchor="ctr"/>
-          <a:lstStyle/>
-          <a:p>
-            <a:pPr algn="ctr" indent="0" marL="0">
-              <a:buNone/>
-            </a:pPr>
-            <a:r>
-              <a:rPr lang="en-US" sz="1500" dirty="0">
-                <a:solidFill>
-                  <a:srgbClr val="5F6478"/>
-                </a:solidFill>
-                <a:latin typeface="Calibri" pitchFamily="34" charset="0"/>
-                <a:ea typeface="Calibri" pitchFamily="34" charset="-122"/>
-                <a:cs typeface="Calibri" pitchFamily="34" charset="-120"/>
-              </a:rPr>
-              <a:t>la legge con il permesso IAM (secrets.tf)</a:t>
-            </a:r>
-            <a:endParaRPr lang="en-US" sz="1500" dirty="0"/>
-          </a:p>
-        </p:txBody>
-      </p:sp>
-      <p:sp>
-        <p:nvSpPr>
-          <p:cNvPr id="21" name="Shape 15"/>
-          <p:cNvSpPr/>
-          <p:nvPr/>
-        </p:nvSpPr>
-        <p:spPr>
-          <a:xfrm>
-            <a:off x="548640" y="4572000"/>
-            <a:ext cx="5440680" cy="1463040"/>
-          </a:xfrm>
-          <a:prstGeom prst="roundRect">
-            <a:avLst>
-              <a:gd name="adj" fmla="val 7500"/>
-            </a:avLst>
-          </a:prstGeom>
-          <a:solidFill>
-            <a:srgbClr val="EEEAFB"/>
-          </a:solidFill>
-          <a:ln w="12700">
-            <a:solidFill>
-              <a:srgbClr val="EEEAFB"/>
-            </a:solidFill>
-            <a:prstDash val="solid"/>
-          </a:ln>
-        </p:spPr>
-      </p:sp>
-      <p:sp>
-        <p:nvSpPr>
-          <p:cNvPr id="22" name="Shape 16"/>
-          <p:cNvSpPr/>
-          <p:nvPr/>
-        </p:nvSpPr>
-        <p:spPr>
-          <a:xfrm>
-            <a:off x="777240" y="4800600"/>
-            <a:ext cx="548640" cy="548640"/>
-          </a:xfrm>
-          <a:prstGeom prst="ellipse">
-            <a:avLst/>
-          </a:prstGeom>
-          <a:solidFill>
-            <a:srgbClr val="5B3FD0"/>
-          </a:solidFill>
-          <a:ln w="12700">
-            <a:solidFill>
-              <a:srgbClr val="5B3FD0"/>
-            </a:solidFill>
-            <a:prstDash val="solid"/>
-          </a:ln>
-        </p:spPr>
-      </p:sp>
-      <p:pic>
-        <p:nvPicPr>
-          <p:cNvPr id="23" name="Image 3" descr="preencoded.png">    </p:cNvPr>
-          <p:cNvPicPr>
-            <a:picLocks noChangeAspect="1"/>
-          </p:cNvPicPr>
-          <p:nvPr/>
-        </p:nvPicPr>
-        <p:blipFill>
-          <a:blip r:embed="rId4"/>
-          <a:stretch>
-            <a:fillRect/>
-          </a:stretch>
-        </p:blipFill>
-        <p:spPr>
-          <a:xfrm>
-            <a:off x="914400" y="4937760"/>
-            <a:ext cx="274320" cy="274320"/>
-          </a:xfrm>
-          <a:prstGeom prst="rect">
-            <a:avLst/>
-          </a:prstGeom>
-        </p:spPr>
-      </p:pic>
-      <p:sp>
-        <p:nvSpPr>
-          <p:cNvPr id="24" name="Text 17"/>
-          <p:cNvSpPr txBox="1"/>
-          <p:nvPr/>
-        </p:nvSpPr>
-        <p:spPr>
-          <a:xfrm>
-            <a:off x="1508760" y="4800600"/>
-            <a:ext cx="4251960" cy="548640"/>
-          </a:xfrm>
-          <a:prstGeom prst="rect">
-            <a:avLst/>
-          </a:prstGeom>
-          <a:noFill/>
-          <a:ln/>
-        </p:spPr>
-        <p:txBody>
-          <a:bodyPr wrap="square" lIns="0" tIns="0" rIns="0" bIns="0" rtlCol="0" anchor="ctr"/>
-          <a:lstStyle/>
-          <a:p>
-            <a:pPr indent="0" marL="0">
-              <a:buNone/>
-            </a:pPr>
-            <a:r>
-              <a:rPr lang="en-US" sz="1800" b="1" dirty="0">
-                <a:solidFill>
-                  <a:srgbClr val="22253A"/>
-                </a:solidFill>
-                <a:latin typeface="Calibri" pitchFamily="34" charset="0"/>
-                <a:ea typeface="Calibri" pitchFamily="34" charset="-122"/>
-                <a:cs typeface="Calibri" pitchFamily="34" charset="-120"/>
-              </a:rPr>
-              <a:t>Terraform vede solo l'ARN</a:t>
-            </a:r>
-            <a:endParaRPr lang="en-US" sz="1800" dirty="0"/>
-          </a:p>
-        </p:txBody>
-      </p:sp>
-      <p:sp>
-        <p:nvSpPr>
-          <p:cNvPr id="25" name="Text 18"/>
-          <p:cNvSpPr txBox="1"/>
-          <p:nvPr/>
-        </p:nvSpPr>
-        <p:spPr>
-          <a:xfrm>
-            <a:off x="777240" y="5486400"/>
-            <a:ext cx="4983480" cy="365760"/>
-          </a:xfrm>
-          <a:prstGeom prst="rect">
-            <a:avLst/>
-          </a:prstGeom>
-          <a:noFill/>
-          <a:ln/>
-        </p:spPr>
-        <p:txBody>
-          <a:bodyPr wrap="square" lIns="0" tIns="0" rIns="0" bIns="0" rtlCol="0" anchor="t"/>
-          <a:lstStyle/>
-          <a:p>
-            <a:pPr indent="0" marL="0">
-              <a:spcAft>
-                <a:spcPts val="600"/>
-              </a:spcAft>
-              <a:buNone/>
-            </a:pPr>
-            <a:r>
-              <a:rPr lang="en-US" sz="1500" dirty="0">
-                <a:solidFill>
-                  <a:srgbClr val="22253A"/>
-                </a:solidFill>
-                <a:latin typeface="Calibri" pitchFamily="34" charset="0"/>
-                <a:ea typeface="Calibri" pitchFamily="34" charset="-122"/>
-                <a:cs typeface="Calibri" pitchFamily="34" charset="-120"/>
-              </a:rPr>
-              <a:t>l'indirizzo del segreto: master_user_secret[0].secret_arn</a:t>
-            </a:r>
-            <a:endParaRPr lang="en-US" sz="1500" dirty="0"/>
-          </a:p>
-        </p:txBody>
-      </p:sp>
-      <p:sp>
-        <p:nvSpPr>
-          <p:cNvPr id="26" name="Shape 19"/>
-          <p:cNvSpPr/>
-          <p:nvPr/>
-        </p:nvSpPr>
-        <p:spPr>
-          <a:xfrm>
-            <a:off x="6172200" y="4572000"/>
-            <a:ext cx="5468112" cy="1463040"/>
-          </a:xfrm>
-          <a:prstGeom prst="roundRect">
-            <a:avLst>
-              <a:gd name="adj" fmla="val 7500"/>
-            </a:avLst>
-          </a:prstGeom>
-          <a:solidFill>
-            <a:srgbClr val="FDF0E3"/>
-          </a:solidFill>
-          <a:ln w="12700">
-            <a:solidFill>
-              <a:srgbClr val="FDF0E3"/>
-            </a:solidFill>
-            <a:prstDash val="solid"/>
-          </a:ln>
-        </p:spPr>
-      </p:sp>
-      <p:sp>
-        <p:nvSpPr>
-          <p:cNvPr id="27" name="Shape 20"/>
-          <p:cNvSpPr/>
-          <p:nvPr/>
-        </p:nvSpPr>
-        <p:spPr>
-          <a:xfrm>
-            <a:off x="6400800" y="4800600"/>
-            <a:ext cx="548640" cy="548640"/>
-          </a:xfrm>
-          <a:prstGeom prst="ellipse">
-            <a:avLst/>
-          </a:prstGeom>
-          <a:solidFill>
-            <a:srgbClr val="F28C28"/>
-          </a:solidFill>
-          <a:ln w="12700">
-            <a:solidFill>
-              <a:srgbClr val="F28C28"/>
-            </a:solidFill>
-            <a:prstDash val="solid"/>
-          </a:ln>
-        </p:spPr>
-      </p:sp>
-      <p:pic>
-        <p:nvPicPr>
-          <p:cNvPr id="28" name="Image 4" descr="preencoded.png">    </p:cNvPr>
-          <p:cNvPicPr>
-            <a:picLocks noChangeAspect="1"/>
-          </p:cNvPicPr>
-          <p:nvPr/>
-        </p:nvPicPr>
-        <p:blipFill>
-          <a:blip r:embed="rId5"/>
-          <a:stretch>
-            <a:fillRect/>
-          </a:stretch>
-        </p:blipFill>
-        <p:spPr>
-          <a:xfrm>
-            <a:off x="6537960" y="4937760"/>
-            <a:ext cx="274320" cy="274320"/>
-          </a:xfrm>
-          <a:prstGeom prst="rect">
-            <a:avLst/>
-          </a:prstGeom>
-        </p:spPr>
-      </p:pic>
-      <p:sp>
-        <p:nvSpPr>
-          <p:cNvPr id="29" name="Text 21"/>
-          <p:cNvSpPr txBox="1"/>
-          <p:nvPr/>
-        </p:nvSpPr>
-        <p:spPr>
-          <a:xfrm>
-            <a:off x="7132320" y="4800600"/>
-            <a:ext cx="4279392" cy="548640"/>
-          </a:xfrm>
-          <a:prstGeom prst="rect">
-            <a:avLst/>
-          </a:prstGeom>
-          <a:noFill/>
-          <a:ln/>
-        </p:spPr>
-        <p:txBody>
-          <a:bodyPr wrap="square" lIns="0" tIns="0" rIns="0" bIns="0" rtlCol="0" anchor="ctr"/>
-          <a:lstStyle/>
-          <a:p>
-            <a:pPr indent="0" marL="0">
-              <a:buNone/>
-            </a:pPr>
-            <a:r>
-              <a:rPr lang="en-US" sz="1800" b="1" dirty="0">
-                <a:solidFill>
-                  <a:srgbClr val="22253A"/>
-                </a:solidFill>
-                <a:latin typeface="Calibri" pitchFamily="34" charset="0"/>
-                <a:ea typeface="Calibri" pitchFamily="34" charset="-122"/>
-                <a:cs typeface="Calibri" pitchFamily="34" charset="-120"/>
-              </a:rPr>
-              <a:t>Cambia ogni 7 giorni</a:t>
-            </a:r>
-            <a:endParaRPr lang="en-US" sz="1800" dirty="0"/>
-          </a:p>
-        </p:txBody>
-      </p:sp>
-      <p:sp>
-        <p:nvSpPr>
-          <p:cNvPr id="30" name="Text 22"/>
-          <p:cNvSpPr txBox="1"/>
-          <p:nvPr/>
-        </p:nvSpPr>
-        <p:spPr>
-          <a:xfrm>
-            <a:off x="6400800" y="5486400"/>
-            <a:ext cx="5010912" cy="365760"/>
-          </a:xfrm>
-          <a:prstGeom prst="rect">
-            <a:avLst/>
-          </a:prstGeom>
-          <a:noFill/>
-          <a:ln/>
-        </p:spPr>
-        <p:txBody>
-          <a:bodyPr wrap="square" lIns="0" tIns="0" rIns="0" bIns="0" rtlCol="0" anchor="t"/>
-          <a:lstStyle/>
-          <a:p>
-            <a:pPr indent="0" marL="0">
-              <a:spcAft>
-                <a:spcPts val="600"/>
-              </a:spcAft>
-              <a:buNone/>
-            </a:pPr>
-            <a:r>
-              <a:rPr lang="en-US" sz="1500" dirty="0">
-                <a:solidFill>
-                  <a:srgbClr val="22253A"/>
-                </a:solidFill>
-                <a:latin typeface="Calibri" pitchFamily="34" charset="0"/>
-                <a:ea typeface="Calibri" pitchFamily="34" charset="-122"/>
-                <a:cs typeface="Calibri" pitchFamily="34" charset="-120"/>
-              </a:rPr>
-              <a:t>mai copiarla in un file: si legge dal segreto ogni volta</a:t>
-            </a:r>
-            <a:endParaRPr lang="en-US" sz="1500" dirty="0"/>
-          </a:p>
-        </p:txBody>
-      </p:sp>
-      <p:sp>
-        <p:nvSpPr>
-          <p:cNvPr id="25" name="Slide Number Placeholder 0"/>
-          <p:cNvSpPr>
-            <a:spLocks noGrp="1"/>
-          </p:cNvSpPr>
-          <p:nvPr>
-            <p:ph type="sldNum" sz="quarter" idx="4294967295"/>
-          </p:nvPr>
-        </p:nvSpPr>
-        <p:spPr>
-          <a:xfrm>
-            <a:off x="11155680" y="6400800"/>
-            <a:ext cx="548640" cy="274320"/>
-          </a:xfrm>
-          <a:prstGeom prst="rect">
-            <a:avLst/>
-          </a:prstGeom>
-          <a:extLst>
-            <a:ext uri="{C572A759-6A51-4108-AA02-DFA0A04FC94B}">
-              <ma14:wrappingTextBoxFlag xmlns:ma14="http://schemas.microsoft.com/office/mac/drawingml/2011/main" val="0"/>
-            </a:ext>
-          </a:extLst>
-        </p:spPr>
-        <p:txBody>
-          <a:bodyPr/>
-          <a:lstStyle>
-            <a:lvl1pPr>
-              <a:defRPr sz="1000">
-                <a:solidFill>
-                  <a:srgbClr val="5F6478"/>
-                </a:solidFill>
-                <a:latin typeface="Calibri"/>
-                <a:ea typeface="Calibri"/>
-                <a:cs typeface="Calibri"/>
-              </a:defRPr>
-            </a:lvl1pPr>
-          </a:lstStyle>
-          <a:p>
-            <a:pPr algn="r"/>
-            <a:fld id="{F7021451-1387-4CA6-816F-3879F97B5CBC}" type="slidenum">
-              <a:rPr b="0" lang="en-US"/>
               <a:t>13</a:t>
             </a:fld>
             <a:endParaRPr lang="en-US"/>
@@ -6485,7 +6722,7 @@
                 <a:ea typeface="Calibri" pitchFamily="34" charset="-122"/>
                 <a:cs typeface="Calibri" pitchFamily="34" charset="-120"/>
               </a:rPr>
-              <a:t>Le protezioni contro la cancellazione</a:t>
+              <a:t>Secrets Manager: la cassetta di sicurezza</a:t>
             </a:r>
             <a:endParaRPr lang="en-US" sz="3200" dirty="0"/>
           </a:p>
@@ -6538,20 +6775,20 @@
         </p:nvSpPr>
         <p:spPr>
           <a:xfrm>
-            <a:off x="548640" y="1371600"/>
-            <a:ext cx="5440680" cy="2743200"/>
+            <a:off x="548640" y="1280160"/>
+            <a:ext cx="11094415" cy="731520"/>
           </a:xfrm>
           <a:prstGeom prst="roundRect">
             <a:avLst>
-              <a:gd name="adj" fmla="val 4000"/>
+              <a:gd name="adj" fmla="val 12500"/>
             </a:avLst>
           </a:prstGeom>
           <a:solidFill>
-            <a:srgbClr val="E5F4EC"/>
+            <a:srgbClr val="5B3FD0"/>
           </a:solidFill>
           <a:ln w="12700">
             <a:solidFill>
-              <a:srgbClr val="E5F4EC"/>
+              <a:srgbClr val="5B3FD0"/>
             </a:solidFill>
             <a:prstDash val="solid"/>
           </a:ln>
@@ -6559,24 +6796,63 @@
       </p:sp>
       <p:sp>
         <p:nvSpPr>
-          <p:cNvPr id="6" name="Shape 3"/>
+          <p:cNvPr id="6" name="Text 3"/>
+          <p:cNvSpPr txBox="1"/>
+          <p:nvPr/>
+        </p:nvSpPr>
+        <p:spPr>
+          <a:xfrm>
+            <a:off x="822960" y="1280160"/>
+            <a:ext cx="10545775" cy="731520"/>
+          </a:xfrm>
+          <a:prstGeom prst="rect">
+            <a:avLst/>
+          </a:prstGeom>
+          <a:noFill/>
+          <a:ln/>
+        </p:spPr>
+        <p:txBody>
+          <a:bodyPr wrap="square" lIns="0" tIns="0" rIns="0" bIns="0" rtlCol="0" anchor="ctr"/>
+          <a:lstStyle/>
+          <a:p>
+            <a:pPr algn="l" indent="0" marL="0">
+              <a:buNone/>
+            </a:pPr>
+            <a:r>
+              <a:rPr lang="en-US" sz="1700" b="1" dirty="0">
+                <a:solidFill>
+                  <a:srgbClr val="FFFFFF"/>
+                </a:solidFill>
+                <a:latin typeface="Calibri" pitchFamily="34" charset="0"/>
+                <a:ea typeface="Calibri" pitchFamily="34" charset="-122"/>
+                <a:cs typeface="Calibri" pitchFamily="34" charset="-120"/>
+              </a:rPr>
+              <a:t>Come una cassetta di sicurezza: la combinazione la sceglie il fabbro, Terraform ha solo il NUMERO della cassetta.</a:t>
+            </a:r>
+            <a:endParaRPr lang="en-US" sz="1700" dirty="0"/>
+          </a:p>
+        </p:txBody>
+      </p:sp>
+      <p:sp>
+        <p:nvSpPr>
+          <p:cNvPr id="7" name="Shape 4"/>
           <p:cNvSpPr/>
           <p:nvPr/>
         </p:nvSpPr>
         <p:spPr>
           <a:xfrm>
-            <a:off x="777240" y="1600200"/>
-            <a:ext cx="548640" cy="548640"/>
+            <a:off x="1828800" y="2240280"/>
+            <a:ext cx="914400" cy="914400"/>
           </a:xfrm>
           <a:prstGeom prst="ellipse">
             <a:avLst/>
           </a:prstGeom>
           <a:solidFill>
-            <a:srgbClr val="2E9E6B"/>
+            <a:srgbClr val="5B3FD0"/>
           </a:solidFill>
           <a:ln w="12700">
             <a:solidFill>
-              <a:srgbClr val="2E9E6B"/>
+              <a:srgbClr val="5B3FD0"/>
             </a:solidFill>
             <a:prstDash val="solid"/>
           </a:ln>
@@ -6584,7 +6860,7 @@
       </p:sp>
       <p:pic>
         <p:nvPicPr>
-          <p:cNvPr id="7" name="Image 0" descr="preencoded.png">    </p:cNvPr>
+          <p:cNvPr id="8" name="Image 0" descr="preencoded.png">    </p:cNvPr>
           <p:cNvPicPr>
             <a:picLocks noChangeAspect="1"/>
           </p:cNvPicPr>
@@ -6598,8 +6874,8 @@
         </p:blipFill>
         <p:spPr>
           <a:xfrm>
-            <a:off x="914400" y="1737360"/>
-            <a:ext cx="274320" cy="274320"/>
+            <a:off x="2057400" y="2468880"/>
+            <a:ext cx="457200" cy="457200"/>
           </a:xfrm>
           <a:prstGeom prst="rect">
             <a:avLst/>
@@ -6608,14 +6884,14 @@
       </p:pic>
       <p:sp>
         <p:nvSpPr>
-          <p:cNvPr id="8" name="Text 4"/>
+          <p:cNvPr id="9" name="Text 5"/>
           <p:cNvSpPr txBox="1"/>
           <p:nvPr/>
         </p:nvSpPr>
         <p:spPr>
           <a:xfrm>
-            <a:off x="1508760" y="1600200"/>
-            <a:ext cx="4251960" cy="548640"/>
+            <a:off x="548640" y="3246120"/>
+            <a:ext cx="3566160" cy="457200"/>
           </a:xfrm>
           <a:prstGeom prst="rect">
             <a:avLst/>
@@ -6627,11 +6903,11 @@
           <a:bodyPr wrap="square" lIns="0" tIns="0" rIns="0" bIns="0" rtlCol="0" anchor="ctr"/>
           <a:lstStyle/>
           <a:p>
-            <a:pPr indent="0" marL="0">
-              <a:buNone/>
-            </a:pPr>
-            <a:r>
-              <a:rPr lang="en-US" sz="1800" b="1" dirty="0">
+            <a:pPr algn="ctr" indent="0" marL="0">
+              <a:buNone/>
+            </a:pPr>
+            <a:r>
+              <a:rPr lang="en-US" sz="1900" b="1" dirty="0">
                 <a:solidFill>
                   <a:srgbClr val="22253A"/>
                 </a:solidFill>
@@ -6639,22 +6915,22 @@
                 <a:ea typeface="Calibri" pitchFamily="34" charset="-122"/>
                 <a:cs typeface="Calibri" pitchFamily="34" charset="-120"/>
               </a:rPr>
-              <a:t>deletion_protection = true</a:t>
-            </a:r>
-            <a:endParaRPr lang="en-US" sz="1800" dirty="0"/>
-          </a:p>
-        </p:txBody>
-      </p:sp>
-      <p:sp>
-        <p:nvSpPr>
-          <p:cNvPr id="9" name="Text 5"/>
+              <a:t>RDS</a:t>
+            </a:r>
+            <a:endParaRPr lang="en-US" sz="1900" dirty="0"/>
+          </a:p>
+        </p:txBody>
+      </p:sp>
+      <p:sp>
+        <p:nvSpPr>
+          <p:cNvPr id="10" name="Text 6"/>
           <p:cNvSpPr txBox="1"/>
           <p:nvPr/>
         </p:nvSpPr>
         <p:spPr>
           <a:xfrm>
-            <a:off x="777240" y="2286000"/>
-            <a:ext cx="4983480" cy="1645920"/>
+            <a:off x="548640" y="3703320"/>
+            <a:ext cx="3566160" cy="640080"/>
           </a:xfrm>
           <a:prstGeom prst="rect">
             <a:avLst/>
@@ -6663,18 +6939,473 @@
           <a:ln/>
         </p:spPr>
         <p:txBody>
+          <a:bodyPr wrap="square" lIns="0" tIns="0" rIns="0" bIns="0" rtlCol="0" anchor="ctr"/>
+          <a:lstStyle/>
+          <a:p>
+            <a:pPr algn="ctr" indent="0" marL="0">
+              <a:buNone/>
+            </a:pPr>
+            <a:r>
+              <a:rPr lang="en-US" sz="1500" dirty="0">
+                <a:solidFill>
+                  <a:srgbClr val="5F6478"/>
+                </a:solidFill>
+                <a:latin typeface="Calibri" pitchFamily="34" charset="0"/>
+                <a:ea typeface="Calibri" pitchFamily="34" charset="-122"/>
+                <a:cs typeface="Calibri" pitchFamily="34" charset="-120"/>
+              </a:rPr>
+              <a:t>genera la password</a:t>
+            </a:r>
+            <a:endParaRPr lang="en-US" sz="1500" dirty="0"/>
+          </a:p>
+        </p:txBody>
+      </p:sp>
+      <p:sp>
+        <p:nvSpPr>
+          <p:cNvPr id="11" name="Shape 7"/>
+          <p:cNvSpPr/>
+          <p:nvPr/>
+        </p:nvSpPr>
+        <p:spPr>
+          <a:xfrm>
+            <a:off x="2926080" y="2697480"/>
+            <a:ext cx="2194560" cy="0"/>
+          </a:xfrm>
+          <a:prstGeom prst="line">
+            <a:avLst/>
+          </a:prstGeom>
+          <a:noFill/>
+          <a:ln w="25400">
+            <a:solidFill>
+              <a:srgbClr val="D9D6EC"/>
+            </a:solidFill>
+            <a:prstDash val="solid"/>
+            <a:tailEnd type="triangle"/>
+          </a:ln>
+        </p:spPr>
+      </p:sp>
+      <p:sp>
+        <p:nvSpPr>
+          <p:cNvPr id="12" name="Shape 8"/>
+          <p:cNvSpPr/>
+          <p:nvPr/>
+        </p:nvSpPr>
+        <p:spPr>
+          <a:xfrm>
+            <a:off x="5577840" y="2240280"/>
+            <a:ext cx="914400" cy="914400"/>
+          </a:xfrm>
+          <a:prstGeom prst="ellipse">
+            <a:avLst/>
+          </a:prstGeom>
+          <a:solidFill>
+            <a:srgbClr val="F28C28"/>
+          </a:solidFill>
+          <a:ln w="12700">
+            <a:solidFill>
+              <a:srgbClr val="F28C28"/>
+            </a:solidFill>
+            <a:prstDash val="solid"/>
+          </a:ln>
+        </p:spPr>
+      </p:sp>
+      <p:pic>
+        <p:nvPicPr>
+          <p:cNvPr id="13" name="Image 1" descr="preencoded.png">    </p:cNvPr>
+          <p:cNvPicPr>
+            <a:picLocks noChangeAspect="1"/>
+          </p:cNvPicPr>
+          <p:nvPr/>
+        </p:nvPicPr>
+        <p:blipFill>
+          <a:blip r:embed="rId2"/>
+          <a:stretch>
+            <a:fillRect/>
+          </a:stretch>
+        </p:blipFill>
+        <p:spPr>
+          <a:xfrm>
+            <a:off x="5806440" y="2468880"/>
+            <a:ext cx="457200" cy="457200"/>
+          </a:xfrm>
+          <a:prstGeom prst="rect">
+            <a:avLst/>
+          </a:prstGeom>
+        </p:spPr>
+      </p:pic>
+      <p:sp>
+        <p:nvSpPr>
+          <p:cNvPr id="14" name="Text 9"/>
+          <p:cNvSpPr txBox="1"/>
+          <p:nvPr/>
+        </p:nvSpPr>
+        <p:spPr>
+          <a:xfrm>
+            <a:off x="4297680" y="3246120"/>
+            <a:ext cx="3566160" cy="457200"/>
+          </a:xfrm>
+          <a:prstGeom prst="rect">
+            <a:avLst/>
+          </a:prstGeom>
+          <a:noFill/>
+          <a:ln/>
+        </p:spPr>
+        <p:txBody>
+          <a:bodyPr wrap="square" lIns="0" tIns="0" rIns="0" bIns="0" rtlCol="0" anchor="ctr"/>
+          <a:lstStyle/>
+          <a:p>
+            <a:pPr algn="ctr" indent="0" marL="0">
+              <a:buNone/>
+            </a:pPr>
+            <a:r>
+              <a:rPr lang="en-US" sz="1900" b="1" dirty="0">
+                <a:solidFill>
+                  <a:srgbClr val="22253A"/>
+                </a:solidFill>
+                <a:latin typeface="Calibri" pitchFamily="34" charset="0"/>
+                <a:ea typeface="Calibri" pitchFamily="34" charset="-122"/>
+                <a:cs typeface="Calibri" pitchFamily="34" charset="-120"/>
+              </a:rPr>
+              <a:t>Secrets Manager</a:t>
+            </a:r>
+            <a:endParaRPr lang="en-US" sz="1900" dirty="0"/>
+          </a:p>
+        </p:txBody>
+      </p:sp>
+      <p:sp>
+        <p:nvSpPr>
+          <p:cNvPr id="15" name="Text 10"/>
+          <p:cNvSpPr txBox="1"/>
+          <p:nvPr/>
+        </p:nvSpPr>
+        <p:spPr>
+          <a:xfrm>
+            <a:off x="4297680" y="3703320"/>
+            <a:ext cx="3566160" cy="640080"/>
+          </a:xfrm>
+          <a:prstGeom prst="rect">
+            <a:avLst/>
+          </a:prstGeom>
+          <a:noFill/>
+          <a:ln/>
+        </p:spPr>
+        <p:txBody>
+          <a:bodyPr wrap="square" lIns="0" tIns="0" rIns="0" bIns="0" rtlCol="0" anchor="ctr"/>
+          <a:lstStyle/>
+          <a:p>
+            <a:pPr algn="ctr" indent="0" marL="0">
+              <a:buNone/>
+            </a:pPr>
+            <a:r>
+              <a:rPr lang="en-US" sz="1500" dirty="0">
+                <a:solidFill>
+                  <a:srgbClr val="5F6478"/>
+                </a:solidFill>
+                <a:latin typeface="Calibri" pitchFamily="34" charset="0"/>
+                <a:ea typeface="Calibri" pitchFamily="34" charset="-122"/>
+                <a:cs typeface="Calibri" pitchFamily="34" charset="-120"/>
+              </a:rPr>
+              <a:t>la custodisce e la cambia ogni 7 giorni</a:t>
+            </a:r>
+            <a:endParaRPr lang="en-US" sz="1500" dirty="0"/>
+          </a:p>
+        </p:txBody>
+      </p:sp>
+      <p:sp>
+        <p:nvSpPr>
+          <p:cNvPr id="16" name="Shape 11"/>
+          <p:cNvSpPr/>
+          <p:nvPr/>
+        </p:nvSpPr>
+        <p:spPr>
+          <a:xfrm>
+            <a:off x="6675120" y="2697480"/>
+            <a:ext cx="2194560" cy="0"/>
+          </a:xfrm>
+          <a:prstGeom prst="line">
+            <a:avLst/>
+          </a:prstGeom>
+          <a:noFill/>
+          <a:ln w="25400">
+            <a:solidFill>
+              <a:srgbClr val="D9D6EC"/>
+            </a:solidFill>
+            <a:prstDash val="solid"/>
+            <a:tailEnd type="triangle"/>
+          </a:ln>
+        </p:spPr>
+      </p:sp>
+      <p:sp>
+        <p:nvSpPr>
+          <p:cNvPr id="17" name="Shape 12"/>
+          <p:cNvSpPr/>
+          <p:nvPr/>
+        </p:nvSpPr>
+        <p:spPr>
+          <a:xfrm>
+            <a:off x="9326880" y="2240280"/>
+            <a:ext cx="914400" cy="914400"/>
+          </a:xfrm>
+          <a:prstGeom prst="ellipse">
+            <a:avLst/>
+          </a:prstGeom>
+          <a:solidFill>
+            <a:srgbClr val="5B3FD0"/>
+          </a:solidFill>
+          <a:ln w="12700">
+            <a:solidFill>
+              <a:srgbClr val="5B3FD0"/>
+            </a:solidFill>
+            <a:prstDash val="solid"/>
+          </a:ln>
+        </p:spPr>
+      </p:sp>
+      <p:pic>
+        <p:nvPicPr>
+          <p:cNvPr id="18" name="Image 2" descr="preencoded.png">    </p:cNvPr>
+          <p:cNvPicPr>
+            <a:picLocks noChangeAspect="1"/>
+          </p:cNvPicPr>
+          <p:nvPr/>
+        </p:nvPicPr>
+        <p:blipFill>
+          <a:blip r:embed="rId3"/>
+          <a:stretch>
+            <a:fillRect/>
+          </a:stretch>
+        </p:blipFill>
+        <p:spPr>
+          <a:xfrm>
+            <a:off x="9555480" y="2468880"/>
+            <a:ext cx="457200" cy="457200"/>
+          </a:xfrm>
+          <a:prstGeom prst="rect">
+            <a:avLst/>
+          </a:prstGeom>
+        </p:spPr>
+      </p:pic>
+      <p:sp>
+        <p:nvSpPr>
+          <p:cNvPr id="19" name="Text 13"/>
+          <p:cNvSpPr txBox="1"/>
+          <p:nvPr/>
+        </p:nvSpPr>
+        <p:spPr>
+          <a:xfrm>
+            <a:off x="8046720" y="3246120"/>
+            <a:ext cx="3566160" cy="457200"/>
+          </a:xfrm>
+          <a:prstGeom prst="rect">
+            <a:avLst/>
+          </a:prstGeom>
+          <a:noFill/>
+          <a:ln/>
+        </p:spPr>
+        <p:txBody>
+          <a:bodyPr wrap="square" lIns="0" tIns="0" rIns="0" bIns="0" rtlCol="0" anchor="ctr"/>
+          <a:lstStyle/>
+          <a:p>
+            <a:pPr algn="ctr" indent="0" marL="0">
+              <a:buNone/>
+            </a:pPr>
+            <a:r>
+              <a:rPr lang="en-US" sz="1900" b="1" dirty="0">
+                <a:solidFill>
+                  <a:srgbClr val="22253A"/>
+                </a:solidFill>
+                <a:latin typeface="Calibri" pitchFamily="34" charset="0"/>
+                <a:ea typeface="Calibri" pitchFamily="34" charset="-122"/>
+                <a:cs typeface="Calibri" pitchFamily="34" charset="-120"/>
+              </a:rPr>
+              <a:t>Server app</a:t>
+            </a:r>
+            <a:endParaRPr lang="en-US" sz="1900" dirty="0"/>
+          </a:p>
+        </p:txBody>
+      </p:sp>
+      <p:sp>
+        <p:nvSpPr>
+          <p:cNvPr id="20" name="Text 14"/>
+          <p:cNvSpPr txBox="1"/>
+          <p:nvPr/>
+        </p:nvSpPr>
+        <p:spPr>
+          <a:xfrm>
+            <a:off x="8046720" y="3703320"/>
+            <a:ext cx="3566160" cy="640080"/>
+          </a:xfrm>
+          <a:prstGeom prst="rect">
+            <a:avLst/>
+          </a:prstGeom>
+          <a:noFill/>
+          <a:ln/>
+        </p:spPr>
+        <p:txBody>
+          <a:bodyPr wrap="square" lIns="0" tIns="0" rIns="0" bIns="0" rtlCol="0" anchor="ctr"/>
+          <a:lstStyle/>
+          <a:p>
+            <a:pPr algn="ctr" indent="0" marL="0">
+              <a:buNone/>
+            </a:pPr>
+            <a:r>
+              <a:rPr lang="en-US" sz="1500" dirty="0">
+                <a:solidFill>
+                  <a:srgbClr val="5F6478"/>
+                </a:solidFill>
+                <a:latin typeface="Calibri" pitchFamily="34" charset="0"/>
+                <a:ea typeface="Calibri" pitchFamily="34" charset="-122"/>
+                <a:cs typeface="Calibri" pitchFamily="34" charset="-120"/>
+              </a:rPr>
+              <a:t>la legge con il permesso IAM (secrets.tf)</a:t>
+            </a:r>
+            <a:endParaRPr lang="en-US" sz="1500" dirty="0"/>
+          </a:p>
+        </p:txBody>
+      </p:sp>
+      <p:sp>
+        <p:nvSpPr>
+          <p:cNvPr id="21" name="Shape 15"/>
+          <p:cNvSpPr/>
+          <p:nvPr/>
+        </p:nvSpPr>
+        <p:spPr>
+          <a:xfrm>
+            <a:off x="548640" y="4572000"/>
+            <a:ext cx="5440680" cy="1463040"/>
+          </a:xfrm>
+          <a:prstGeom prst="roundRect">
+            <a:avLst>
+              <a:gd name="adj" fmla="val 7500"/>
+            </a:avLst>
+          </a:prstGeom>
+          <a:solidFill>
+            <a:srgbClr val="EEEAFB"/>
+          </a:solidFill>
+          <a:ln w="12700">
+            <a:solidFill>
+              <a:srgbClr val="EEEAFB"/>
+            </a:solidFill>
+            <a:prstDash val="solid"/>
+          </a:ln>
+        </p:spPr>
+      </p:sp>
+      <p:sp>
+        <p:nvSpPr>
+          <p:cNvPr id="22" name="Shape 16"/>
+          <p:cNvSpPr/>
+          <p:nvPr/>
+        </p:nvSpPr>
+        <p:spPr>
+          <a:xfrm>
+            <a:off x="777240" y="4800600"/>
+            <a:ext cx="548640" cy="548640"/>
+          </a:xfrm>
+          <a:prstGeom prst="ellipse">
+            <a:avLst/>
+          </a:prstGeom>
+          <a:solidFill>
+            <a:srgbClr val="5B3FD0"/>
+          </a:solidFill>
+          <a:ln w="12700">
+            <a:solidFill>
+              <a:srgbClr val="5B3FD0"/>
+            </a:solidFill>
+            <a:prstDash val="solid"/>
+          </a:ln>
+        </p:spPr>
+      </p:sp>
+      <p:pic>
+        <p:nvPicPr>
+          <p:cNvPr id="23" name="Image 3" descr="preencoded.png">    </p:cNvPr>
+          <p:cNvPicPr>
+            <a:picLocks noChangeAspect="1"/>
+          </p:cNvPicPr>
+          <p:nvPr/>
+        </p:nvPicPr>
+        <p:blipFill>
+          <a:blip r:embed="rId4"/>
+          <a:stretch>
+            <a:fillRect/>
+          </a:stretch>
+        </p:blipFill>
+        <p:spPr>
+          <a:xfrm>
+            <a:off x="914400" y="4937760"/>
+            <a:ext cx="274320" cy="274320"/>
+          </a:xfrm>
+          <a:prstGeom prst="rect">
+            <a:avLst/>
+          </a:prstGeom>
+        </p:spPr>
+      </p:pic>
+      <p:sp>
+        <p:nvSpPr>
+          <p:cNvPr id="24" name="Text 17"/>
+          <p:cNvSpPr txBox="1"/>
+          <p:nvPr/>
+        </p:nvSpPr>
+        <p:spPr>
+          <a:xfrm>
+            <a:off x="1508760" y="4800600"/>
+            <a:ext cx="4251960" cy="548640"/>
+          </a:xfrm>
+          <a:prstGeom prst="rect">
+            <a:avLst/>
+          </a:prstGeom>
+          <a:noFill/>
+          <a:ln/>
+        </p:spPr>
+        <p:txBody>
+          <a:bodyPr wrap="square" lIns="0" tIns="0" rIns="0" bIns="0" rtlCol="0" anchor="ctr"/>
+          <a:lstStyle/>
+          <a:p>
+            <a:pPr indent="0" marL="0">
+              <a:buNone/>
+            </a:pPr>
+            <a:r>
+              <a:rPr lang="en-US" sz="1800" b="1" dirty="0">
+                <a:solidFill>
+                  <a:srgbClr val="22253A"/>
+                </a:solidFill>
+                <a:latin typeface="Calibri" pitchFamily="34" charset="0"/>
+                <a:ea typeface="Calibri" pitchFamily="34" charset="-122"/>
+                <a:cs typeface="Calibri" pitchFamily="34" charset="-120"/>
+              </a:rPr>
+              <a:t>Terraform vede solo l'ARN</a:t>
+            </a:r>
+            <a:endParaRPr lang="en-US" sz="1800" dirty="0"/>
+          </a:p>
+        </p:txBody>
+      </p:sp>
+      <p:sp>
+        <p:nvSpPr>
+          <p:cNvPr id="25" name="Text 18"/>
+          <p:cNvSpPr txBox="1"/>
+          <p:nvPr/>
+        </p:nvSpPr>
+        <p:spPr>
+          <a:xfrm>
+            <a:off x="777240" y="5486400"/>
+            <a:ext cx="4983480" cy="365760"/>
+          </a:xfrm>
+          <a:prstGeom prst="rect">
+            <a:avLst/>
+          </a:prstGeom>
+          <a:noFill/>
+          <a:ln/>
+        </p:spPr>
+        <p:txBody>
           <a:bodyPr wrap="square" lIns="0" tIns="0" rIns="0" bIns="0" rtlCol="0" anchor="t"/>
           <a:lstStyle/>
           <a:p>
-            <a:pPr marL="342900" indent="-342900">
+            <a:pPr indent="0" marL="0">
               <a:spcAft>
                 <a:spcPts val="600"/>
               </a:spcAft>
-              <a:buSzPct val="100000"/>
-              <a:buChar char="•"/>
-            </a:pPr>
-            <a:r>
-              <a:rPr lang="en-US" sz="1600" dirty="0">
+              <a:buNone/>
+            </a:pPr>
+            <a:r>
+              <a:rPr lang="en-US" sz="1500" dirty="0">
                 <a:solidFill>
                   <a:srgbClr val="22253A"/>
                 </a:solidFill>
@@ -6682,68 +7413,26 @@
                 <a:ea typeface="Calibri" pitchFamily="34" charset="-122"/>
                 <a:cs typeface="Calibri" pitchFamily="34" charset="-120"/>
               </a:rPr>
-              <a:t>AWS RIFIUTA la cancellazione: Terraform, console, CLI</a:t>
-            </a:r>
-            <a:endParaRPr lang="en-US" sz="1600" dirty="0"/>
-          </a:p>
-          <a:p>
-            <a:pPr marL="342900" indent="-342900">
-              <a:spcAft>
-                <a:spcPts val="600"/>
-              </a:spcAft>
-              <a:buSzPct val="100000"/>
-              <a:buChar char="•"/>
-            </a:pPr>
-            <a:r>
-              <a:rPr lang="en-US" sz="1600" dirty="0">
-                <a:solidFill>
-                  <a:srgbClr val="22253A"/>
-                </a:solidFill>
-                <a:latin typeface="Calibri" pitchFamily="34" charset="0"/>
-                <a:ea typeface="Calibri" pitchFamily="34" charset="-122"/>
-                <a:cs typeface="Calibri" pitchFamily="34" charset="-120"/>
-              </a:rPr>
-              <a:t>Per cancellare: prima togli la protezione, con un apply a parte</a:t>
-            </a:r>
-            <a:endParaRPr lang="en-US" sz="1600" dirty="0"/>
-          </a:p>
-          <a:p>
-            <a:pPr marL="342900" indent="-342900">
-              <a:spcAft>
-                <a:spcPts val="600"/>
-              </a:spcAft>
-              <a:buSzPct val="100000"/>
-              <a:buChar char="•"/>
-            </a:pPr>
-            <a:r>
-              <a:rPr lang="en-US" sz="1600" dirty="0">
-                <a:solidFill>
-                  <a:srgbClr val="22253A"/>
-                </a:solidFill>
-                <a:latin typeface="Calibri" pitchFamily="34" charset="0"/>
-                <a:ea typeface="Calibri" pitchFamily="34" charset="-122"/>
-                <a:cs typeface="Calibri" pitchFamily="34" charset="-120"/>
-              </a:rPr>
-              <a:t>Un destroy nella cartella sbagliata si ferma con un errore</a:t>
-            </a:r>
-            <a:endParaRPr lang="en-US" sz="1600" dirty="0"/>
-          </a:p>
-        </p:txBody>
-      </p:sp>
-      <p:sp>
-        <p:nvSpPr>
-          <p:cNvPr id="10" name="Shape 6"/>
+              <a:t>l'indirizzo del segreto: master_user_secret[0].secret_arn</a:t>
+            </a:r>
+            <a:endParaRPr lang="en-US" sz="1500" dirty="0"/>
+          </a:p>
+        </p:txBody>
+      </p:sp>
+      <p:sp>
+        <p:nvSpPr>
+          <p:cNvPr id="26" name="Shape 19"/>
           <p:cNvSpPr/>
           <p:nvPr/>
         </p:nvSpPr>
         <p:spPr>
           <a:xfrm>
-            <a:off x="6172200" y="1371600"/>
-            <a:ext cx="5468112" cy="2743200"/>
+            <a:off x="6172200" y="4572000"/>
+            <a:ext cx="5468112" cy="1463040"/>
           </a:xfrm>
           <a:prstGeom prst="roundRect">
             <a:avLst>
-              <a:gd name="adj" fmla="val 4000"/>
+              <a:gd name="adj" fmla="val 7500"/>
             </a:avLst>
           </a:prstGeom>
           <a:solidFill>
@@ -6759,13 +7448,13 @@
       </p:sp>
       <p:sp>
         <p:nvSpPr>
-          <p:cNvPr id="11" name="Shape 7"/>
+          <p:cNvPr id="27" name="Shape 20"/>
           <p:cNvSpPr/>
           <p:nvPr/>
         </p:nvSpPr>
         <p:spPr>
           <a:xfrm>
-            <a:off x="6400800" y="1600200"/>
+            <a:off x="6400800" y="4800600"/>
             <a:ext cx="548640" cy="548640"/>
           </a:xfrm>
           <a:prstGeom prst="ellipse">
@@ -6784,21 +7473,21 @@
       </p:sp>
       <p:pic>
         <p:nvPicPr>
-          <p:cNvPr id="12" name="Image 1" descr="preencoded.png">    </p:cNvPr>
+          <p:cNvPr id="28" name="Image 4" descr="preencoded.png">    </p:cNvPr>
           <p:cNvPicPr>
             <a:picLocks noChangeAspect="1"/>
           </p:cNvPicPr>
           <p:nvPr/>
         </p:nvPicPr>
         <p:blipFill>
-          <a:blip r:embed="rId2"/>
+          <a:blip r:embed="rId5"/>
           <a:stretch>
             <a:fillRect/>
           </a:stretch>
         </p:blipFill>
         <p:spPr>
           <a:xfrm>
-            <a:off x="6537960" y="1737360"/>
+            <a:off x="6537960" y="4937760"/>
             <a:ext cx="274320" cy="274320"/>
           </a:xfrm>
           <a:prstGeom prst="rect">
@@ -6808,13 +7497,13 @@
       </p:pic>
       <p:sp>
         <p:nvSpPr>
-          <p:cNvPr id="13" name="Text 8"/>
+          <p:cNvPr id="29" name="Text 21"/>
           <p:cNvSpPr txBox="1"/>
           <p:nvPr/>
         </p:nvSpPr>
         <p:spPr>
           <a:xfrm>
-            <a:off x="7132320" y="1600200"/>
+            <a:off x="7132320" y="4800600"/>
             <a:ext cx="4279392" cy="548640"/>
           </a:xfrm>
           <a:prstGeom prst="rect">
@@ -6839,7 +7528,7 @@
                 <a:ea typeface="Calibri" pitchFamily="34" charset="-122"/>
                 <a:cs typeface="Calibri" pitchFamily="34" charset="-120"/>
               </a:rPr>
-              <a:t>Lo snapshot finale</a:t>
+              <a:t>Cambia ogni 7 giorni</a:t>
             </a:r>
             <a:endParaRPr lang="en-US" sz="1800" dirty="0"/>
           </a:p>
@@ -6847,14 +7536,14 @@
       </p:sp>
       <p:sp>
         <p:nvSpPr>
-          <p:cNvPr id="14" name="Text 9"/>
+          <p:cNvPr id="30" name="Text 22"/>
           <p:cNvSpPr txBox="1"/>
           <p:nvPr/>
         </p:nvSpPr>
         <p:spPr>
           <a:xfrm>
-            <a:off x="6400800" y="2286000"/>
-            <a:ext cx="5010912" cy="1645920"/>
+            <a:off x="6400800" y="5486400"/>
+            <a:ext cx="5010912" cy="365760"/>
           </a:xfrm>
           <a:prstGeom prst="rect">
             <a:avLst/>
@@ -6866,15 +7555,14 @@
           <a:bodyPr wrap="square" lIns="0" tIns="0" rIns="0" bIns="0" rtlCol="0" anchor="t"/>
           <a:lstStyle/>
           <a:p>
-            <a:pPr marL="342900" indent="-342900">
+            <a:pPr indent="0" marL="0">
               <a:spcAft>
                 <a:spcPts val="600"/>
               </a:spcAft>
-              <a:buSzPct val="100000"/>
-              <a:buChar char="•"/>
-            </a:pPr>
-            <a:r>
-              <a:rPr lang="en-US" sz="1600" dirty="0">
+              <a:buNone/>
+            </a:pPr>
+            <a:r>
+              <a:rPr lang="en-US" sz="1500" dirty="0">
                 <a:solidFill>
                   <a:srgbClr val="22253A"/>
                 </a:solidFill>
@@ -6882,190 +7570,9 @@
                 <a:ea typeface="Calibri" pitchFamily="34" charset="-122"/>
                 <a:cs typeface="Calibri" pitchFamily="34" charset="-120"/>
               </a:rPr>
-              <a:t>Un'ultima foto prima di cancellare</a:t>
-            </a:r>
-            <a:endParaRPr lang="en-US" sz="1600" dirty="0"/>
-          </a:p>
-          <a:p>
-            <a:pPr marL="342900" indent="-342900">
-              <a:spcAft>
-                <a:spcPts val="600"/>
-              </a:spcAft>
-              <a:buSzPct val="100000"/>
-              <a:buChar char="•"/>
-            </a:pPr>
-            <a:r>
-              <a:rPr lang="en-US" sz="1600" dirty="0">
-                <a:solidFill>
-                  <a:srgbClr val="22253A"/>
-                </a:solidFill>
-                <a:latin typeface="Calibri" pitchFamily="34" charset="0"/>
-                <a:ea typeface="Calibri" pitchFamily="34" charset="-122"/>
-                <a:cs typeface="Calibri" pitchFamily="34" charset="-120"/>
-              </a:rPr>
-              <a:t>Resta DOPO la cancellazione (e si paga)</a:t>
-            </a:r>
-            <a:endParaRPr lang="en-US" sz="1600" dirty="0"/>
-          </a:p>
-          <a:p>
-            <a:pPr marL="342900" indent="-342900">
-              <a:spcAft>
-                <a:spcPts val="600"/>
-              </a:spcAft>
-              <a:buSzPct val="100000"/>
-              <a:buChar char="•"/>
-            </a:pPr>
-            <a:r>
-              <a:rPr lang="en-US" sz="1600" dirty="0">
-                <a:solidFill>
-                  <a:srgbClr val="22253A"/>
-                </a:solidFill>
-                <a:latin typeface="Calibri" pitchFamily="34" charset="0"/>
-                <a:ea typeface="Calibri" pitchFamily="34" charset="-122"/>
-                <a:cs typeface="Calibri" pitchFamily="34" charset="-120"/>
-              </a:rPr>
-              <a:t>Nome unico: suffisso casuale con random_id</a:t>
-            </a:r>
-            <a:endParaRPr lang="en-US" sz="1600" dirty="0"/>
-          </a:p>
-        </p:txBody>
-      </p:sp>
-      <p:sp>
-        <p:nvSpPr>
-          <p:cNvPr id="15" name="Shape 10"/>
-          <p:cNvSpPr/>
-          <p:nvPr/>
-        </p:nvSpPr>
-        <p:spPr>
-          <a:xfrm>
-            <a:off x="548640" y="4389120"/>
-            <a:ext cx="11094415" cy="1600200"/>
-          </a:xfrm>
-          <a:prstGeom prst="roundRect">
-            <a:avLst>
-              <a:gd name="adj" fmla="val 4571"/>
-            </a:avLst>
-          </a:prstGeom>
-          <a:solidFill>
-            <a:srgbClr val="1E1E2E"/>
-          </a:solidFill>
-          <a:ln w="12700">
-            <a:solidFill>
-              <a:srgbClr val="1E1E2E"/>
-            </a:solidFill>
-            <a:prstDash val="solid"/>
-          </a:ln>
-        </p:spPr>
-      </p:sp>
-      <p:sp>
-        <p:nvSpPr>
-          <p:cNvPr id="16" name="Text 11"/>
-          <p:cNvSpPr txBox="1"/>
-          <p:nvPr/>
-        </p:nvSpPr>
-        <p:spPr>
-          <a:xfrm>
-            <a:off x="731520" y="4462272"/>
-            <a:ext cx="10728655" cy="274320"/>
-          </a:xfrm>
-          <a:prstGeom prst="rect">
-            <a:avLst/>
-          </a:prstGeom>
-          <a:noFill/>
-          <a:ln/>
-        </p:spPr>
-        <p:txBody>
-          <a:bodyPr wrap="square" lIns="0" tIns="0" rIns="0" bIns="0" rtlCol="0" anchor="t"/>
-          <a:lstStyle/>
-          <a:p>
-            <a:pPr indent="0" marL="0">
-              <a:buNone/>
-            </a:pPr>
-            <a:r>
-              <a:rPr lang="en-US" sz="1300" b="1" dirty="0">
-                <a:solidFill>
-                  <a:srgbClr val="F2B880"/>
-                </a:solidFill>
-                <a:latin typeface="Calibri" pitchFamily="34" charset="0"/>
-                <a:ea typeface="Calibri" pitchFamily="34" charset="-122"/>
-                <a:cs typeface="Calibri" pitchFamily="34" charset="-120"/>
-              </a:rPr>
-              <a:t>rds.tf</a:t>
-            </a:r>
-            <a:endParaRPr lang="en-US" sz="1300" dirty="0"/>
-          </a:p>
-        </p:txBody>
-      </p:sp>
-      <p:sp>
-        <p:nvSpPr>
-          <p:cNvPr id="17" name="Text 12"/>
-          <p:cNvSpPr txBox="1"/>
-          <p:nvPr/>
-        </p:nvSpPr>
-        <p:spPr>
-          <a:xfrm>
-            <a:off x="731520" y="4800600"/>
-            <a:ext cx="10728655" cy="1051560"/>
-          </a:xfrm>
-          <a:prstGeom prst="rect">
-            <a:avLst/>
-          </a:prstGeom>
-          <a:noFill/>
-          <a:ln/>
-        </p:spPr>
-        <p:txBody>
-          <a:bodyPr wrap="square" lIns="0" tIns="0" rIns="0" bIns="0" rtlCol="0" anchor="t"/>
-          <a:lstStyle/>
-          <a:p>
-            <a:pPr indent="0" marL="0">
-              <a:buNone/>
-            </a:pPr>
-            <a:r>
-              <a:rPr lang="en-US" sz="1600" dirty="0">
-                <a:solidFill>
-                  <a:srgbClr val="E6E6F0"/>
-                </a:solidFill>
-                <a:latin typeface="Courier New" pitchFamily="34" charset="0"/>
-                <a:ea typeface="Courier New" pitchFamily="34" charset="-122"/>
-                <a:cs typeface="Courier New" pitchFamily="34" charset="-120"/>
-              </a:rPr>
-              <a:t>deletion_protection       = var.db_deletion_protection</a:t>
-            </a:r>
-            <a:endParaRPr lang="en-US" sz="1600" dirty="0"/>
-          </a:p>
-          <a:p>
-            <a:pPr indent="0" marL="0">
-              <a:buNone/>
-            </a:pPr>
-            <a:r>
-              <a:rPr lang="en-US" sz="1600" dirty="0">
-                <a:solidFill>
-                  <a:srgbClr val="E6E6F0"/>
-                </a:solidFill>
-                <a:latin typeface="Courier New" pitchFamily="34" charset="0"/>
-                <a:ea typeface="Courier New" pitchFamily="34" charset="-122"/>
-                <a:cs typeface="Courier New" pitchFamily="34" charset="-120"/>
-              </a:rPr>
-              <a:t>skip_final_snapshot       = false</a:t>
-            </a:r>
-            <a:endParaRPr lang="en-US" sz="1600" dirty="0"/>
-          </a:p>
-          <a:p>
-            <a:pPr indent="0" marL="0">
-              <a:buNone/>
-            </a:pPr>
-            <a:r>
-              <a:rPr lang="en-US" sz="1600" dirty="0">
-                <a:solidFill>
-                  <a:srgbClr val="E6E6F0"/>
-                </a:solidFill>
-                <a:latin typeface="Courier New" pitchFamily="34" charset="0"/>
-                <a:ea typeface="Courier New" pitchFamily="34" charset="-122"/>
-                <a:cs typeface="Courier New" pitchFamily="34" charset="-120"/>
-              </a:rPr>
-              <a:t>final_snapshot_identifier = "${var.project}-db-final-${random_id.db_final_snapshot.hex}"</a:t>
-            </a:r>
-            <a:endParaRPr lang="en-US" sz="1600" dirty="0"/>
+              <a:t>mai copiarla in un file: si legge dal segreto ogni volta</a:t>
+            </a:r>
+            <a:endParaRPr lang="en-US" sz="1500" dirty="0"/>
           </a:p>
         </p:txBody>
       </p:sp>
@@ -7182,7 +7689,7 @@
                 <a:ea typeface="Calibri" pitchFamily="34" charset="-122"/>
                 <a:cs typeface="Calibri" pitchFamily="34" charset="-120"/>
               </a:rPr>
-              <a:t>Chi può collegarsi: lo abbiamo già deciso</a:t>
+              <a:t>Le protezioni contro la cancellazione</a:t>
             </a:r>
             <a:endParaRPr lang="en-US" sz="3200" dirty="0"/>
           </a:p>
@@ -7227,9 +7734,706 @@
           </a:p>
         </p:txBody>
       </p:sp>
+      <p:sp>
+        <p:nvSpPr>
+          <p:cNvPr id="5" name="Shape 2"/>
+          <p:cNvSpPr/>
+          <p:nvPr/>
+        </p:nvSpPr>
+        <p:spPr>
+          <a:xfrm>
+            <a:off x="548640" y="1371600"/>
+            <a:ext cx="5440680" cy="2743200"/>
+          </a:xfrm>
+          <a:prstGeom prst="roundRect">
+            <a:avLst>
+              <a:gd name="adj" fmla="val 4000"/>
+            </a:avLst>
+          </a:prstGeom>
+          <a:solidFill>
+            <a:srgbClr val="E5F4EC"/>
+          </a:solidFill>
+          <a:ln w="12700">
+            <a:solidFill>
+              <a:srgbClr val="E5F4EC"/>
+            </a:solidFill>
+            <a:prstDash val="solid"/>
+          </a:ln>
+        </p:spPr>
+      </p:sp>
+      <p:sp>
+        <p:nvSpPr>
+          <p:cNvPr id="6" name="Shape 3"/>
+          <p:cNvSpPr/>
+          <p:nvPr/>
+        </p:nvSpPr>
+        <p:spPr>
+          <a:xfrm>
+            <a:off x="777240" y="1600200"/>
+            <a:ext cx="548640" cy="548640"/>
+          </a:xfrm>
+          <a:prstGeom prst="ellipse">
+            <a:avLst/>
+          </a:prstGeom>
+          <a:solidFill>
+            <a:srgbClr val="2E9E6B"/>
+          </a:solidFill>
+          <a:ln w="12700">
+            <a:solidFill>
+              <a:srgbClr val="2E9E6B"/>
+            </a:solidFill>
+            <a:prstDash val="solid"/>
+          </a:ln>
+        </p:spPr>
+      </p:sp>
+      <p:pic>
+        <p:nvPicPr>
+          <p:cNvPr id="7" name="Image 0" descr="preencoded.png">    </p:cNvPr>
+          <p:cNvPicPr>
+            <a:picLocks noChangeAspect="1"/>
+          </p:cNvPicPr>
+          <p:nvPr/>
+        </p:nvPicPr>
+        <p:blipFill>
+          <a:blip r:embed="rId1"/>
+          <a:stretch>
+            <a:fillRect/>
+          </a:stretch>
+        </p:blipFill>
+        <p:spPr>
+          <a:xfrm>
+            <a:off x="914400" y="1737360"/>
+            <a:ext cx="274320" cy="274320"/>
+          </a:xfrm>
+          <a:prstGeom prst="rect">
+            <a:avLst/>
+          </a:prstGeom>
+        </p:spPr>
+      </p:pic>
+      <p:sp>
+        <p:nvSpPr>
+          <p:cNvPr id="8" name="Text 4"/>
+          <p:cNvSpPr txBox="1"/>
+          <p:nvPr/>
+        </p:nvSpPr>
+        <p:spPr>
+          <a:xfrm>
+            <a:off x="1508760" y="1600200"/>
+            <a:ext cx="4251960" cy="548640"/>
+          </a:xfrm>
+          <a:prstGeom prst="rect">
+            <a:avLst/>
+          </a:prstGeom>
+          <a:noFill/>
+          <a:ln/>
+        </p:spPr>
+        <p:txBody>
+          <a:bodyPr wrap="square" lIns="0" tIns="0" rIns="0" bIns="0" rtlCol="0" anchor="ctr"/>
+          <a:lstStyle/>
+          <a:p>
+            <a:pPr indent="0" marL="0">
+              <a:buNone/>
+            </a:pPr>
+            <a:r>
+              <a:rPr lang="en-US" sz="1800" b="1" dirty="0">
+                <a:solidFill>
+                  <a:srgbClr val="22253A"/>
+                </a:solidFill>
+                <a:latin typeface="Calibri" pitchFamily="34" charset="0"/>
+                <a:ea typeface="Calibri" pitchFamily="34" charset="-122"/>
+                <a:cs typeface="Calibri" pitchFamily="34" charset="-120"/>
+              </a:rPr>
+              <a:t>deletion_protection = true</a:t>
+            </a:r>
+            <a:endParaRPr lang="en-US" sz="1800" dirty="0"/>
+          </a:p>
+        </p:txBody>
+      </p:sp>
+      <p:sp>
+        <p:nvSpPr>
+          <p:cNvPr id="9" name="Text 5"/>
+          <p:cNvSpPr txBox="1"/>
+          <p:nvPr/>
+        </p:nvSpPr>
+        <p:spPr>
+          <a:xfrm>
+            <a:off x="777240" y="2286000"/>
+            <a:ext cx="4983480" cy="1645920"/>
+          </a:xfrm>
+          <a:prstGeom prst="rect">
+            <a:avLst/>
+          </a:prstGeom>
+          <a:noFill/>
+          <a:ln/>
+        </p:spPr>
+        <p:txBody>
+          <a:bodyPr wrap="square" lIns="0" tIns="0" rIns="0" bIns="0" rtlCol="0" anchor="t"/>
+          <a:lstStyle/>
+          <a:p>
+            <a:pPr marL="342900" indent="-342900">
+              <a:spcAft>
+                <a:spcPts val="600"/>
+              </a:spcAft>
+              <a:buSzPct val="100000"/>
+              <a:buChar char="•"/>
+            </a:pPr>
+            <a:r>
+              <a:rPr lang="en-US" sz="1600" dirty="0">
+                <a:solidFill>
+                  <a:srgbClr val="22253A"/>
+                </a:solidFill>
+                <a:latin typeface="Calibri" pitchFamily="34" charset="0"/>
+                <a:ea typeface="Calibri" pitchFamily="34" charset="-122"/>
+                <a:cs typeface="Calibri" pitchFamily="34" charset="-120"/>
+              </a:rPr>
+              <a:t>AWS RIFIUTA la cancellazione: Terraform, console, CLI</a:t>
+            </a:r>
+            <a:endParaRPr lang="en-US" sz="1600" dirty="0"/>
+          </a:p>
+          <a:p>
+            <a:pPr marL="342900" indent="-342900">
+              <a:spcAft>
+                <a:spcPts val="600"/>
+              </a:spcAft>
+              <a:buSzPct val="100000"/>
+              <a:buChar char="•"/>
+            </a:pPr>
+            <a:r>
+              <a:rPr lang="en-US" sz="1600" dirty="0">
+                <a:solidFill>
+                  <a:srgbClr val="22253A"/>
+                </a:solidFill>
+                <a:latin typeface="Calibri" pitchFamily="34" charset="0"/>
+                <a:ea typeface="Calibri" pitchFamily="34" charset="-122"/>
+                <a:cs typeface="Calibri" pitchFamily="34" charset="-120"/>
+              </a:rPr>
+              <a:t>Per cancellare: prima togli la protezione, con un apply a parte</a:t>
+            </a:r>
+            <a:endParaRPr lang="en-US" sz="1600" dirty="0"/>
+          </a:p>
+          <a:p>
+            <a:pPr marL="342900" indent="-342900">
+              <a:spcAft>
+                <a:spcPts val="600"/>
+              </a:spcAft>
+              <a:buSzPct val="100000"/>
+              <a:buChar char="•"/>
+            </a:pPr>
+            <a:r>
+              <a:rPr lang="en-US" sz="1600" dirty="0">
+                <a:solidFill>
+                  <a:srgbClr val="22253A"/>
+                </a:solidFill>
+                <a:latin typeface="Calibri" pitchFamily="34" charset="0"/>
+                <a:ea typeface="Calibri" pitchFamily="34" charset="-122"/>
+                <a:cs typeface="Calibri" pitchFamily="34" charset="-120"/>
+              </a:rPr>
+              <a:t>Un destroy nella cartella sbagliata si ferma con un errore</a:t>
+            </a:r>
+            <a:endParaRPr lang="en-US" sz="1600" dirty="0"/>
+          </a:p>
+        </p:txBody>
+      </p:sp>
+      <p:sp>
+        <p:nvSpPr>
+          <p:cNvPr id="10" name="Shape 6"/>
+          <p:cNvSpPr/>
+          <p:nvPr/>
+        </p:nvSpPr>
+        <p:spPr>
+          <a:xfrm>
+            <a:off x="6172200" y="1371600"/>
+            <a:ext cx="5468112" cy="2743200"/>
+          </a:xfrm>
+          <a:prstGeom prst="roundRect">
+            <a:avLst>
+              <a:gd name="adj" fmla="val 4000"/>
+            </a:avLst>
+          </a:prstGeom>
+          <a:solidFill>
+            <a:srgbClr val="FDF0E3"/>
+          </a:solidFill>
+          <a:ln w="12700">
+            <a:solidFill>
+              <a:srgbClr val="FDF0E3"/>
+            </a:solidFill>
+            <a:prstDash val="solid"/>
+          </a:ln>
+        </p:spPr>
+      </p:sp>
+      <p:sp>
+        <p:nvSpPr>
+          <p:cNvPr id="11" name="Shape 7"/>
+          <p:cNvSpPr/>
+          <p:nvPr/>
+        </p:nvSpPr>
+        <p:spPr>
+          <a:xfrm>
+            <a:off x="6400800" y="1600200"/>
+            <a:ext cx="548640" cy="548640"/>
+          </a:xfrm>
+          <a:prstGeom prst="ellipse">
+            <a:avLst/>
+          </a:prstGeom>
+          <a:solidFill>
+            <a:srgbClr val="F28C28"/>
+          </a:solidFill>
+          <a:ln w="12700">
+            <a:solidFill>
+              <a:srgbClr val="F28C28"/>
+            </a:solidFill>
+            <a:prstDash val="solid"/>
+          </a:ln>
+        </p:spPr>
+      </p:sp>
+      <p:pic>
+        <p:nvPicPr>
+          <p:cNvPr id="12" name="Image 1" descr="preencoded.png">    </p:cNvPr>
+          <p:cNvPicPr>
+            <a:picLocks noChangeAspect="1"/>
+          </p:cNvPicPr>
+          <p:nvPr/>
+        </p:nvPicPr>
+        <p:blipFill>
+          <a:blip r:embed="rId2"/>
+          <a:stretch>
+            <a:fillRect/>
+          </a:stretch>
+        </p:blipFill>
+        <p:spPr>
+          <a:xfrm>
+            <a:off x="6537960" y="1737360"/>
+            <a:ext cx="274320" cy="274320"/>
+          </a:xfrm>
+          <a:prstGeom prst="rect">
+            <a:avLst/>
+          </a:prstGeom>
+        </p:spPr>
+      </p:pic>
+      <p:sp>
+        <p:nvSpPr>
+          <p:cNvPr id="13" name="Text 8"/>
+          <p:cNvSpPr txBox="1"/>
+          <p:nvPr/>
+        </p:nvSpPr>
+        <p:spPr>
+          <a:xfrm>
+            <a:off x="7132320" y="1600200"/>
+            <a:ext cx="4279392" cy="548640"/>
+          </a:xfrm>
+          <a:prstGeom prst="rect">
+            <a:avLst/>
+          </a:prstGeom>
+          <a:noFill/>
+          <a:ln/>
+        </p:spPr>
+        <p:txBody>
+          <a:bodyPr wrap="square" lIns="0" tIns="0" rIns="0" bIns="0" rtlCol="0" anchor="ctr"/>
+          <a:lstStyle/>
+          <a:p>
+            <a:pPr indent="0" marL="0">
+              <a:buNone/>
+            </a:pPr>
+            <a:r>
+              <a:rPr lang="en-US" sz="1800" b="1" dirty="0">
+                <a:solidFill>
+                  <a:srgbClr val="22253A"/>
+                </a:solidFill>
+                <a:latin typeface="Calibri" pitchFamily="34" charset="0"/>
+                <a:ea typeface="Calibri" pitchFamily="34" charset="-122"/>
+                <a:cs typeface="Calibri" pitchFamily="34" charset="-120"/>
+              </a:rPr>
+              <a:t>Lo snapshot finale</a:t>
+            </a:r>
+            <a:endParaRPr lang="en-US" sz="1800" dirty="0"/>
+          </a:p>
+        </p:txBody>
+      </p:sp>
+      <p:sp>
+        <p:nvSpPr>
+          <p:cNvPr id="14" name="Text 9"/>
+          <p:cNvSpPr txBox="1"/>
+          <p:nvPr/>
+        </p:nvSpPr>
+        <p:spPr>
+          <a:xfrm>
+            <a:off x="6400800" y="2286000"/>
+            <a:ext cx="5010912" cy="1645920"/>
+          </a:xfrm>
+          <a:prstGeom prst="rect">
+            <a:avLst/>
+          </a:prstGeom>
+          <a:noFill/>
+          <a:ln/>
+        </p:spPr>
+        <p:txBody>
+          <a:bodyPr wrap="square" lIns="0" tIns="0" rIns="0" bIns="0" rtlCol="0" anchor="t"/>
+          <a:lstStyle/>
+          <a:p>
+            <a:pPr marL="342900" indent="-342900">
+              <a:spcAft>
+                <a:spcPts val="600"/>
+              </a:spcAft>
+              <a:buSzPct val="100000"/>
+              <a:buChar char="•"/>
+            </a:pPr>
+            <a:r>
+              <a:rPr lang="en-US" sz="1600" dirty="0">
+                <a:solidFill>
+                  <a:srgbClr val="22253A"/>
+                </a:solidFill>
+                <a:latin typeface="Calibri" pitchFamily="34" charset="0"/>
+                <a:ea typeface="Calibri" pitchFamily="34" charset="-122"/>
+                <a:cs typeface="Calibri" pitchFamily="34" charset="-120"/>
+              </a:rPr>
+              <a:t>Un'ultima foto prima di cancellare</a:t>
+            </a:r>
+            <a:endParaRPr lang="en-US" sz="1600" dirty="0"/>
+          </a:p>
+          <a:p>
+            <a:pPr marL="342900" indent="-342900">
+              <a:spcAft>
+                <a:spcPts val="600"/>
+              </a:spcAft>
+              <a:buSzPct val="100000"/>
+              <a:buChar char="•"/>
+            </a:pPr>
+            <a:r>
+              <a:rPr lang="en-US" sz="1600" dirty="0">
+                <a:solidFill>
+                  <a:srgbClr val="22253A"/>
+                </a:solidFill>
+                <a:latin typeface="Calibri" pitchFamily="34" charset="0"/>
+                <a:ea typeface="Calibri" pitchFamily="34" charset="-122"/>
+                <a:cs typeface="Calibri" pitchFamily="34" charset="-120"/>
+              </a:rPr>
+              <a:t>Resta DOPO la cancellazione (e si paga)</a:t>
+            </a:r>
+            <a:endParaRPr lang="en-US" sz="1600" dirty="0"/>
+          </a:p>
+          <a:p>
+            <a:pPr marL="342900" indent="-342900">
+              <a:spcAft>
+                <a:spcPts val="600"/>
+              </a:spcAft>
+              <a:buSzPct val="100000"/>
+              <a:buChar char="•"/>
+            </a:pPr>
+            <a:r>
+              <a:rPr lang="en-US" sz="1600" dirty="0">
+                <a:solidFill>
+                  <a:srgbClr val="22253A"/>
+                </a:solidFill>
+                <a:latin typeface="Calibri" pitchFamily="34" charset="0"/>
+                <a:ea typeface="Calibri" pitchFamily="34" charset="-122"/>
+                <a:cs typeface="Calibri" pitchFamily="34" charset="-120"/>
+              </a:rPr>
+              <a:t>Nome unico: suffisso casuale con random_id</a:t>
+            </a:r>
+            <a:endParaRPr lang="en-US" sz="1600" dirty="0"/>
+          </a:p>
+        </p:txBody>
+      </p:sp>
+      <p:sp>
+        <p:nvSpPr>
+          <p:cNvPr id="15" name="Shape 10"/>
+          <p:cNvSpPr/>
+          <p:nvPr/>
+        </p:nvSpPr>
+        <p:spPr>
+          <a:xfrm>
+            <a:off x="548640" y="4389120"/>
+            <a:ext cx="11094415" cy="1600200"/>
+          </a:xfrm>
+          <a:prstGeom prst="roundRect">
+            <a:avLst>
+              <a:gd name="adj" fmla="val 4571"/>
+            </a:avLst>
+          </a:prstGeom>
+          <a:solidFill>
+            <a:srgbClr val="1E1E2E"/>
+          </a:solidFill>
+          <a:ln w="12700">
+            <a:solidFill>
+              <a:srgbClr val="1E1E2E"/>
+            </a:solidFill>
+            <a:prstDash val="solid"/>
+          </a:ln>
+        </p:spPr>
+      </p:sp>
+      <p:sp>
+        <p:nvSpPr>
+          <p:cNvPr id="16" name="Text 11"/>
+          <p:cNvSpPr txBox="1"/>
+          <p:nvPr/>
+        </p:nvSpPr>
+        <p:spPr>
+          <a:xfrm>
+            <a:off x="731520" y="4462272"/>
+            <a:ext cx="10728655" cy="274320"/>
+          </a:xfrm>
+          <a:prstGeom prst="rect">
+            <a:avLst/>
+          </a:prstGeom>
+          <a:noFill/>
+          <a:ln/>
+        </p:spPr>
+        <p:txBody>
+          <a:bodyPr wrap="square" lIns="0" tIns="0" rIns="0" bIns="0" rtlCol="0" anchor="t"/>
+          <a:lstStyle/>
+          <a:p>
+            <a:pPr indent="0" marL="0">
+              <a:buNone/>
+            </a:pPr>
+            <a:r>
+              <a:rPr lang="en-US" sz="1300" b="1" dirty="0">
+                <a:solidFill>
+                  <a:srgbClr val="F2B880"/>
+                </a:solidFill>
+                <a:latin typeface="Calibri" pitchFamily="34" charset="0"/>
+                <a:ea typeface="Calibri" pitchFamily="34" charset="-122"/>
+                <a:cs typeface="Calibri" pitchFamily="34" charset="-120"/>
+              </a:rPr>
+              <a:t>rds.tf</a:t>
+            </a:r>
+            <a:endParaRPr lang="en-US" sz="1300" dirty="0"/>
+          </a:p>
+        </p:txBody>
+      </p:sp>
+      <p:sp>
+        <p:nvSpPr>
+          <p:cNvPr id="17" name="Text 12"/>
+          <p:cNvSpPr txBox="1"/>
+          <p:nvPr/>
+        </p:nvSpPr>
+        <p:spPr>
+          <a:xfrm>
+            <a:off x="731520" y="4800600"/>
+            <a:ext cx="10728655" cy="1051560"/>
+          </a:xfrm>
+          <a:prstGeom prst="rect">
+            <a:avLst/>
+          </a:prstGeom>
+          <a:noFill/>
+          <a:ln/>
+        </p:spPr>
+        <p:txBody>
+          <a:bodyPr wrap="square" lIns="0" tIns="0" rIns="0" bIns="0" rtlCol="0" anchor="t"/>
+          <a:lstStyle/>
+          <a:p>
+            <a:pPr indent="0" marL="0">
+              <a:buNone/>
+            </a:pPr>
+            <a:r>
+              <a:rPr lang="en-US" sz="1600" dirty="0">
+                <a:solidFill>
+                  <a:srgbClr val="E6E6F0"/>
+                </a:solidFill>
+                <a:latin typeface="Courier New" pitchFamily="34" charset="0"/>
+                <a:ea typeface="Courier New" pitchFamily="34" charset="-122"/>
+                <a:cs typeface="Courier New" pitchFamily="34" charset="-120"/>
+              </a:rPr>
+              <a:t>deletion_protection       = var.db_deletion_protection</a:t>
+            </a:r>
+            <a:endParaRPr lang="en-US" sz="1600" dirty="0"/>
+          </a:p>
+          <a:p>
+            <a:pPr indent="0" marL="0">
+              <a:buNone/>
+            </a:pPr>
+            <a:r>
+              <a:rPr lang="en-US" sz="1600" dirty="0">
+                <a:solidFill>
+                  <a:srgbClr val="E6E6F0"/>
+                </a:solidFill>
+                <a:latin typeface="Courier New" pitchFamily="34" charset="0"/>
+                <a:ea typeface="Courier New" pitchFamily="34" charset="-122"/>
+                <a:cs typeface="Courier New" pitchFamily="34" charset="-120"/>
+              </a:rPr>
+              <a:t>skip_final_snapshot       = false</a:t>
+            </a:r>
+            <a:endParaRPr lang="en-US" sz="1600" dirty="0"/>
+          </a:p>
+          <a:p>
+            <a:pPr indent="0" marL="0">
+              <a:buNone/>
+            </a:pPr>
+            <a:r>
+              <a:rPr lang="en-US" sz="1600" dirty="0">
+                <a:solidFill>
+                  <a:srgbClr val="E6E6F0"/>
+                </a:solidFill>
+                <a:latin typeface="Courier New" pitchFamily="34" charset="0"/>
+                <a:ea typeface="Courier New" pitchFamily="34" charset="-122"/>
+                <a:cs typeface="Courier New" pitchFamily="34" charset="-120"/>
+              </a:rPr>
+              <a:t>final_snapshot_identifier = "${var.project}-db-final-${random_id.db_final_snapshot.hex}"</a:t>
+            </a:r>
+            <a:endParaRPr lang="en-US" sz="1600" dirty="0"/>
+          </a:p>
+        </p:txBody>
+      </p:sp>
+      <p:sp>
+        <p:nvSpPr>
+          <p:cNvPr id="25" name="Slide Number Placeholder 0"/>
+          <p:cNvSpPr>
+            <a:spLocks noGrp="1"/>
+          </p:cNvSpPr>
+          <p:nvPr>
+            <p:ph type="sldNum" sz="quarter" idx="4294967295"/>
+          </p:nvPr>
+        </p:nvSpPr>
+        <p:spPr>
+          <a:xfrm>
+            <a:off x="11155680" y="6400800"/>
+            <a:ext cx="548640" cy="274320"/>
+          </a:xfrm>
+          <a:prstGeom prst="rect">
+            <a:avLst/>
+          </a:prstGeom>
+          <a:extLst>
+            <a:ext uri="{C572A759-6A51-4108-AA02-DFA0A04FC94B}">
+              <ma14:wrappingTextBoxFlag xmlns:ma14="http://schemas.microsoft.com/office/mac/drawingml/2011/main" val="0"/>
+            </a:ext>
+          </a:extLst>
+        </p:spPr>
+        <p:txBody>
+          <a:bodyPr/>
+          <a:lstStyle>
+            <a:lvl1pPr>
+              <a:defRPr sz="1000">
+                <a:solidFill>
+                  <a:srgbClr val="5F6478"/>
+                </a:solidFill>
+                <a:latin typeface="Calibri"/>
+                <a:ea typeface="Calibri"/>
+                <a:cs typeface="Calibri"/>
+              </a:defRPr>
+            </a:lvl1pPr>
+          </a:lstStyle>
+          <a:p>
+            <a:pPr algn="r"/>
+            <a:fld id="{F7021451-1387-4CA6-816F-3879F97B5CBC}" type="slidenum">
+              <a:rPr b="0" lang="en-US"/>
+              <a:t>15</a:t>
+            </a:fld>
+            <a:endParaRPr lang="en-US"/>
+          </a:p>
+        </p:txBody>
+      </p:sp>
+    </p:spTree>
+  </p:cSld>
+  <p:clrMapOvr>
+    <a:masterClrMapping/>
+  </p:clrMapOvr>
+</p:sld>
+</file>
+
+<file path=ppt/slides/slide16.xml><?xml version="1.0" encoding="utf-8"?>
+<p:sld xmlns:a="http://schemas.openxmlformats.org/drawingml/2006/main" xmlns:r="http://schemas.openxmlformats.org/officeDocument/2006/relationships" xmlns:p="http://schemas.openxmlformats.org/presentationml/2006/main">
+  <p:cSld name="Slide 16">
+    <p:bg>
+      <p:bgPr>
+        <a:solidFill>
+          <a:srgbClr val="FFFFFF"/>
+        </a:solidFill>
+      </p:bgPr>
+    </p:bg>
+    <p:spTree>
+      <p:nvGrpSpPr>
+        <p:cNvPr id="1" name=""/>
+        <p:cNvGrpSpPr/>
+        <p:nvPr/>
+      </p:nvGrpSpPr>
+      <p:grpSpPr>
+        <a:xfrm>
+          <a:off x="0" y="0"/>
+          <a:ext cx="0" cy="0"/>
+          <a:chOff x="0" y="0"/>
+          <a:chExt cx="0" cy="0"/>
+        </a:xfrm>
+      </p:grpSpPr>
+      <p:sp>
+        <p:nvSpPr>
+          <p:cNvPr id="2" name="Text 0"/>
+          <p:cNvSpPr txBox="1"/>
+          <p:nvPr/>
+        </p:nvSpPr>
+        <p:spPr>
+          <a:xfrm>
+            <a:off x="548640" y="365760"/>
+            <a:ext cx="11094415" cy="777240"/>
+          </a:xfrm>
+          <a:prstGeom prst="rect">
+            <a:avLst/>
+          </a:prstGeom>
+          <a:noFill/>
+          <a:ln/>
+        </p:spPr>
+        <p:txBody>
+          <a:bodyPr wrap="square" lIns="0" tIns="0" rIns="0" bIns="0" rtlCol="0" anchor="ctr"/>
+          <a:lstStyle/>
+          <a:p>
+            <a:pPr indent="0" marL="0">
+              <a:buNone/>
+            </a:pPr>
+            <a:r>
+              <a:rPr lang="en-US" sz="3200" b="1" dirty="0">
+                <a:solidFill>
+                  <a:srgbClr val="22253A"/>
+                </a:solidFill>
+                <a:latin typeface="Calibri" pitchFamily="34" charset="0"/>
+                <a:ea typeface="Calibri" pitchFamily="34" charset="-122"/>
+                <a:cs typeface="Calibri" pitchFamily="34" charset="-120"/>
+              </a:rPr>
+              <a:t>Chi può collegarsi: lo abbiamo già deciso</a:t>
+            </a:r>
+            <a:endParaRPr lang="en-US" sz="3200" dirty="0"/>
+          </a:p>
+        </p:txBody>
+      </p:sp>
+      <p:sp>
+        <p:nvSpPr>
+          <p:cNvPr id="3" name="Text 1"/>
+          <p:cNvSpPr txBox="1"/>
+          <p:nvPr/>
+        </p:nvSpPr>
+        <p:spPr>
+          <a:xfrm>
+            <a:off x="548640" y="6400800"/>
+            <a:ext cx="7315200" cy="274320"/>
+          </a:xfrm>
+          <a:prstGeom prst="rect">
+            <a:avLst/>
+          </a:prstGeom>
+          <a:noFill/>
+          <a:ln/>
+        </p:spPr>
+        <p:txBody>
+          <a:bodyPr wrap="square" lIns="0" tIns="0" rIns="0" bIns="0" rtlCol="0" anchor="ctr"/>
+          <a:lstStyle/>
+          <a:p>
+            <a:pPr indent="0" marL="0">
+              <a:buNone/>
+            </a:pPr>
+            <a:r>
+              <a:rPr lang="en-US" sz="1000" dirty="0">
+                <a:solidFill>
+                  <a:srgbClr val="5F6478"/>
+                </a:solidFill>
+                <a:latin typeface="Calibri" pitchFamily="34" charset="0"/>
+                <a:ea typeface="Calibri" pitchFamily="34" charset="-122"/>
+                <a:cs typeface="Calibri" pitchFamily="34" charset="-120"/>
+              </a:rPr>
+              <a:t>Dispensa 6 · RDS PostgreSQL in alta affidabilità</a:t>
+            </a:r>
+            <a:endParaRPr lang="en-US" sz="1000" dirty="0"/>
+          </a:p>
+        </p:txBody>
+      </p:sp>
       <p:graphicFrame>
         <p:nvGraphicFramePr>
-          <p:cNvPr id="16" name="Table 0"/>
+          <p:cNvPr id="17" name="Table 0"/>
           <p:cNvGraphicFramePr>
             <a:graphicFrameLocks noGrp="1"/>
           </p:cNvGraphicFramePr>
@@ -8370,7 +9574,7 @@
                           <a:ea typeface="Calibri" pitchFamily="34" charset="-122"/>
                           <a:cs typeface="Calibri" pitchFamily="34" charset="-120"/>
                         </a:rPr>
-                        <a:t>publicly_accessible = false · solo connessioni cifrate (sslmode=require)</a:t>
+                        <a:t>publicly_accessible = false · rds.force_ssl = 1 · client con verify-full</a:t>
                       </a:r>
                       <a:endParaRPr lang="en-US" sz="1600" dirty="0">
                         <a:latin typeface="Calibri" charset="0"/>
@@ -8575,625 +9779,6 @@
             <a:pPr algn="r"/>
             <a:fld id="{F7021451-1387-4CA6-816F-3879F97B5CBC}" type="slidenum">
               <a:rPr b="0" lang="en-US"/>
-              <a:t>15</a:t>
-            </a:fld>
-            <a:endParaRPr lang="en-US"/>
-          </a:p>
-        </p:txBody>
-      </p:sp>
-    </p:spTree>
-  </p:cSld>
-  <p:clrMapOvr>
-    <a:masterClrMapping/>
-  </p:clrMapOvr>
-</p:sld>
-</file>
-
-<file path=ppt/slides/slide16.xml><?xml version="1.0" encoding="utf-8"?>
-<p:sld xmlns:a="http://schemas.openxmlformats.org/drawingml/2006/main" xmlns:r="http://schemas.openxmlformats.org/officeDocument/2006/relationships" xmlns:p="http://schemas.openxmlformats.org/presentationml/2006/main">
-  <p:cSld name="Slide 16">
-    <p:bg>
-      <p:bgPr>
-        <a:solidFill>
-          <a:srgbClr val="FFFFFF"/>
-        </a:solidFill>
-      </p:bgPr>
-    </p:bg>
-    <p:spTree>
-      <p:nvGrpSpPr>
-        <p:cNvPr id="1" name=""/>
-        <p:cNvGrpSpPr/>
-        <p:nvPr/>
-      </p:nvGrpSpPr>
-      <p:grpSpPr>
-        <a:xfrm>
-          <a:off x="0" y="0"/>
-          <a:ext cx="0" cy="0"/>
-          <a:chOff x="0" y="0"/>
-          <a:chExt cx="0" cy="0"/>
-        </a:xfrm>
-      </p:grpSpPr>
-      <p:sp>
-        <p:nvSpPr>
-          <p:cNvPr id="2" name="Text 0"/>
-          <p:cNvSpPr txBox="1"/>
-          <p:nvPr/>
-        </p:nvSpPr>
-        <p:spPr>
-          <a:xfrm>
-            <a:off x="548640" y="365760"/>
-            <a:ext cx="11094415" cy="777240"/>
-          </a:xfrm>
-          <a:prstGeom prst="rect">
-            <a:avLst/>
-          </a:prstGeom>
-          <a:noFill/>
-          <a:ln/>
-        </p:spPr>
-        <p:txBody>
-          <a:bodyPr wrap="square" lIns="0" tIns="0" rIns="0" bIns="0" rtlCol="0" anchor="ctr"/>
-          <a:lstStyle/>
-          <a:p>
-            <a:pPr indent="0" marL="0">
-              <a:buNone/>
-            </a:pPr>
-            <a:r>
-              <a:rPr lang="en-US" sz="3200" b="1" dirty="0">
-                <a:solidFill>
-                  <a:srgbClr val="22253A"/>
-                </a:solidFill>
-                <a:latin typeface="Calibri" pitchFamily="34" charset="0"/>
-                <a:ea typeface="Calibri" pitchFamily="34" charset="-122"/>
-                <a:cs typeface="Calibri" pitchFamily="34" charset="-120"/>
-              </a:rPr>
-              <a:t>Il codice (1/2): dove sta e com'è fatto</a:t>
-            </a:r>
-            <a:endParaRPr lang="en-US" sz="3200" dirty="0"/>
-          </a:p>
-        </p:txBody>
-      </p:sp>
-      <p:sp>
-        <p:nvSpPr>
-          <p:cNvPr id="3" name="Text 1"/>
-          <p:cNvSpPr txBox="1"/>
-          <p:nvPr/>
-        </p:nvSpPr>
-        <p:spPr>
-          <a:xfrm>
-            <a:off x="548640" y="6400800"/>
-            <a:ext cx="7315200" cy="274320"/>
-          </a:xfrm>
-          <a:prstGeom prst="rect">
-            <a:avLst/>
-          </a:prstGeom>
-          <a:noFill/>
-          <a:ln/>
-        </p:spPr>
-        <p:txBody>
-          <a:bodyPr wrap="square" lIns="0" tIns="0" rIns="0" bIns="0" rtlCol="0" anchor="ctr"/>
-          <a:lstStyle/>
-          <a:p>
-            <a:pPr indent="0" marL="0">
-              <a:buNone/>
-            </a:pPr>
-            <a:r>
-              <a:rPr lang="en-US" sz="1000" dirty="0">
-                <a:solidFill>
-                  <a:srgbClr val="5F6478"/>
-                </a:solidFill>
-                <a:latin typeface="Calibri" pitchFamily="34" charset="0"/>
-                <a:ea typeface="Calibri" pitchFamily="34" charset="-122"/>
-                <a:cs typeface="Calibri" pitchFamily="34" charset="-120"/>
-              </a:rPr>
-              <a:t>Dispensa 6 · RDS PostgreSQL in alta affidabilità</a:t>
-            </a:r>
-            <a:endParaRPr lang="en-US" sz="1000" dirty="0"/>
-          </a:p>
-        </p:txBody>
-      </p:sp>
-      <p:sp>
-        <p:nvSpPr>
-          <p:cNvPr id="5" name="Shape 2"/>
-          <p:cNvSpPr/>
-          <p:nvPr/>
-        </p:nvSpPr>
-        <p:spPr>
-          <a:xfrm>
-            <a:off x="548640" y="1325880"/>
-            <a:ext cx="11094415" cy="4983480"/>
-          </a:xfrm>
-          <a:prstGeom prst="roundRect">
-            <a:avLst>
-              <a:gd name="adj" fmla="val 1468"/>
-            </a:avLst>
-          </a:prstGeom>
-          <a:solidFill>
-            <a:srgbClr val="1E1E2E"/>
-          </a:solidFill>
-          <a:ln w="12700">
-            <a:solidFill>
-              <a:srgbClr val="1E1E2E"/>
-            </a:solidFill>
-            <a:prstDash val="solid"/>
-          </a:ln>
-        </p:spPr>
-      </p:sp>
-      <p:sp>
-        <p:nvSpPr>
-          <p:cNvPr id="6" name="Text 3"/>
-          <p:cNvSpPr txBox="1"/>
-          <p:nvPr/>
-        </p:nvSpPr>
-        <p:spPr>
-          <a:xfrm>
-            <a:off x="731520" y="1399032"/>
-            <a:ext cx="10728655" cy="274320"/>
-          </a:xfrm>
-          <a:prstGeom prst="rect">
-            <a:avLst/>
-          </a:prstGeom>
-          <a:noFill/>
-          <a:ln/>
-        </p:spPr>
-        <p:txBody>
-          <a:bodyPr wrap="square" lIns="0" tIns="0" rIns="0" bIns="0" rtlCol="0" anchor="t"/>
-          <a:lstStyle/>
-          <a:p>
-            <a:pPr indent="0" marL="0">
-              <a:buNone/>
-            </a:pPr>
-            <a:r>
-              <a:rPr lang="en-US" sz="1300" b="1" dirty="0">
-                <a:solidFill>
-                  <a:srgbClr val="F2B880"/>
-                </a:solidFill>
-                <a:latin typeface="Calibri" pitchFamily="34" charset="0"/>
-                <a:ea typeface="Calibri" pitchFamily="34" charset="-122"/>
-                <a:cs typeface="Calibri" pitchFamily="34" charset="-120"/>
-              </a:rPr>
-              <a:t>rds.tf</a:t>
-            </a:r>
-            <a:endParaRPr lang="en-US" sz="1300" dirty="0"/>
-          </a:p>
-        </p:txBody>
-      </p:sp>
-      <p:sp>
-        <p:nvSpPr>
-          <p:cNvPr id="7" name="Text 4"/>
-          <p:cNvSpPr txBox="1"/>
-          <p:nvPr/>
-        </p:nvSpPr>
-        <p:spPr>
-          <a:xfrm>
-            <a:off x="731520" y="1737360"/>
-            <a:ext cx="10728655" cy="4434840"/>
-          </a:xfrm>
-          <a:prstGeom prst="rect">
-            <a:avLst/>
-          </a:prstGeom>
-          <a:noFill/>
-          <a:ln/>
-        </p:spPr>
-        <p:txBody>
-          <a:bodyPr wrap="square" lIns="0" tIns="0" rIns="0" bIns="0" rtlCol="0" anchor="t"/>
-          <a:lstStyle/>
-          <a:p>
-            <a:pPr indent="0" marL="0">
-              <a:buNone/>
-            </a:pPr>
-            <a:r>
-              <a:rPr lang="en-US" sz="1600" dirty="0">
-                <a:solidFill>
-                  <a:srgbClr val="E6E6F0"/>
-                </a:solidFill>
-                <a:latin typeface="Courier New" pitchFamily="34" charset="0"/>
-                <a:ea typeface="Courier New" pitchFamily="34" charset="-122"/>
-                <a:cs typeface="Courier New" pitchFamily="34" charset="-120"/>
-              </a:rPr>
-              <a:t>resource "aws_db_subnet_group" "main" {</a:t>
-            </a:r>
-            <a:endParaRPr lang="en-US" sz="1600" dirty="0"/>
-          </a:p>
-          <a:p>
-            <a:pPr indent="0" marL="0">
-              <a:buNone/>
-            </a:pPr>
-            <a:r>
-              <a:rPr lang="en-US" sz="1600" dirty="0">
-                <a:solidFill>
-                  <a:srgbClr val="E6E6F0"/>
-                </a:solidFill>
-                <a:latin typeface="Courier New" pitchFamily="34" charset="0"/>
-                <a:ea typeface="Courier New" pitchFamily="34" charset="-122"/>
-                <a:cs typeface="Courier New" pitchFamily="34" charset="-120"/>
-              </a:rPr>
-              <a:t>  name       = "${var.project}-db"</a:t>
-            </a:r>
-            <a:endParaRPr lang="en-US" sz="1600" dirty="0"/>
-          </a:p>
-          <a:p>
-            <a:pPr indent="0" marL="0">
-              <a:buNone/>
-            </a:pPr>
-            <a:r>
-              <a:rPr lang="en-US" sz="1600" dirty="0">
-                <a:solidFill>
-                  <a:srgbClr val="E6E6F0"/>
-                </a:solidFill>
-                <a:latin typeface="Courier New" pitchFamily="34" charset="0"/>
-                <a:ea typeface="Courier New" pitchFamily="34" charset="-122"/>
-                <a:cs typeface="Courier New" pitchFamily="34" charset="-120"/>
-              </a:rPr>
-              <a:t>  subnet_ids = [for s in aws_subnet.db : s.id]</a:t>
-            </a:r>
-            <a:endParaRPr lang="en-US" sz="1600" dirty="0"/>
-          </a:p>
-          <a:p>
-            <a:pPr indent="0" marL="0">
-              <a:buNone/>
-            </a:pPr>
-            <a:r>
-              <a:rPr lang="en-US" sz="1600" dirty="0">
-                <a:solidFill>
-                  <a:srgbClr val="E6E6F0"/>
-                </a:solidFill>
-                <a:latin typeface="Courier New" pitchFamily="34" charset="0"/>
-                <a:ea typeface="Courier New" pitchFamily="34" charset="-122"/>
-                <a:cs typeface="Courier New" pitchFamily="34" charset="-120"/>
-              </a:rPr>
-              <a:t>}</a:t>
-            </a:r>
-            <a:endParaRPr lang="en-US" sz="1600" dirty="0"/>
-          </a:p>
-          <a:p>
-            <a:pPr indent="0" marL="0">
-              <a:buNone/>
-            </a:pPr>
-            <a:r>
-              <a:rPr lang="en-US" sz="1600" dirty="0">
-                <a:solidFill>
-                  <a:srgbClr val="E6E6F0"/>
-                </a:solidFill>
-                <a:latin typeface="Courier New" pitchFamily="34" charset="0"/>
-                <a:ea typeface="Courier New" pitchFamily="34" charset="-122"/>
-                <a:cs typeface="Courier New" pitchFamily="34" charset="-120"/>
-              </a:rPr>
-              <a:t> </a:t>
-            </a:r>
-            <a:endParaRPr lang="en-US" sz="1600" dirty="0"/>
-          </a:p>
-          <a:p>
-            <a:pPr indent="0" marL="0">
-              <a:buNone/>
-            </a:pPr>
-            <a:r>
-              <a:rPr lang="en-US" sz="1600" dirty="0">
-                <a:solidFill>
-                  <a:srgbClr val="E6E6F0"/>
-                </a:solidFill>
-                <a:latin typeface="Courier New" pitchFamily="34" charset="0"/>
-                <a:ea typeface="Courier New" pitchFamily="34" charset="-122"/>
-                <a:cs typeface="Courier New" pitchFamily="34" charset="-120"/>
-              </a:rPr>
-              <a:t>resource "aws_db_instance" "main" {</a:t>
-            </a:r>
-            <a:endParaRPr lang="en-US" sz="1600" dirty="0"/>
-          </a:p>
-          <a:p>
-            <a:pPr indent="0" marL="0">
-              <a:buNone/>
-            </a:pPr>
-            <a:r>
-              <a:rPr lang="en-US" sz="1600" dirty="0">
-                <a:solidFill>
-                  <a:srgbClr val="E6E6F0"/>
-                </a:solidFill>
-                <a:latin typeface="Courier New" pitchFamily="34" charset="0"/>
-                <a:ea typeface="Courier New" pitchFamily="34" charset="-122"/>
-                <a:cs typeface="Courier New" pitchFamily="34" charset="-120"/>
-              </a:rPr>
-              <a:t>  identifier     = "${var.project}-db"</a:t>
-            </a:r>
-            <a:endParaRPr lang="en-US" sz="1600" dirty="0"/>
-          </a:p>
-          <a:p>
-            <a:pPr indent="0" marL="0">
-              <a:buNone/>
-            </a:pPr>
-            <a:r>
-              <a:rPr lang="en-US" sz="1600" dirty="0">
-                <a:solidFill>
-                  <a:srgbClr val="E6E6F0"/>
-                </a:solidFill>
-                <a:latin typeface="Courier New" pitchFamily="34" charset="0"/>
-                <a:ea typeface="Courier New" pitchFamily="34" charset="-122"/>
-                <a:cs typeface="Courier New" pitchFamily="34" charset="-120"/>
-              </a:rPr>
-              <a:t>  engine         = "postgres"</a:t>
-            </a:r>
-            <a:endParaRPr lang="en-US" sz="1600" dirty="0"/>
-          </a:p>
-          <a:p>
-            <a:pPr indent="0" marL="0">
-              <a:buNone/>
-            </a:pPr>
-            <a:r>
-              <a:rPr lang="en-US" sz="1600" dirty="0">
-                <a:solidFill>
-                  <a:srgbClr val="E6E6F0"/>
-                </a:solidFill>
-                <a:latin typeface="Courier New" pitchFamily="34" charset="0"/>
-                <a:ea typeface="Courier New" pitchFamily="34" charset="-122"/>
-                <a:cs typeface="Courier New" pitchFamily="34" charset="-120"/>
-              </a:rPr>
-              <a:t>  engine_version = var.db_engine_version   </a:t>
-            </a:r>
-            <a:pPr indent="0" marL="0">
-              <a:buNone/>
-            </a:pPr>
-            <a:r>
-              <a:rPr lang="en-US" sz="1600" dirty="0">
-                <a:solidFill>
-                  <a:srgbClr val="8FD694"/>
-                </a:solidFill>
-                <a:latin typeface="Courier New" pitchFamily="34" charset="0"/>
-                <a:ea typeface="Courier New" pitchFamily="34" charset="-122"/>
-                <a:cs typeface="Courier New" pitchFamily="34" charset="-120"/>
-              </a:rPr>
-              <a:t># "18"</a:t>
-            </a:r>
-            <a:endParaRPr lang="en-US" sz="1600" dirty="0"/>
-          </a:p>
-          <a:p>
-            <a:pPr indent="0" marL="0">
-              <a:buNone/>
-            </a:pPr>
-            <a:r>
-              <a:rPr lang="en-US" sz="1600" dirty="0">
-                <a:solidFill>
-                  <a:srgbClr val="E6E6F0"/>
-                </a:solidFill>
-                <a:latin typeface="Courier New" pitchFamily="34" charset="0"/>
-                <a:ea typeface="Courier New" pitchFamily="34" charset="-122"/>
-                <a:cs typeface="Courier New" pitchFamily="34" charset="-120"/>
-              </a:rPr>
-              <a:t>  instance_class = var.db_instance_class   </a:t>
-            </a:r>
-            <a:pPr indent="0" marL="0">
-              <a:buNone/>
-            </a:pPr>
-            <a:r>
-              <a:rPr lang="en-US" sz="1600" dirty="0">
-                <a:solidFill>
-                  <a:srgbClr val="8FD694"/>
-                </a:solidFill>
-                <a:latin typeface="Courier New" pitchFamily="34" charset="0"/>
-                <a:ea typeface="Courier New" pitchFamily="34" charset="-122"/>
-                <a:cs typeface="Courier New" pitchFamily="34" charset="-120"/>
-              </a:rPr>
-              <a:t># "db.t4g.micro"</a:t>
-            </a:r>
-            <a:endParaRPr lang="en-US" sz="1600" dirty="0"/>
-          </a:p>
-          <a:p>
-            <a:pPr indent="0" marL="0">
-              <a:buNone/>
-            </a:pPr>
-            <a:r>
-              <a:rPr lang="en-US" sz="1600" dirty="0">
-                <a:solidFill>
-                  <a:srgbClr val="E6E6F0"/>
-                </a:solidFill>
-                <a:latin typeface="Courier New" pitchFamily="34" charset="0"/>
-                <a:ea typeface="Courier New" pitchFamily="34" charset="-122"/>
-                <a:cs typeface="Courier New" pitchFamily="34" charset="-120"/>
-              </a:rPr>
-              <a:t>  allocated_storage     = 20      </a:t>
-            </a:r>
-            <a:pPr indent="0" marL="0">
-              <a:buNone/>
-            </a:pPr>
-            <a:r>
-              <a:rPr lang="en-US" sz="1600" dirty="0">
-                <a:solidFill>
-                  <a:srgbClr val="8FD694"/>
-                </a:solidFill>
-                <a:latin typeface="Courier New" pitchFamily="34" charset="0"/>
-                <a:ea typeface="Courier New" pitchFamily="34" charset="-122"/>
-                <a:cs typeface="Courier New" pitchFamily="34" charset="-120"/>
-              </a:rPr>
-              <a:t># GB iniziali</a:t>
-            </a:r>
-            <a:endParaRPr lang="en-US" sz="1600" dirty="0"/>
-          </a:p>
-          <a:p>
-            <a:pPr indent="0" marL="0">
-              <a:buNone/>
-            </a:pPr>
-            <a:r>
-              <a:rPr lang="en-US" sz="1600" dirty="0">
-                <a:solidFill>
-                  <a:srgbClr val="E6E6F0"/>
-                </a:solidFill>
-                <a:latin typeface="Courier New" pitchFamily="34" charset="0"/>
-                <a:ea typeface="Courier New" pitchFamily="34" charset="-122"/>
-                <a:cs typeface="Courier New" pitchFamily="34" charset="-120"/>
-              </a:rPr>
-              <a:t>  max_allocated_storage = 100     </a:t>
-            </a:r>
-            <a:pPr indent="0" marL="0">
-              <a:buNone/>
-            </a:pPr>
-            <a:r>
-              <a:rPr lang="en-US" sz="1600" dirty="0">
-                <a:solidFill>
-                  <a:srgbClr val="8FD694"/>
-                </a:solidFill>
-                <a:latin typeface="Courier New" pitchFamily="34" charset="0"/>
-                <a:ea typeface="Courier New" pitchFamily="34" charset="-122"/>
-                <a:cs typeface="Courier New" pitchFamily="34" charset="-120"/>
-              </a:rPr>
-              <a:t># cresce da solo fino a qui</a:t>
-            </a:r>
-            <a:endParaRPr lang="en-US" sz="1600" dirty="0"/>
-          </a:p>
-          <a:p>
-            <a:pPr indent="0" marL="0">
-              <a:buNone/>
-            </a:pPr>
-            <a:r>
-              <a:rPr lang="en-US" sz="1600" dirty="0">
-                <a:solidFill>
-                  <a:srgbClr val="E6E6F0"/>
-                </a:solidFill>
-                <a:latin typeface="Courier New" pitchFamily="34" charset="0"/>
-                <a:ea typeface="Courier New" pitchFamily="34" charset="-122"/>
-                <a:cs typeface="Courier New" pitchFamily="34" charset="-120"/>
-              </a:rPr>
-              <a:t>  storage_type          = "gp3"</a:t>
-            </a:r>
-            <a:endParaRPr lang="en-US" sz="1600" dirty="0"/>
-          </a:p>
-          <a:p>
-            <a:pPr indent="0" marL="0">
-              <a:buNone/>
-            </a:pPr>
-            <a:r>
-              <a:rPr lang="en-US" sz="1600" dirty="0">
-                <a:solidFill>
-                  <a:srgbClr val="E6E6F0"/>
-                </a:solidFill>
-                <a:latin typeface="Courier New" pitchFamily="34" charset="0"/>
-                <a:ea typeface="Courier New" pitchFamily="34" charset="-122"/>
-                <a:cs typeface="Courier New" pitchFamily="34" charset="-120"/>
-              </a:rPr>
-              <a:t>  storage_encrypted     = true    </a:t>
-            </a:r>
-            <a:pPr indent="0" marL="0">
-              <a:buNone/>
-            </a:pPr>
-            <a:r>
-              <a:rPr lang="en-US" sz="1600" dirty="0">
-                <a:solidFill>
-                  <a:srgbClr val="8FD694"/>
-                </a:solidFill>
-                <a:latin typeface="Courier New" pitchFamily="34" charset="0"/>
-                <a:ea typeface="Courier New" pitchFamily="34" charset="-122"/>
-                <a:cs typeface="Courier New" pitchFamily="34" charset="-120"/>
-              </a:rPr>
-              <a:t># chiave aws/rds</a:t>
-            </a:r>
-            <a:endParaRPr lang="en-US" sz="1600" dirty="0"/>
-          </a:p>
-          <a:p>
-            <a:pPr indent="0" marL="0">
-              <a:buNone/>
-            </a:pPr>
-            <a:r>
-              <a:rPr lang="en-US" sz="1600" dirty="0">
-                <a:solidFill>
-                  <a:srgbClr val="E6E6F0"/>
-                </a:solidFill>
-                <a:latin typeface="Courier New" pitchFamily="34" charset="0"/>
-                <a:ea typeface="Courier New" pitchFamily="34" charset="-122"/>
-                <a:cs typeface="Courier New" pitchFamily="34" charset="-120"/>
-              </a:rPr>
-              <a:t>  db_name                     = "app"</a:t>
-            </a:r>
-            <a:endParaRPr lang="en-US" sz="1600" dirty="0"/>
-          </a:p>
-          <a:p>
-            <a:pPr indent="0" marL="0">
-              <a:buNone/>
-            </a:pPr>
-            <a:r>
-              <a:rPr lang="en-US" sz="1600" dirty="0">
-                <a:solidFill>
-                  <a:srgbClr val="E6E6F0"/>
-                </a:solidFill>
-                <a:latin typeface="Courier New" pitchFamily="34" charset="0"/>
-                <a:ea typeface="Courier New" pitchFamily="34" charset="-122"/>
-                <a:cs typeface="Courier New" pitchFamily="34" charset="-120"/>
-              </a:rPr>
-              <a:t>  username                    = "dbadmin"</a:t>
-            </a:r>
-            <a:endParaRPr lang="en-US" sz="1600" dirty="0"/>
-          </a:p>
-          <a:p>
-            <a:pPr indent="0" marL="0">
-              <a:buNone/>
-            </a:pPr>
-            <a:r>
-              <a:rPr lang="en-US" sz="1600" dirty="0">
-                <a:solidFill>
-                  <a:srgbClr val="E6E6F0"/>
-                </a:solidFill>
-                <a:latin typeface="Courier New" pitchFamily="34" charset="0"/>
-                <a:ea typeface="Courier New" pitchFamily="34" charset="-122"/>
-                <a:cs typeface="Courier New" pitchFamily="34" charset="-120"/>
-              </a:rPr>
-              <a:t>  manage_master_user_password = true   </a:t>
-            </a:r>
-            <a:pPr indent="0" marL="0">
-              <a:buNone/>
-            </a:pPr>
-            <a:r>
-              <a:rPr lang="en-US" sz="1600" dirty="0">
-                <a:solidFill>
-                  <a:srgbClr val="8FD694"/>
-                </a:solidFill>
-                <a:latin typeface="Courier New" pitchFamily="34" charset="0"/>
-                <a:ea typeface="Courier New" pitchFamily="34" charset="-122"/>
-                <a:cs typeface="Courier New" pitchFamily="34" charset="-120"/>
-              </a:rPr>
-              <a:t># nessuna password nel codice</a:t>
-            </a:r>
-            <a:endParaRPr lang="en-US" sz="1600" dirty="0"/>
-          </a:p>
-        </p:txBody>
-      </p:sp>
-      <p:sp>
-        <p:nvSpPr>
-          <p:cNvPr id="25" name="Slide Number Placeholder 0"/>
-          <p:cNvSpPr>
-            <a:spLocks noGrp="1"/>
-          </p:cNvSpPr>
-          <p:nvPr>
-            <p:ph type="sldNum" sz="quarter" idx="4294967295"/>
-          </p:nvPr>
-        </p:nvSpPr>
-        <p:spPr>
-          <a:xfrm>
-            <a:off x="11155680" y="6400800"/>
-            <a:ext cx="548640" cy="274320"/>
-          </a:xfrm>
-          <a:prstGeom prst="rect">
-            <a:avLst/>
-          </a:prstGeom>
-          <a:extLst>
-            <a:ext uri="{C572A759-6A51-4108-AA02-DFA0A04FC94B}">
-              <ma14:wrappingTextBoxFlag xmlns:ma14="http://schemas.microsoft.com/office/mac/drawingml/2011/main" val="0"/>
-            </a:ext>
-          </a:extLst>
-        </p:spPr>
-        <p:txBody>
-          <a:bodyPr/>
-          <a:lstStyle>
-            <a:lvl1pPr>
-              <a:defRPr sz="1000">
-                <a:solidFill>
-                  <a:srgbClr val="5F6478"/>
-                </a:solidFill>
-                <a:latin typeface="Calibri"/>
-                <a:ea typeface="Calibri"/>
-                <a:cs typeface="Calibri"/>
-              </a:defRPr>
-            </a:lvl1pPr>
-          </a:lstStyle>
-          <a:p>
-            <a:pPr algn="r"/>
-            <a:fld id="{F7021451-1387-4CA6-816F-3879F97B5CBC}" type="slidenum">
-              <a:rPr b="0" lang="en-US"/>
               <a:t>16</a:t>
             </a:fld>
             <a:endParaRPr lang="en-US"/>
@@ -9265,7 +9850,7 @@
                 <a:ea typeface="Calibri" pitchFamily="34" charset="-122"/>
                 <a:cs typeface="Calibri" pitchFamily="34" charset="-120"/>
               </a:rPr>
-              <a:t>Il codice (2/2): rete, copia, backup, protezioni</a:t>
+              <a:t>Il codice (1/2): dove sta e com'è fatto</a:t>
             </a:r>
             <a:endParaRPr lang="en-US" sz="3200" dirty="0"/>
           </a:p>
@@ -9319,11 +9904,11 @@
         <p:spPr>
           <a:xfrm>
             <a:off x="548640" y="1325880"/>
-            <a:ext cx="11094415" cy="4434840"/>
+            <a:ext cx="11094415" cy="4983480"/>
           </a:xfrm>
           <a:prstGeom prst="roundRect">
             <a:avLst>
-              <a:gd name="adj" fmla="val 1649"/>
+              <a:gd name="adj" fmla="val 1468"/>
             </a:avLst>
           </a:prstGeom>
           <a:solidFill>
@@ -9370,7 +9955,7 @@
                 <a:ea typeface="Calibri" pitchFamily="34" charset="-122"/>
                 <a:cs typeface="Calibri" pitchFamily="34" charset="-120"/>
               </a:rPr>
-              <a:t>rds.tf (continua)</a:t>
+              <a:t>rds.tf</a:t>
             </a:r>
             <a:endParaRPr lang="en-US" sz="1300" dirty="0"/>
           </a:p>
@@ -9385,7 +9970,7 @@
         <p:spPr>
           <a:xfrm>
             <a:off x="731520" y="1737360"/>
-            <a:ext cx="10728655" cy="3886200"/>
+            <a:ext cx="10728655" cy="4434840"/>
           </a:xfrm>
           <a:prstGeom prst="rect">
             <a:avLst/>
@@ -9409,7 +9994,7 @@
                 <a:ea typeface="Courier New" pitchFamily="34" charset="-122"/>
                 <a:cs typeface="Courier New" pitchFamily="34" charset="-120"/>
               </a:rPr>
-              <a:t>  db_subnet_group_name   = aws_db_subnet_group.main.name</a:t>
+              <a:t>resource "aws_db_subnet_group" "main" {</a:t>
             </a:r>
             <a:endParaRPr lang="en-US" sz="1600" dirty="0"/>
           </a:p>
@@ -9426,7 +10011,7 @@
                 <a:ea typeface="Courier New" pitchFamily="34" charset="-122"/>
                 <a:cs typeface="Courier New" pitchFamily="34" charset="-120"/>
               </a:rPr>
-              <a:t>  vpc_security_group_ids = [aws_security_group.db.id]</a:t>
+              <a:t>  name       = "${var.project}-db"</a:t>
             </a:r>
             <a:endParaRPr lang="en-US" sz="1600" dirty="0"/>
           </a:p>
@@ -9443,7 +10028,7 @@
                 <a:ea typeface="Courier New" pitchFamily="34" charset="-122"/>
                 <a:cs typeface="Courier New" pitchFamily="34" charset="-120"/>
               </a:rPr>
-              <a:t>  publicly_accessible    = false</a:t>
+              <a:t>  subnet_ids = [for s in aws_subnet.db : s.id]</a:t>
             </a:r>
             <a:endParaRPr lang="en-US" sz="1600" dirty="0"/>
           </a:p>
@@ -9460,7 +10045,7 @@
                 <a:ea typeface="Courier New" pitchFamily="34" charset="-122"/>
                 <a:cs typeface="Courier New" pitchFamily="34" charset="-120"/>
               </a:rPr>
-              <a:t> </a:t>
+              <a:t>}</a:t>
             </a:r>
             <a:endParaRPr lang="en-US" sz="1600" dirty="0"/>
           </a:p>
@@ -9477,21 +10062,24 @@
                 <a:ea typeface="Courier New" pitchFamily="34" charset="-122"/>
                 <a:cs typeface="Courier New" pitchFamily="34" charset="-120"/>
               </a:rPr>
-              <a:t>  multi_az = var.db_multi_az               </a:t>
-            </a:r>
+              <a:t> </a:t>
+            </a:r>
+            <a:endParaRPr lang="en-US" sz="1600" dirty="0"/>
+          </a:p>
+          <a:p>
             <a:pPr indent="0" marL="0">
               <a:buNone/>
             </a:pPr>
             <a:r>
               <a:rPr lang="en-US" sz="1600" dirty="0">
                 <a:solidFill>
-                  <a:srgbClr val="8FD694"/>
+                  <a:srgbClr val="E6E6F0"/>
                 </a:solidFill>
                 <a:latin typeface="Courier New" pitchFamily="34" charset="0"/>
                 <a:ea typeface="Courier New" pitchFamily="34" charset="-122"/>
                 <a:cs typeface="Courier New" pitchFamily="34" charset="-120"/>
               </a:rPr>
-              <a:t># true: standby nell'altra AZ</a:t>
+              <a:t>resource "aws_db_instance" "main" {</a:t>
             </a:r>
             <a:endParaRPr lang="en-US" sz="1600" dirty="0"/>
           </a:p>
@@ -9508,7 +10096,7 @@
                 <a:ea typeface="Courier New" pitchFamily="34" charset="-122"/>
                 <a:cs typeface="Courier New" pitchFamily="34" charset="-120"/>
               </a:rPr>
-              <a:t> </a:t>
+              <a:t>  identifier     = "${var.project}-db"</a:t>
             </a:r>
             <a:endParaRPr lang="en-US" sz="1600" dirty="0"/>
           </a:p>
@@ -9525,100 +10113,100 @@
                 <a:ea typeface="Courier New" pitchFamily="34" charset="-122"/>
                 <a:cs typeface="Courier New" pitchFamily="34" charset="-120"/>
               </a:rPr>
-              <a:t>  backup_retention_period    = 7           </a:t>
-            </a:r>
+              <a:t>  engine         = "postgres"</a:t>
+            </a:r>
+            <a:endParaRPr lang="en-US" sz="1600" dirty="0"/>
+          </a:p>
+          <a:p>
             <a:pPr indent="0" marL="0">
               <a:buNone/>
             </a:pPr>
             <a:r>
               <a:rPr lang="en-US" sz="1600" dirty="0">
                 <a:solidFill>
-                  <a:srgbClr val="8FD694"/>
+                  <a:srgbClr val="E6E6F0"/>
                 </a:solidFill>
                 <a:latin typeface="Courier New" pitchFamily="34" charset="0"/>
                 <a:ea typeface="Courier New" pitchFamily="34" charset="-122"/>
                 <a:cs typeface="Courier New" pitchFamily="34" charset="-120"/>
               </a:rPr>
-              <a:t># PITR fino a 7 giorni</a:t>
-            </a:r>
-            <a:endParaRPr lang="en-US" sz="1600" dirty="0"/>
-          </a:p>
-          <a:p>
+              <a:t>  engine_version = var.db_engine_version   </a:t>
+            </a:r>
             <a:pPr indent="0" marL="0">
               <a:buNone/>
             </a:pPr>
             <a:r>
               <a:rPr lang="en-US" sz="1600" dirty="0">
                 <a:solidFill>
-                  <a:srgbClr val="E6E6F0"/>
+                  <a:srgbClr val="8FD694"/>
                 </a:solidFill>
                 <a:latin typeface="Courier New" pitchFamily="34" charset="0"/>
                 <a:ea typeface="Courier New" pitchFamily="34" charset="-122"/>
                 <a:cs typeface="Courier New" pitchFamily="34" charset="-120"/>
               </a:rPr>
-              <a:t>  backup_window              = "01:00-02:00"           </a:t>
-            </a:r>
+              <a:t># "18"</a:t>
+            </a:r>
+            <a:endParaRPr lang="en-US" sz="1600" dirty="0"/>
+          </a:p>
+          <a:p>
             <a:pPr indent="0" marL="0">
               <a:buNone/>
             </a:pPr>
             <a:r>
               <a:rPr lang="en-US" sz="1600" dirty="0">
                 <a:solidFill>
-                  <a:srgbClr val="8FD694"/>
+                  <a:srgbClr val="E6E6F0"/>
                 </a:solidFill>
                 <a:latin typeface="Courier New" pitchFamily="34" charset="0"/>
                 <a:ea typeface="Courier New" pitchFamily="34" charset="-122"/>
                 <a:cs typeface="Courier New" pitchFamily="34" charset="-120"/>
               </a:rPr>
-              <a:t># UTC</a:t>
-            </a:r>
-            <a:endParaRPr lang="en-US" sz="1600" dirty="0"/>
-          </a:p>
-          <a:p>
+              <a:t>  instance_class = var.db_instance_class   </a:t>
+            </a:r>
             <a:pPr indent="0" marL="0">
               <a:buNone/>
             </a:pPr>
             <a:r>
               <a:rPr lang="en-US" sz="1600" dirty="0">
                 <a:solidFill>
-                  <a:srgbClr val="E6E6F0"/>
+                  <a:srgbClr val="8FD694"/>
                 </a:solidFill>
                 <a:latin typeface="Courier New" pitchFamily="34" charset="0"/>
                 <a:ea typeface="Courier New" pitchFamily="34" charset="-122"/>
                 <a:cs typeface="Courier New" pitchFamily="34" charset="-120"/>
               </a:rPr>
-              <a:t>  maintenance_window         = "sun:03:00-sun:04:00"   </a:t>
-            </a:r>
+              <a:t># "db.t4g.micro"</a:t>
+            </a:r>
+            <a:endParaRPr lang="en-US" sz="1600" dirty="0"/>
+          </a:p>
+          <a:p>
             <a:pPr indent="0" marL="0">
               <a:buNone/>
             </a:pPr>
             <a:r>
               <a:rPr lang="en-US" sz="1600" dirty="0">
                 <a:solidFill>
-                  <a:srgbClr val="8FD694"/>
+                  <a:srgbClr val="E6E6F0"/>
                 </a:solidFill>
                 <a:latin typeface="Courier New" pitchFamily="34" charset="0"/>
                 <a:ea typeface="Courier New" pitchFamily="34" charset="-122"/>
                 <a:cs typeface="Courier New" pitchFamily="34" charset="-120"/>
               </a:rPr>
-              <a:t># UTC</a:t>
-            </a:r>
-            <a:endParaRPr lang="en-US" sz="1600" dirty="0"/>
-          </a:p>
-          <a:p>
+              <a:t>  allocated_storage     = 20      </a:t>
+            </a:r>
             <a:pPr indent="0" marL="0">
               <a:buNone/>
             </a:pPr>
             <a:r>
               <a:rPr lang="en-US" sz="1600" dirty="0">
                 <a:solidFill>
-                  <a:srgbClr val="E6E6F0"/>
+                  <a:srgbClr val="8FD694"/>
                 </a:solidFill>
                 <a:latin typeface="Courier New" pitchFamily="34" charset="0"/>
                 <a:ea typeface="Courier New" pitchFamily="34" charset="-122"/>
                 <a:cs typeface="Courier New" pitchFamily="34" charset="-120"/>
               </a:rPr>
-              <a:t>  auto_minor_version_upgrade = true</a:t>
+              <a:t># GB iniziali</a:t>
             </a:r>
             <a:endParaRPr lang="en-US" sz="1600" dirty="0"/>
           </a:p>
@@ -9635,38 +10223,38 @@
                 <a:ea typeface="Courier New" pitchFamily="34" charset="-122"/>
                 <a:cs typeface="Courier New" pitchFamily="34" charset="-120"/>
               </a:rPr>
-              <a:t> </a:t>
-            </a:r>
-            <a:endParaRPr lang="en-US" sz="1600" dirty="0"/>
-          </a:p>
-          <a:p>
+              <a:t>  max_allocated_storage = 100     </a:t>
+            </a:r>
             <a:pPr indent="0" marL="0">
               <a:buNone/>
             </a:pPr>
             <a:r>
               <a:rPr lang="en-US" sz="1600" dirty="0">
                 <a:solidFill>
-                  <a:srgbClr val="E6E6F0"/>
+                  <a:srgbClr val="8FD694"/>
                 </a:solidFill>
                 <a:latin typeface="Courier New" pitchFamily="34" charset="0"/>
                 <a:ea typeface="Courier New" pitchFamily="34" charset="-122"/>
                 <a:cs typeface="Courier New" pitchFamily="34" charset="-120"/>
               </a:rPr>
-              <a:t>  </a:t>
-            </a:r>
+              <a:t># cresce da solo fino a qui</a:t>
+            </a:r>
+            <a:endParaRPr lang="en-US" sz="1600" dirty="0"/>
+          </a:p>
+          <a:p>
             <a:pPr indent="0" marL="0">
               <a:buNone/>
             </a:pPr>
             <a:r>
               <a:rPr lang="en-US" sz="1600" dirty="0">
                 <a:solidFill>
-                  <a:srgbClr val="8FD694"/>
+                  <a:srgbClr val="E6E6F0"/>
                 </a:solidFill>
                 <a:latin typeface="Courier New" pitchFamily="34" charset="0"/>
                 <a:ea typeface="Courier New" pitchFamily="34" charset="-122"/>
                 <a:cs typeface="Courier New" pitchFamily="34" charset="-120"/>
               </a:rPr>
-              <a:t># + deletion_protection e snapshot finale (slide precedente)</a:t>
+              <a:t>  storage_type          = "gp3"</a:t>
             </a:r>
             <a:endParaRPr lang="en-US" sz="1600" dirty="0"/>
           </a:p>
@@ -9683,38 +10271,38 @@
                 <a:ea typeface="Courier New" pitchFamily="34" charset="-122"/>
                 <a:cs typeface="Courier New" pitchFamily="34" charset="-120"/>
               </a:rPr>
-              <a:t> </a:t>
-            </a:r>
-            <a:endParaRPr lang="en-US" sz="1600" dirty="0"/>
-          </a:p>
-          <a:p>
+              <a:t>  storage_encrypted     = true    </a:t>
+            </a:r>
             <a:pPr indent="0" marL="0">
               <a:buNone/>
             </a:pPr>
             <a:r>
               <a:rPr lang="en-US" sz="1600" dirty="0">
                 <a:solidFill>
-                  <a:srgbClr val="E6E6F0"/>
+                  <a:srgbClr val="8FD694"/>
                 </a:solidFill>
                 <a:latin typeface="Courier New" pitchFamily="34" charset="0"/>
                 <a:ea typeface="Courier New" pitchFamily="34" charset="-122"/>
                 <a:cs typeface="Courier New" pitchFamily="34" charset="-120"/>
               </a:rPr>
-              <a:t>  apply_immediately = true                 </a:t>
-            </a:r>
+              <a:t># chiave aws/rds</a:t>
+            </a:r>
+            <a:endParaRPr lang="en-US" sz="1600" dirty="0"/>
+          </a:p>
+          <a:p>
             <a:pPr indent="0" marL="0">
               <a:buNone/>
             </a:pPr>
             <a:r>
               <a:rPr lang="en-US" sz="1600" dirty="0">
                 <a:solidFill>
-                  <a:srgbClr val="8FD694"/>
+                  <a:srgbClr val="E6E6F0"/>
                 </a:solidFill>
                 <a:latin typeface="Courier New" pitchFamily="34" charset="0"/>
                 <a:ea typeface="Courier New" pitchFamily="34" charset="-122"/>
                 <a:cs typeface="Courier New" pitchFamily="34" charset="-120"/>
               </a:rPr>
-              <a:t># in produzione: no</a:t>
+              <a:t>  db_name                     = "app"</a:t>
             </a:r>
             <a:endParaRPr lang="en-US" sz="1600" dirty="0"/>
           </a:p>
@@ -9731,48 +10319,40 @@
                 <a:ea typeface="Courier New" pitchFamily="34" charset="-122"/>
                 <a:cs typeface="Courier New" pitchFamily="34" charset="-120"/>
               </a:rPr>
-              <a:t>}</a:t>
+              <a:t>  username                    = "dbadmin"</a:t>
             </a:r>
             <a:endParaRPr lang="en-US" sz="1600" dirty="0"/>
           </a:p>
-        </p:txBody>
-      </p:sp>
-      <p:sp>
-        <p:nvSpPr>
-          <p:cNvPr id="8" name="Text 5"/>
-          <p:cNvSpPr txBox="1"/>
-          <p:nvPr/>
-        </p:nvSpPr>
-        <p:spPr>
-          <a:xfrm>
-            <a:off x="548640" y="5943600"/>
-            <a:ext cx="11094415" cy="365760"/>
-          </a:xfrm>
-          <a:prstGeom prst="rect">
-            <a:avLst/>
-          </a:prstGeom>
-          <a:noFill/>
-          <a:ln/>
-        </p:spPr>
-        <p:txBody>
-          <a:bodyPr wrap="square" lIns="0" tIns="0" rIns="0" bIns="0" rtlCol="0" anchor="ctr"/>
-          <a:lstStyle/>
-          <a:p>
-            <a:pPr algn="l" indent="0" marL="0">
-              <a:buNone/>
-            </a:pPr>
-            <a:r>
-              <a:rPr lang="en-US" sz="1500" i="1" dirty="0">
-                <a:solidFill>
-                  <a:srgbClr val="5F6478"/>
-                </a:solidFill>
-                <a:latin typeface="Calibri" pitchFamily="34" charset="0"/>
-                <a:ea typeface="Calibri" pitchFamily="34" charset="-122"/>
-                <a:cs typeface="Calibri" pitchFamily="34" charset="-120"/>
-              </a:rPr>
-              <a:t>Le due finestre sono in UTC (un'ora o due indietro rispetto all'Italia) e non devono sovrapporsi.</a:t>
-            </a:r>
-            <a:endParaRPr lang="en-US" sz="1500" dirty="0"/>
+          <a:p>
+            <a:pPr indent="0" marL="0">
+              <a:buNone/>
+            </a:pPr>
+            <a:r>
+              <a:rPr lang="en-US" sz="1600" dirty="0">
+                <a:solidFill>
+                  <a:srgbClr val="E6E6F0"/>
+                </a:solidFill>
+                <a:latin typeface="Courier New" pitchFamily="34" charset="0"/>
+                <a:ea typeface="Courier New" pitchFamily="34" charset="-122"/>
+                <a:cs typeface="Courier New" pitchFamily="34" charset="-120"/>
+              </a:rPr>
+              <a:t>  manage_master_user_password = true   </a:t>
+            </a:r>
+            <a:pPr indent="0" marL="0">
+              <a:buNone/>
+            </a:pPr>
+            <a:r>
+              <a:rPr lang="en-US" sz="1600" dirty="0">
+                <a:solidFill>
+                  <a:srgbClr val="8FD694"/>
+                </a:solidFill>
+                <a:latin typeface="Courier New" pitchFamily="34" charset="0"/>
+                <a:ea typeface="Courier New" pitchFamily="34" charset="-122"/>
+                <a:cs typeface="Courier New" pitchFamily="34" charset="-120"/>
+              </a:rPr>
+              <a:t># nessuna password nel codice</a:t>
+            </a:r>
+            <a:endParaRPr lang="en-US" sz="1600" dirty="0"/>
           </a:p>
         </p:txBody>
       </p:sp>
@@ -9889,7 +10469,7 @@
                 <a:ea typeface="Calibri" pitchFamily="34" charset="-122"/>
                 <a:cs typeface="Calibri" pitchFamily="34" charset="-120"/>
               </a:rPr>
-              <a:t>secrets.tf: il server legge SOLO quel segreto</a:t>
+              <a:t>Il codice (2/2): rete, copia, backup, protezioni</a:t>
             </a:r>
             <a:endParaRPr lang="en-US" sz="3200" dirty="0"/>
           </a:p>
@@ -9943,11 +10523,11 @@
         <p:spPr>
           <a:xfrm>
             <a:off x="548640" y="1325880"/>
-            <a:ext cx="11094415" cy="4526280"/>
+            <a:ext cx="11094415" cy="4434840"/>
           </a:xfrm>
           <a:prstGeom prst="roundRect">
             <a:avLst>
-              <a:gd name="adj" fmla="val 1616"/>
+              <a:gd name="adj" fmla="val 1649"/>
             </a:avLst>
           </a:prstGeom>
           <a:solidFill>
@@ -9994,7 +10574,7 @@
                 <a:ea typeface="Calibri" pitchFamily="34" charset="-122"/>
                 <a:cs typeface="Calibri" pitchFamily="34" charset="-120"/>
               </a:rPr>
-              <a:t>secrets.tf</a:t>
+              <a:t>rds.tf (continua)</a:t>
             </a:r>
             <a:endParaRPr lang="en-US" sz="1300" dirty="0"/>
           </a:p>
@@ -10009,7 +10589,7 @@
         <p:spPr>
           <a:xfrm>
             <a:off x="731520" y="1737360"/>
-            <a:ext cx="10728655" cy="3977640"/>
+            <a:ext cx="10728655" cy="3886200"/>
           </a:xfrm>
           <a:prstGeom prst="rect">
             <a:avLst/>
@@ -10033,7 +10613,7 @@
                 <a:ea typeface="Courier New" pitchFamily="34" charset="-122"/>
                 <a:cs typeface="Courier New" pitchFamily="34" charset="-120"/>
               </a:rPr>
-              <a:t>data "aws_iam_policy_document" "app_read_db_secret" {</a:t>
+              <a:t>  db_subnet_group_name   = aws_db_subnet_group.main.name</a:t>
             </a:r>
             <a:endParaRPr lang="en-US" sz="1600" dirty="0"/>
           </a:p>
@@ -10050,7 +10630,7 @@
                 <a:ea typeface="Courier New" pitchFamily="34" charset="-122"/>
                 <a:cs typeface="Courier New" pitchFamily="34" charset="-120"/>
               </a:rPr>
-              <a:t>  statement {</a:t>
+              <a:t>  vpc_security_group_ids = [aws_security_group.db.id]</a:t>
             </a:r>
             <a:endParaRPr lang="en-US" sz="1600" dirty="0"/>
           </a:p>
@@ -10067,7 +10647,7 @@
                 <a:ea typeface="Courier New" pitchFamily="34" charset="-122"/>
                 <a:cs typeface="Courier New" pitchFamily="34" charset="-120"/>
               </a:rPr>
-              <a:t>    actions   = ["secretsmanager:GetSecretValue"]</a:t>
+              <a:t>  publicly_accessible    = false</a:t>
             </a:r>
             <a:endParaRPr lang="en-US" sz="1600" dirty="0"/>
           </a:p>
@@ -10084,7 +10664,7 @@
                 <a:ea typeface="Courier New" pitchFamily="34" charset="-122"/>
                 <a:cs typeface="Courier New" pitchFamily="34" charset="-120"/>
               </a:rPr>
-              <a:t>    resources = [aws_db_instance.main.master_user_secret[0].secret_arn]</a:t>
+              <a:t> </a:t>
             </a:r>
             <a:endParaRPr lang="en-US" sz="1600" dirty="0"/>
           </a:p>
@@ -10101,24 +10681,21 @@
                 <a:ea typeface="Courier New" pitchFamily="34" charset="-122"/>
                 <a:cs typeface="Courier New" pitchFamily="34" charset="-120"/>
               </a:rPr>
-              <a:t>  }</a:t>
-            </a:r>
-            <a:endParaRPr lang="en-US" sz="1600" dirty="0"/>
-          </a:p>
-          <a:p>
+              <a:t>  multi_az = var.db_multi_az               </a:t>
+            </a:r>
             <a:pPr indent="0" marL="0">
               <a:buNone/>
             </a:pPr>
             <a:r>
               <a:rPr lang="en-US" sz="1600" dirty="0">
                 <a:solidFill>
-                  <a:srgbClr val="E6E6F0"/>
+                  <a:srgbClr val="8FD694"/>
                 </a:solidFill>
                 <a:latin typeface="Courier New" pitchFamily="34" charset="0"/>
                 <a:ea typeface="Courier New" pitchFamily="34" charset="-122"/>
                 <a:cs typeface="Courier New" pitchFamily="34" charset="-120"/>
               </a:rPr>
-              <a:t>}</a:t>
+              <a:t># true: standby nell'altra AZ</a:t>
             </a:r>
             <a:endParaRPr lang="en-US" sz="1600" dirty="0"/>
           </a:p>
@@ -10152,24 +10729,21 @@
                 <a:ea typeface="Courier New" pitchFamily="34" charset="-122"/>
                 <a:cs typeface="Courier New" pitchFamily="34" charset="-120"/>
               </a:rPr>
-              <a:t>resource "aws_iam_policy" "app_read_db_secret" {</a:t>
-            </a:r>
-            <a:endParaRPr lang="en-US" sz="1600" dirty="0"/>
-          </a:p>
-          <a:p>
+              <a:t>  backup_retention_period    = 7           </a:t>
+            </a:r>
             <a:pPr indent="0" marL="0">
               <a:buNone/>
             </a:pPr>
             <a:r>
               <a:rPr lang="en-US" sz="1600" dirty="0">
                 <a:solidFill>
-                  <a:srgbClr val="E6E6F0"/>
+                  <a:srgbClr val="8FD694"/>
                 </a:solidFill>
                 <a:latin typeface="Courier New" pitchFamily="34" charset="0"/>
                 <a:ea typeface="Courier New" pitchFamily="34" charset="-122"/>
                 <a:cs typeface="Courier New" pitchFamily="34" charset="-120"/>
               </a:rPr>
-              <a:t>  name   = "${var.project}-app-read-db-secret"</a:t>
+              <a:t># PITR fino a 7 giorni</a:t>
             </a:r>
             <a:endParaRPr lang="en-US" sz="1600" dirty="0"/>
           </a:p>
@@ -10186,24 +10760,21 @@
                 <a:ea typeface="Courier New" pitchFamily="34" charset="-122"/>
                 <a:cs typeface="Courier New" pitchFamily="34" charset="-120"/>
               </a:rPr>
-              <a:t>  policy = data.aws_iam_policy_document.app_read_db_secret.json</a:t>
-            </a:r>
-            <a:endParaRPr lang="en-US" sz="1600" dirty="0"/>
-          </a:p>
-          <a:p>
+              <a:t>  backup_window              = "01:00-02:00"           </a:t>
+            </a:r>
             <a:pPr indent="0" marL="0">
               <a:buNone/>
             </a:pPr>
             <a:r>
               <a:rPr lang="en-US" sz="1600" dirty="0">
                 <a:solidFill>
-                  <a:srgbClr val="E6E6F0"/>
+                  <a:srgbClr val="8FD694"/>
                 </a:solidFill>
                 <a:latin typeface="Courier New" pitchFamily="34" charset="0"/>
                 <a:ea typeface="Courier New" pitchFamily="34" charset="-122"/>
                 <a:cs typeface="Courier New" pitchFamily="34" charset="-120"/>
               </a:rPr>
-              <a:t>}</a:t>
+              <a:t># UTC</a:t>
             </a:r>
             <a:endParaRPr lang="en-US" sz="1600" dirty="0"/>
           </a:p>
@@ -10220,24 +10791,21 @@
                 <a:ea typeface="Courier New" pitchFamily="34" charset="-122"/>
                 <a:cs typeface="Courier New" pitchFamily="34" charset="-120"/>
               </a:rPr>
-              <a:t> </a:t>
-            </a:r>
-            <a:endParaRPr lang="en-US" sz="1600" dirty="0"/>
-          </a:p>
-          <a:p>
+              <a:t>  maintenance_window         = "sun:03:00-sun:04:00"   </a:t>
+            </a:r>
             <a:pPr indent="0" marL="0">
               <a:buNone/>
             </a:pPr>
             <a:r>
               <a:rPr lang="en-US" sz="1600" dirty="0">
                 <a:solidFill>
-                  <a:srgbClr val="E6E6F0"/>
+                  <a:srgbClr val="8FD694"/>
                 </a:solidFill>
                 <a:latin typeface="Courier New" pitchFamily="34" charset="0"/>
                 <a:ea typeface="Courier New" pitchFamily="34" charset="-122"/>
                 <a:cs typeface="Courier New" pitchFamily="34" charset="-120"/>
               </a:rPr>
-              <a:t>resource "aws_iam_role_policy_attachment" "app_read_db_secret" {</a:t>
+              <a:t># UTC</a:t>
             </a:r>
             <a:endParaRPr lang="en-US" sz="1600" dirty="0"/>
           </a:p>
@@ -10254,21 +10822,24 @@
                 <a:ea typeface="Courier New" pitchFamily="34" charset="-122"/>
                 <a:cs typeface="Courier New" pitchFamily="34" charset="-120"/>
               </a:rPr>
-              <a:t>  role       = aws_iam_role.app.name        </a:t>
-            </a:r>
+              <a:t>  auto_minor_version_upgrade = true</a:t>
+            </a:r>
+            <a:endParaRPr lang="en-US" sz="1600" dirty="0"/>
+          </a:p>
+          <a:p>
             <a:pPr indent="0" marL="0">
               <a:buNone/>
             </a:pPr>
             <a:r>
               <a:rPr lang="en-US" sz="1600" dirty="0">
                 <a:solidFill>
-                  <a:srgbClr val="8FD694"/>
+                  <a:srgbClr val="E6E6F0"/>
                 </a:solidFill>
                 <a:latin typeface="Courier New" pitchFamily="34" charset="0"/>
                 <a:ea typeface="Courier New" pitchFamily="34" charset="-122"/>
                 <a:cs typeface="Courier New" pitchFamily="34" charset="-120"/>
               </a:rPr>
-              <a:t># lezione 4</a:t>
+              <a:t> </a:t>
             </a:r>
             <a:endParaRPr lang="en-US" sz="1600" dirty="0"/>
           </a:p>
@@ -10285,23 +10856,85 @@
                 <a:ea typeface="Courier New" pitchFamily="34" charset="-122"/>
                 <a:cs typeface="Courier New" pitchFamily="34" charset="-120"/>
               </a:rPr>
-              <a:t>  policy_arn = aws_iam_policy.app_read_db_secret.arn</a:t>
-            </a:r>
-            <a:endParaRPr lang="en-US" sz="1600" dirty="0"/>
-          </a:p>
-          <a:p>
+              <a:t>  </a:t>
+            </a:r>
             <a:pPr indent="0" marL="0">
               <a:buNone/>
             </a:pPr>
             <a:r>
               <a:rPr lang="en-US" sz="1600" dirty="0">
                 <a:solidFill>
-                  <a:srgbClr val="E6E6F0"/>
+                  <a:srgbClr val="8FD694"/>
                 </a:solidFill>
                 <a:latin typeface="Courier New" pitchFamily="34" charset="0"/>
                 <a:ea typeface="Courier New" pitchFamily="34" charset="-122"/>
                 <a:cs typeface="Courier New" pitchFamily="34" charset="-120"/>
               </a:rPr>
+              <a:t># + deletion_protection e snapshot finale (slide precedente)</a:t>
+            </a:r>
+            <a:endParaRPr lang="en-US" sz="1600" dirty="0"/>
+          </a:p>
+          <a:p>
+            <a:pPr indent="0" marL="0">
+              <a:buNone/>
+            </a:pPr>
+            <a:r>
+              <a:rPr lang="en-US" sz="1600" dirty="0">
+                <a:solidFill>
+                  <a:srgbClr val="E6E6F0"/>
+                </a:solidFill>
+                <a:latin typeface="Courier New" pitchFamily="34" charset="0"/>
+                <a:ea typeface="Courier New" pitchFamily="34" charset="-122"/>
+                <a:cs typeface="Courier New" pitchFamily="34" charset="-120"/>
+              </a:rPr>
+              <a:t> </a:t>
+            </a:r>
+            <a:endParaRPr lang="en-US" sz="1600" dirty="0"/>
+          </a:p>
+          <a:p>
+            <a:pPr indent="0" marL="0">
+              <a:buNone/>
+            </a:pPr>
+            <a:r>
+              <a:rPr lang="en-US" sz="1600" dirty="0">
+                <a:solidFill>
+                  <a:srgbClr val="E6E6F0"/>
+                </a:solidFill>
+                <a:latin typeface="Courier New" pitchFamily="34" charset="0"/>
+                <a:ea typeface="Courier New" pitchFamily="34" charset="-122"/>
+                <a:cs typeface="Courier New" pitchFamily="34" charset="-120"/>
+              </a:rPr>
+              <a:t>  apply_immediately = true                 </a:t>
+            </a:r>
+            <a:pPr indent="0" marL="0">
+              <a:buNone/>
+            </a:pPr>
+            <a:r>
+              <a:rPr lang="en-US" sz="1600" dirty="0">
+                <a:solidFill>
+                  <a:srgbClr val="8FD694"/>
+                </a:solidFill>
+                <a:latin typeface="Courier New" pitchFamily="34" charset="0"/>
+                <a:ea typeface="Courier New" pitchFamily="34" charset="-122"/>
+                <a:cs typeface="Courier New" pitchFamily="34" charset="-120"/>
+              </a:rPr>
+              <a:t># in produzione: no</a:t>
+            </a:r>
+            <a:endParaRPr lang="en-US" sz="1600" dirty="0"/>
+          </a:p>
+          <a:p>
+            <a:pPr indent="0" marL="0">
+              <a:buNone/>
+            </a:pPr>
+            <a:r>
+              <a:rPr lang="en-US" sz="1600" dirty="0">
+                <a:solidFill>
+                  <a:srgbClr val="E6E6F0"/>
+                </a:solidFill>
+                <a:latin typeface="Courier New" pitchFamily="34" charset="0"/>
+                <a:ea typeface="Courier New" pitchFamily="34" charset="-122"/>
+                <a:cs typeface="Courier New" pitchFamily="34" charset="-120"/>
+              </a:rPr>
               <a:t>}</a:t>
             </a:r>
             <a:endParaRPr lang="en-US" sz="1600" dirty="0"/>
@@ -10310,41 +10943,14 @@
       </p:sp>
       <p:sp>
         <p:nvSpPr>
-          <p:cNvPr id="8" name="Shape 5"/>
-          <p:cNvSpPr/>
+          <p:cNvPr id="8" name="Text 5"/>
+          <p:cNvSpPr txBox="1"/>
           <p:nvPr/>
         </p:nvSpPr>
         <p:spPr>
           <a:xfrm>
             <a:off x="548640" y="5943600"/>
-            <a:ext cx="11094415" cy="548640"/>
-          </a:xfrm>
-          <a:prstGeom prst="roundRect">
-            <a:avLst>
-              <a:gd name="adj" fmla="val 16667"/>
-            </a:avLst>
-          </a:prstGeom>
-          <a:solidFill>
-            <a:srgbClr val="E5F4EC"/>
-          </a:solidFill>
-          <a:ln w="12700">
-            <a:solidFill>
-              <a:srgbClr val="E5F4EC"/>
-            </a:solidFill>
-            <a:prstDash val="solid"/>
-          </a:ln>
-        </p:spPr>
-      </p:sp>
-      <p:sp>
-        <p:nvSpPr>
-          <p:cNvPr id="9" name="Text 6"/>
-          <p:cNvSpPr txBox="1"/>
-          <p:nvPr/>
-        </p:nvSpPr>
-        <p:spPr>
-          <a:xfrm>
-            <a:off x="822960" y="5943600"/>
-            <a:ext cx="10545775" cy="548640"/>
+            <a:ext cx="11094415" cy="365760"/>
           </a:xfrm>
           <a:prstGeom prst="rect">
             <a:avLst/>
@@ -10360,17 +10966,17 @@
               <a:buNone/>
             </a:pPr>
             <a:r>
-              <a:rPr lang="en-US" sz="1600" b="1" dirty="0">
-                <a:solidFill>
-                  <a:srgbClr val="22253A"/>
+              <a:rPr lang="en-US" sz="1500" i="1" dirty="0">
+                <a:solidFill>
+                  <a:srgbClr val="5F6478"/>
                 </a:solidFill>
                 <a:latin typeface="Calibri" pitchFamily="34" charset="0"/>
                 <a:ea typeface="Calibri" pitchFamily="34" charset="-122"/>
                 <a:cs typeface="Calibri" pitchFamily="34" charset="-120"/>
               </a:rPr>
-              <a:t>Una sola azione (GetSecretValue) su una sola risorsa (il segreto del database): privilegio minimo.</a:t>
-            </a:r>
-            <a:endParaRPr lang="en-US" sz="1600" dirty="0"/>
+              <a:t>Le due finestre sono in UTC (un'ora o due indietro rispetto all'Italia) e non devono sovrapporsi.</a:t>
+            </a:r>
+            <a:endParaRPr lang="en-US" sz="1500" dirty="0"/>
           </a:p>
         </p:txBody>
       </p:sp>
@@ -10487,7 +11093,7 @@
                 <a:ea typeface="Calibri" pitchFamily="34" charset="-122"/>
                 <a:cs typeface="Calibri" pitchFamily="34" charset="-120"/>
               </a:rPr>
-              <a:t>Esercizio (1/2): crea, collegati, fatti bloccare</a:t>
+              <a:t>Il codice: connessioni solo cifrate</a:t>
             </a:r>
             <a:endParaRPr lang="en-US" sz="3200" dirty="0"/>
           </a:p>
@@ -10540,18 +11146,20 @@
         </p:nvSpPr>
         <p:spPr>
           <a:xfrm>
-            <a:off x="548640" y="1417320"/>
-            <a:ext cx="594360" cy="594360"/>
-          </a:xfrm>
-          <a:prstGeom prst="ellipse">
-            <a:avLst/>
+            <a:off x="548640" y="1325880"/>
+            <a:ext cx="11094415" cy="4572000"/>
+          </a:xfrm>
+          <a:prstGeom prst="roundRect">
+            <a:avLst>
+              <a:gd name="adj" fmla="val 1600"/>
+            </a:avLst>
           </a:prstGeom>
           <a:solidFill>
-            <a:srgbClr val="5B3FD0"/>
+            <a:srgbClr val="1E1E2E"/>
           </a:solidFill>
           <a:ln w="12700">
             <a:solidFill>
-              <a:srgbClr val="5B3FD0"/>
+              <a:srgbClr val="1E1E2E"/>
             </a:solidFill>
             <a:prstDash val="solid"/>
           </a:ln>
@@ -10565,8 +11173,8 @@
         </p:nvSpPr>
         <p:spPr>
           <a:xfrm>
-            <a:off x="548640" y="1417320"/>
-            <a:ext cx="594360" cy="594360"/>
+            <a:off x="731520" y="1399032"/>
+            <a:ext cx="10728655" cy="274320"/>
           </a:xfrm>
           <a:prstGeom prst="rect">
             <a:avLst/>
@@ -10575,24 +11183,24 @@
           <a:ln/>
         </p:spPr>
         <p:txBody>
-          <a:bodyPr wrap="square" lIns="0" tIns="0" rIns="0" bIns="0" rtlCol="0" anchor="ctr"/>
+          <a:bodyPr wrap="square" lIns="0" tIns="0" rIns="0" bIns="0" rtlCol="0" anchor="t"/>
           <a:lstStyle/>
           <a:p>
-            <a:pPr algn="ctr" indent="0" marL="0">
-              <a:buNone/>
-            </a:pPr>
-            <a:r>
-              <a:rPr lang="en-US" sz="1800" b="1" dirty="0">
-                <a:solidFill>
-                  <a:srgbClr val="FFFFFF"/>
+            <a:pPr indent="0" marL="0">
+              <a:buNone/>
+            </a:pPr>
+            <a:r>
+              <a:rPr lang="en-US" sz="1300" b="1" dirty="0">
+                <a:solidFill>
+                  <a:srgbClr val="F2B880"/>
                 </a:solidFill>
                 <a:latin typeface="Calibri" pitchFamily="34" charset="0"/>
                 <a:ea typeface="Calibri" pitchFamily="34" charset="-122"/>
                 <a:cs typeface="Calibri" pitchFamily="34" charset="-120"/>
               </a:rPr>
-              <a:t>1</a:t>
-            </a:r>
-            <a:endParaRPr lang="en-US" sz="1800" dirty="0"/>
+              <a:t>rds.tf</a:t>
+            </a:r>
+            <a:endParaRPr lang="en-US" sz="1300" dirty="0"/>
           </a:p>
         </p:txBody>
       </p:sp>
@@ -10604,8 +11212,8 @@
         </p:nvSpPr>
         <p:spPr>
           <a:xfrm>
-            <a:off x="1325880" y="1280160"/>
-            <a:ext cx="10225735" cy="868680"/>
+            <a:off x="731520" y="1737360"/>
+            <a:ext cx="10728655" cy="4023360"/>
           </a:xfrm>
           <a:prstGeom prst="rect">
             <a:avLst/>
@@ -10614,641 +11222,346 @@
           <a:ln/>
         </p:spPr>
         <p:txBody>
+          <a:bodyPr wrap="square" lIns="0" tIns="0" rIns="0" bIns="0" rtlCol="0" anchor="t"/>
+          <a:lstStyle/>
+          <a:p>
+            <a:pPr indent="0" marL="0">
+              <a:buNone/>
+            </a:pPr>
+            <a:r>
+              <a:rPr lang="en-US" sz="1600" dirty="0">
+                <a:solidFill>
+                  <a:srgbClr val="E6E6F0"/>
+                </a:solidFill>
+                <a:latin typeface="Courier New" pitchFamily="34" charset="0"/>
+                <a:ea typeface="Courier New" pitchFamily="34" charset="-122"/>
+                <a:cs typeface="Courier New" pitchFamily="34" charset="-120"/>
+              </a:rPr>
+              <a:t>resource "aws_db_parameter_group" "main" {</a:t>
+            </a:r>
+            <a:endParaRPr lang="en-US" sz="1600" dirty="0"/>
+          </a:p>
+          <a:p>
+            <a:pPr indent="0" marL="0">
+              <a:buNone/>
+            </a:pPr>
+            <a:r>
+              <a:rPr lang="en-US" sz="1600" dirty="0">
+                <a:solidFill>
+                  <a:srgbClr val="E6E6F0"/>
+                </a:solidFill>
+                <a:latin typeface="Courier New" pitchFamily="34" charset="0"/>
+                <a:ea typeface="Courier New" pitchFamily="34" charset="-122"/>
+                <a:cs typeface="Courier New" pitchFamily="34" charset="-120"/>
+              </a:rPr>
+              <a:t>  name   = "${var.project}-postgres${var.db_engine_version}"</a:t>
+            </a:r>
+            <a:endParaRPr lang="en-US" sz="1600" dirty="0"/>
+          </a:p>
+          <a:p>
+            <a:pPr indent="0" marL="0">
+              <a:buNone/>
+            </a:pPr>
+            <a:r>
+              <a:rPr lang="en-US" sz="1600" dirty="0">
+                <a:solidFill>
+                  <a:srgbClr val="E6E6F0"/>
+                </a:solidFill>
+                <a:latin typeface="Courier New" pitchFamily="34" charset="0"/>
+                <a:ea typeface="Courier New" pitchFamily="34" charset="-122"/>
+                <a:cs typeface="Courier New" pitchFamily="34" charset="-120"/>
+              </a:rPr>
+              <a:t>  family = "postgres${var.db_engine_version}"   </a:t>
+            </a:r>
+            <a:pPr indent="0" marL="0">
+              <a:buNone/>
+            </a:pPr>
+            <a:r>
+              <a:rPr lang="en-US" sz="1600" dirty="0">
+                <a:solidFill>
+                  <a:srgbClr val="8FD694"/>
+                </a:solidFill>
+                <a:latin typeface="Courier New" pitchFamily="34" charset="0"/>
+                <a:ea typeface="Courier New" pitchFamily="34" charset="-122"/>
+                <a:cs typeface="Courier New" pitchFamily="34" charset="-120"/>
+              </a:rPr>
+              <a:t># "postgres18"</a:t>
+            </a:r>
+            <a:endParaRPr lang="en-US" sz="1600" dirty="0"/>
+          </a:p>
+          <a:p>
+            <a:pPr indent="0" marL="0">
+              <a:buNone/>
+            </a:pPr>
+            <a:r>
+              <a:rPr lang="en-US" sz="1600" dirty="0">
+                <a:solidFill>
+                  <a:srgbClr val="E6E6F0"/>
+                </a:solidFill>
+                <a:latin typeface="Courier New" pitchFamily="34" charset="0"/>
+                <a:ea typeface="Courier New" pitchFamily="34" charset="-122"/>
+                <a:cs typeface="Courier New" pitchFamily="34" charset="-120"/>
+              </a:rPr>
+              <a:t> </a:t>
+            </a:r>
+            <a:endParaRPr lang="en-US" sz="1600" dirty="0"/>
+          </a:p>
+          <a:p>
+            <a:pPr indent="0" marL="0">
+              <a:buNone/>
+            </a:pPr>
+            <a:r>
+              <a:rPr lang="en-US" sz="1600" dirty="0">
+                <a:solidFill>
+                  <a:srgbClr val="E6E6F0"/>
+                </a:solidFill>
+                <a:latin typeface="Courier New" pitchFamily="34" charset="0"/>
+                <a:ea typeface="Courier New" pitchFamily="34" charset="-122"/>
+                <a:cs typeface="Courier New" pitchFamily="34" charset="-120"/>
+              </a:rPr>
+              <a:t>  parameter {</a:t>
+            </a:r>
+            <a:endParaRPr lang="en-US" sz="1600" dirty="0"/>
+          </a:p>
+          <a:p>
+            <a:pPr indent="0" marL="0">
+              <a:buNone/>
+            </a:pPr>
+            <a:r>
+              <a:rPr lang="en-US" sz="1600" dirty="0">
+                <a:solidFill>
+                  <a:srgbClr val="E6E6F0"/>
+                </a:solidFill>
+                <a:latin typeface="Courier New" pitchFamily="34" charset="0"/>
+                <a:ea typeface="Courier New" pitchFamily="34" charset="-122"/>
+                <a:cs typeface="Courier New" pitchFamily="34" charset="-120"/>
+              </a:rPr>
+              <a:t>    name  = "rds.force_ssl"</a:t>
+            </a:r>
+            <a:endParaRPr lang="en-US" sz="1600" dirty="0"/>
+          </a:p>
+          <a:p>
+            <a:pPr indent="0" marL="0">
+              <a:buNone/>
+            </a:pPr>
+            <a:r>
+              <a:rPr lang="en-US" sz="1600" dirty="0">
+                <a:solidFill>
+                  <a:srgbClr val="E6E6F0"/>
+                </a:solidFill>
+                <a:latin typeface="Courier New" pitchFamily="34" charset="0"/>
+                <a:ea typeface="Courier New" pitchFamily="34" charset="-122"/>
+                <a:cs typeface="Courier New" pitchFamily="34" charset="-120"/>
+              </a:rPr>
+              <a:t>    value = "1"        </a:t>
+            </a:r>
+            <a:pPr indent="0" marL="0">
+              <a:buNone/>
+            </a:pPr>
+            <a:r>
+              <a:rPr lang="en-US" sz="1600" dirty="0">
+                <a:solidFill>
+                  <a:srgbClr val="8FD694"/>
+                </a:solidFill>
+                <a:latin typeface="Courier New" pitchFamily="34" charset="0"/>
+                <a:ea typeface="Courier New" pitchFamily="34" charset="-122"/>
+                <a:cs typeface="Courier New" pitchFamily="34" charset="-120"/>
+              </a:rPr>
+              <a:t># rifiuta le connessioni in chiaro</a:t>
+            </a:r>
+            <a:endParaRPr lang="en-US" sz="1600" dirty="0"/>
+          </a:p>
+          <a:p>
+            <a:pPr indent="0" marL="0">
+              <a:buNone/>
+            </a:pPr>
+            <a:r>
+              <a:rPr lang="en-US" sz="1600" dirty="0">
+                <a:solidFill>
+                  <a:srgbClr val="E6E6F0"/>
+                </a:solidFill>
+                <a:latin typeface="Courier New" pitchFamily="34" charset="0"/>
+                <a:ea typeface="Courier New" pitchFamily="34" charset="-122"/>
+                <a:cs typeface="Courier New" pitchFamily="34" charset="-120"/>
+              </a:rPr>
+              <a:t>  }</a:t>
+            </a:r>
+            <a:endParaRPr lang="en-US" sz="1600" dirty="0"/>
+          </a:p>
+          <a:p>
+            <a:pPr indent="0" marL="0">
+              <a:buNone/>
+            </a:pPr>
+            <a:r>
+              <a:rPr lang="en-US" sz="1600" dirty="0">
+                <a:solidFill>
+                  <a:srgbClr val="E6E6F0"/>
+                </a:solidFill>
+                <a:latin typeface="Courier New" pitchFamily="34" charset="0"/>
+                <a:ea typeface="Courier New" pitchFamily="34" charset="-122"/>
+                <a:cs typeface="Courier New" pitchFamily="34" charset="-120"/>
+              </a:rPr>
+              <a:t> </a:t>
+            </a:r>
+            <a:endParaRPr lang="en-US" sz="1600" dirty="0"/>
+          </a:p>
+          <a:p>
+            <a:pPr indent="0" marL="0">
+              <a:buNone/>
+            </a:pPr>
+            <a:r>
+              <a:rPr lang="en-US" sz="1600" dirty="0">
+                <a:solidFill>
+                  <a:srgbClr val="E6E6F0"/>
+                </a:solidFill>
+                <a:latin typeface="Courier New" pitchFamily="34" charset="0"/>
+                <a:ea typeface="Courier New" pitchFamily="34" charset="-122"/>
+                <a:cs typeface="Courier New" pitchFamily="34" charset="-120"/>
+              </a:rPr>
+              <a:t>  lifecycle {</a:t>
+            </a:r>
+            <a:endParaRPr lang="en-US" sz="1600" dirty="0"/>
+          </a:p>
+          <a:p>
+            <a:pPr indent="0" marL="0">
+              <a:buNone/>
+            </a:pPr>
+            <a:r>
+              <a:rPr lang="en-US" sz="1600" dirty="0">
+                <a:solidFill>
+                  <a:srgbClr val="E6E6F0"/>
+                </a:solidFill>
+                <a:latin typeface="Courier New" pitchFamily="34" charset="0"/>
+                <a:ea typeface="Courier New" pitchFamily="34" charset="-122"/>
+                <a:cs typeface="Courier New" pitchFamily="34" charset="-120"/>
+              </a:rPr>
+              <a:t>    create_before_destroy = true</a:t>
+            </a:r>
+            <a:endParaRPr lang="en-US" sz="1600" dirty="0"/>
+          </a:p>
+          <a:p>
+            <a:pPr indent="0" marL="0">
+              <a:buNone/>
+            </a:pPr>
+            <a:r>
+              <a:rPr lang="en-US" sz="1600" dirty="0">
+                <a:solidFill>
+                  <a:srgbClr val="E6E6F0"/>
+                </a:solidFill>
+                <a:latin typeface="Courier New" pitchFamily="34" charset="0"/>
+                <a:ea typeface="Courier New" pitchFamily="34" charset="-122"/>
+                <a:cs typeface="Courier New" pitchFamily="34" charset="-120"/>
+              </a:rPr>
+              <a:t>  }</a:t>
+            </a:r>
+            <a:endParaRPr lang="en-US" sz="1600" dirty="0"/>
+          </a:p>
+          <a:p>
+            <a:pPr indent="0" marL="0">
+              <a:buNone/>
+            </a:pPr>
+            <a:r>
+              <a:rPr lang="en-US" sz="1600" dirty="0">
+                <a:solidFill>
+                  <a:srgbClr val="E6E6F0"/>
+                </a:solidFill>
+                <a:latin typeface="Courier New" pitchFamily="34" charset="0"/>
+                <a:ea typeface="Courier New" pitchFamily="34" charset="-122"/>
+                <a:cs typeface="Courier New" pitchFamily="34" charset="-120"/>
+              </a:rPr>
+              <a:t>}</a:t>
+            </a:r>
+            <a:endParaRPr lang="en-US" sz="1600" dirty="0"/>
+          </a:p>
+          <a:p>
+            <a:pPr indent="0" marL="0">
+              <a:buNone/>
+            </a:pPr>
+            <a:r>
+              <a:rPr lang="en-US" sz="1600" dirty="0">
+                <a:solidFill>
+                  <a:srgbClr val="E6E6F0"/>
+                </a:solidFill>
+                <a:latin typeface="Courier New" pitchFamily="34" charset="0"/>
+                <a:ea typeface="Courier New" pitchFamily="34" charset="-122"/>
+                <a:cs typeface="Courier New" pitchFamily="34" charset="-120"/>
+              </a:rPr>
+              <a:t> </a:t>
+            </a:r>
+            <a:endParaRPr lang="en-US" sz="1600" dirty="0"/>
+          </a:p>
+          <a:p>
+            <a:pPr indent="0" marL="0">
+              <a:buNone/>
+            </a:pPr>
+            <a:r>
+              <a:rPr lang="en-US" sz="1600" dirty="0">
+                <a:solidFill>
+                  <a:srgbClr val="8FD694"/>
+                </a:solidFill>
+                <a:latin typeface="Courier New" pitchFamily="34" charset="0"/>
+                <a:ea typeface="Courier New" pitchFamily="34" charset="-122"/>
+                <a:cs typeface="Courier New" pitchFamily="34" charset="-120"/>
+              </a:rPr>
+              <a:t># nel blocco aws_db_instance.main:</a:t>
+            </a:r>
+            <a:endParaRPr lang="en-US" sz="1600" dirty="0"/>
+          </a:p>
+          <a:p>
+            <a:pPr indent="0" marL="0">
+              <a:buNone/>
+            </a:pPr>
+            <a:r>
+              <a:rPr lang="en-US" sz="1600" dirty="0">
+                <a:solidFill>
+                  <a:srgbClr val="E6E6F0"/>
+                </a:solidFill>
+                <a:latin typeface="Courier New" pitchFamily="34" charset="0"/>
+                <a:ea typeface="Courier New" pitchFamily="34" charset="-122"/>
+                <a:cs typeface="Courier New" pitchFamily="34" charset="-120"/>
+              </a:rPr>
+              <a:t>  parameter_group_name = aws_db_parameter_group.main.name</a:t>
+            </a:r>
+            <a:endParaRPr lang="en-US" sz="1600" dirty="0"/>
+          </a:p>
+        </p:txBody>
+      </p:sp>
+      <p:sp>
+        <p:nvSpPr>
+          <p:cNvPr id="8" name="Text 5"/>
+          <p:cNvSpPr txBox="1"/>
+          <p:nvPr/>
+        </p:nvSpPr>
+        <p:spPr>
+          <a:xfrm>
+            <a:off x="548640" y="5989320"/>
+            <a:ext cx="11094415" cy="411480"/>
+          </a:xfrm>
+          <a:prstGeom prst="rect">
+            <a:avLst/>
+          </a:prstGeom>
+          <a:noFill/>
+          <a:ln/>
+        </p:spPr>
+        <p:txBody>
           <a:bodyPr wrap="square" lIns="0" tIns="0" rIns="0" bIns="0" rtlCol="0" anchor="ctr"/>
           <a:lstStyle/>
           <a:p>
-            <a:pPr indent="0" marL="0">
-              <a:buNone/>
-            </a:pPr>
-            <a:r>
-              <a:rPr lang="en-US" sz="1700" b="1" dirty="0">
-                <a:solidFill>
-                  <a:srgbClr val="22253A"/>
+            <a:pPr algn="l" indent="0" marL="0">
+              <a:buNone/>
+            </a:pPr>
+            <a:r>
+              <a:rPr lang="en-US" sz="1600" i="1" dirty="0">
+                <a:solidFill>
+                  <a:srgbClr val="5F6478"/>
                 </a:solidFill>
                 <a:latin typeface="Calibri" pitchFamily="34" charset="0"/>
                 <a:ea typeface="Calibri" pitchFamily="34" charset="-122"/>
                 <a:cs typeface="Calibri" pitchFamily="34" charset="-120"/>
               </a:rPr>
-              <a:t>terraform apply, poi 15-20 minuti</a:t>
-            </a:r>
-            <a:endParaRPr lang="en-US" sz="1700" dirty="0"/>
-          </a:p>
-          <a:p>
-            <a:pPr indent="0" marL="0">
-              <a:buNone/>
-            </a:pPr>
-            <a:r>
-              <a:rPr lang="en-US" sz="1400" dirty="0">
-                <a:solidFill>
-                  <a:srgbClr val="5F6478"/>
-                </a:solidFill>
-                <a:latin typeface="Calibri" pitchFamily="34" charset="0"/>
-                <a:ea typeface="Calibri" pitchFamily="34" charset="-122"/>
-                <a:cs typeface="Calibri" pitchFamily="34" charset="-120"/>
-              </a:rPr>
-              <a:t>C'è una password nel plan? (no)</a:t>
-            </a:r>
-            <a:endParaRPr lang="en-US" sz="1700" dirty="0"/>
-          </a:p>
-        </p:txBody>
-      </p:sp>
-      <p:sp>
-        <p:nvSpPr>
-          <p:cNvPr id="8" name="Shape 5"/>
-          <p:cNvSpPr/>
-          <p:nvPr/>
-        </p:nvSpPr>
-        <p:spPr>
-          <a:xfrm>
-            <a:off x="548640" y="2221992"/>
-            <a:ext cx="594360" cy="594360"/>
-          </a:xfrm>
-          <a:prstGeom prst="ellipse">
-            <a:avLst/>
-          </a:prstGeom>
-          <a:solidFill>
-            <a:srgbClr val="5B3FD0"/>
-          </a:solidFill>
-          <a:ln w="12700">
-            <a:solidFill>
-              <a:srgbClr val="5B3FD0"/>
-            </a:solidFill>
-            <a:prstDash val="solid"/>
-          </a:ln>
-        </p:spPr>
-      </p:sp>
-      <p:sp>
-        <p:nvSpPr>
-          <p:cNvPr id="9" name="Text 6"/>
-          <p:cNvSpPr txBox="1"/>
-          <p:nvPr/>
-        </p:nvSpPr>
-        <p:spPr>
-          <a:xfrm>
-            <a:off x="548640" y="2221992"/>
-            <a:ext cx="594360" cy="594360"/>
-          </a:xfrm>
-          <a:prstGeom prst="rect">
-            <a:avLst/>
-          </a:prstGeom>
-          <a:noFill/>
-          <a:ln/>
-        </p:spPr>
-        <p:txBody>
-          <a:bodyPr wrap="square" lIns="0" tIns="0" rIns="0" bIns="0" rtlCol="0" anchor="ctr"/>
-          <a:lstStyle/>
-          <a:p>
-            <a:pPr algn="ctr" indent="0" marL="0">
-              <a:buNone/>
-            </a:pPr>
-            <a:r>
-              <a:rPr lang="en-US" sz="1800" b="1" dirty="0">
-                <a:solidFill>
-                  <a:srgbClr val="FFFFFF"/>
-                </a:solidFill>
-                <a:latin typeface="Calibri" pitchFamily="34" charset="0"/>
-                <a:ea typeface="Calibri" pitchFamily="34" charset="-122"/>
-                <a:cs typeface="Calibri" pitchFamily="34" charset="-120"/>
-              </a:rPr>
-              <a:t>2</a:t>
-            </a:r>
-            <a:endParaRPr lang="en-US" sz="1800" dirty="0"/>
-          </a:p>
-        </p:txBody>
-      </p:sp>
-      <p:sp>
-        <p:nvSpPr>
-          <p:cNvPr id="10" name="Text 7"/>
-          <p:cNvSpPr txBox="1"/>
-          <p:nvPr/>
-        </p:nvSpPr>
-        <p:spPr>
-          <a:xfrm>
-            <a:off x="1325880" y="2084832"/>
-            <a:ext cx="10225735" cy="868680"/>
-          </a:xfrm>
-          <a:prstGeom prst="rect">
-            <a:avLst/>
-          </a:prstGeom>
-          <a:noFill/>
-          <a:ln/>
-        </p:spPr>
-        <p:txBody>
-          <a:bodyPr wrap="square" lIns="0" tIns="0" rIns="0" bIns="0" rtlCol="0" anchor="ctr"/>
-          <a:lstStyle/>
-          <a:p>
-            <a:pPr indent="0" marL="0">
-              <a:buNone/>
-            </a:pPr>
-            <a:r>
-              <a:rPr lang="en-US" sz="1700" b="1" dirty="0">
-                <a:solidFill>
-                  <a:srgbClr val="22253A"/>
-                </a:solidFill>
-                <a:latin typeface="Calibri" pitchFamily="34" charset="0"/>
-                <a:ea typeface="Calibri" pitchFamily="34" charset="-122"/>
-                <a:cs typeface="Calibri" pitchFamily="34" charset="-120"/>
-              </a:rPr>
-              <a:t>Secrets Manager: il segreto rds!db-…</a:t>
-            </a:r>
-            <a:endParaRPr lang="en-US" sz="1700" dirty="0"/>
-          </a:p>
-          <a:p>
-            <a:pPr indent="0" marL="0">
-              <a:buNone/>
-            </a:pPr>
-            <a:r>
-              <a:rPr lang="en-US" sz="1400" dirty="0">
-                <a:solidFill>
-                  <a:srgbClr val="5F6478"/>
-                </a:solidFill>
-                <a:latin typeface="Calibri" pitchFamily="34" charset="0"/>
-                <a:ea typeface="Calibri" pitchFamily="34" charset="-122"/>
-                <a:cs typeface="Calibri" pitchFamily="34" charset="-120"/>
-              </a:rPr>
-              <a:t>rotazione ogni 7 giorni; nello state solo l'ARN</a:t>
-            </a:r>
-            <a:endParaRPr lang="en-US" sz="1700" dirty="0"/>
-          </a:p>
-        </p:txBody>
-      </p:sp>
-      <p:sp>
-        <p:nvSpPr>
-          <p:cNvPr id="11" name="Shape 8"/>
-          <p:cNvSpPr/>
-          <p:nvPr/>
-        </p:nvSpPr>
-        <p:spPr>
-          <a:xfrm>
-            <a:off x="548640" y="3026664"/>
-            <a:ext cx="594360" cy="594360"/>
-          </a:xfrm>
-          <a:prstGeom prst="ellipse">
-            <a:avLst/>
-          </a:prstGeom>
-          <a:solidFill>
-            <a:srgbClr val="5B3FD0"/>
-          </a:solidFill>
-          <a:ln w="12700">
-            <a:solidFill>
-              <a:srgbClr val="5B3FD0"/>
-            </a:solidFill>
-            <a:prstDash val="solid"/>
-          </a:ln>
-        </p:spPr>
-      </p:sp>
-      <p:sp>
-        <p:nvSpPr>
-          <p:cNvPr id="12" name="Text 9"/>
-          <p:cNvSpPr txBox="1"/>
-          <p:nvPr/>
-        </p:nvSpPr>
-        <p:spPr>
-          <a:xfrm>
-            <a:off x="548640" y="3026664"/>
-            <a:ext cx="594360" cy="594360"/>
-          </a:xfrm>
-          <a:prstGeom prst="rect">
-            <a:avLst/>
-          </a:prstGeom>
-          <a:noFill/>
-          <a:ln/>
-        </p:spPr>
-        <p:txBody>
-          <a:bodyPr wrap="square" lIns="0" tIns="0" rIns="0" bIns="0" rtlCol="0" anchor="ctr"/>
-          <a:lstStyle/>
-          <a:p>
-            <a:pPr algn="ctr" indent="0" marL="0">
-              <a:buNone/>
-            </a:pPr>
-            <a:r>
-              <a:rPr lang="en-US" sz="1800" b="1" dirty="0">
-                <a:solidFill>
-                  <a:srgbClr val="FFFFFF"/>
-                </a:solidFill>
-                <a:latin typeface="Calibri" pitchFamily="34" charset="0"/>
-                <a:ea typeface="Calibri" pitchFamily="34" charset="-122"/>
-                <a:cs typeface="Calibri" pitchFamily="34" charset="-120"/>
-              </a:rPr>
-              <a:t>3</a:t>
-            </a:r>
-            <a:endParaRPr lang="en-US" sz="1800" dirty="0"/>
-          </a:p>
-        </p:txBody>
-      </p:sp>
-      <p:sp>
-        <p:nvSpPr>
-          <p:cNvPr id="13" name="Text 10"/>
-          <p:cNvSpPr txBox="1"/>
-          <p:nvPr/>
-        </p:nvSpPr>
-        <p:spPr>
-          <a:xfrm>
-            <a:off x="1325880" y="2889504"/>
-            <a:ext cx="10225735" cy="868680"/>
-          </a:xfrm>
-          <a:prstGeom prst="rect">
-            <a:avLst/>
-          </a:prstGeom>
-          <a:noFill/>
-          <a:ln/>
-        </p:spPr>
-        <p:txBody>
-          <a:bodyPr wrap="square" lIns="0" tIns="0" rIns="0" bIns="0" rtlCol="0" anchor="ctr"/>
-          <a:lstStyle/>
-          <a:p>
-            <a:pPr indent="0" marL="0">
-              <a:buNone/>
-            </a:pPr>
-            <a:r>
-              <a:rPr lang="en-US" sz="1700" b="1" dirty="0">
-                <a:solidFill>
-                  <a:srgbClr val="22253A"/>
-                </a:solidFill>
-                <a:latin typeface="Calibri" pitchFamily="34" charset="0"/>
-                <a:ea typeface="Calibri" pitchFamily="34" charset="-122"/>
-                <a:cs typeface="Calibri" pitchFamily="34" charset="-120"/>
-              </a:rPr>
-              <a:t>Dal server (SSM): password dal segreto, poi psql</a:t>
-            </a:r>
-            <a:endParaRPr lang="en-US" sz="1700" dirty="0"/>
-          </a:p>
-          <a:p>
-            <a:pPr indent="0" marL="0">
-              <a:buNone/>
-            </a:pPr>
-            <a:r>
-              <a:rPr lang="en-US" sz="1400" dirty="0">
-                <a:solidFill>
-                  <a:srgbClr val="5F6478"/>
-                </a:solidFill>
-                <a:latin typeface="Calibri" pitchFamily="34" charset="0"/>
-                <a:ea typeface="Calibri" pitchFamily="34" charset="-122"/>
-                <a:cs typeface="Calibri" pitchFamily="34" charset="-120"/>
-              </a:rPr>
-              <a:t>funziona grazie a secrets.tf e alla regola db_from_app</a:t>
-            </a:r>
-            <a:endParaRPr lang="en-US" sz="1700" dirty="0"/>
-          </a:p>
-        </p:txBody>
-      </p:sp>
-      <p:sp>
-        <p:nvSpPr>
-          <p:cNvPr id="14" name="Shape 11"/>
-          <p:cNvSpPr/>
-          <p:nvPr/>
-        </p:nvSpPr>
-        <p:spPr>
-          <a:xfrm>
-            <a:off x="548640" y="3831336"/>
-            <a:ext cx="594360" cy="594360"/>
-          </a:xfrm>
-          <a:prstGeom prst="ellipse">
-            <a:avLst/>
-          </a:prstGeom>
-          <a:solidFill>
-            <a:srgbClr val="5B3FD0"/>
-          </a:solidFill>
-          <a:ln w="12700">
-            <a:solidFill>
-              <a:srgbClr val="5B3FD0"/>
-            </a:solidFill>
-            <a:prstDash val="solid"/>
-          </a:ln>
-        </p:spPr>
-      </p:sp>
-      <p:sp>
-        <p:nvSpPr>
-          <p:cNvPr id="15" name="Text 12"/>
-          <p:cNvSpPr txBox="1"/>
-          <p:nvPr/>
-        </p:nvSpPr>
-        <p:spPr>
-          <a:xfrm>
-            <a:off x="548640" y="3831336"/>
-            <a:ext cx="594360" cy="594360"/>
-          </a:xfrm>
-          <a:prstGeom prst="rect">
-            <a:avLst/>
-          </a:prstGeom>
-          <a:noFill/>
-          <a:ln/>
-        </p:spPr>
-        <p:txBody>
-          <a:bodyPr wrap="square" lIns="0" tIns="0" rIns="0" bIns="0" rtlCol="0" anchor="ctr"/>
-          <a:lstStyle/>
-          <a:p>
-            <a:pPr algn="ctr" indent="0" marL="0">
-              <a:buNone/>
-            </a:pPr>
-            <a:r>
-              <a:rPr lang="en-US" sz="1800" b="1" dirty="0">
-                <a:solidFill>
-                  <a:srgbClr val="FFFFFF"/>
-                </a:solidFill>
-                <a:latin typeface="Calibri" pitchFamily="34" charset="0"/>
-                <a:ea typeface="Calibri" pitchFamily="34" charset="-122"/>
-                <a:cs typeface="Calibri" pitchFamily="34" charset="-120"/>
-              </a:rPr>
-              <a:t>4</a:t>
-            </a:r>
-            <a:endParaRPr lang="en-US" sz="1800" dirty="0"/>
-          </a:p>
-        </p:txBody>
-      </p:sp>
-      <p:sp>
-        <p:nvSpPr>
-          <p:cNvPr id="16" name="Text 13"/>
-          <p:cNvSpPr txBox="1"/>
-          <p:nvPr/>
-        </p:nvSpPr>
-        <p:spPr>
-          <a:xfrm>
-            <a:off x="1325880" y="3694176"/>
-            <a:ext cx="10225735" cy="868680"/>
-          </a:xfrm>
-          <a:prstGeom prst="rect">
-            <a:avLst/>
-          </a:prstGeom>
-          <a:noFill/>
-          <a:ln/>
-        </p:spPr>
-        <p:txBody>
-          <a:bodyPr wrap="square" lIns="0" tIns="0" rIns="0" bIns="0" rtlCol="0" anchor="ctr"/>
-          <a:lstStyle/>
-          <a:p>
-            <a:pPr indent="0" marL="0">
-              <a:buNone/>
-            </a:pPr>
-            <a:r>
-              <a:rPr lang="en-US" sz="1700" b="1" dirty="0">
-                <a:solidFill>
-                  <a:srgbClr val="22253A"/>
-                </a:solidFill>
-                <a:latin typeface="Calibri" pitchFamily="34" charset="0"/>
-                <a:ea typeface="Calibri" pitchFamily="34" charset="-122"/>
-                <a:cs typeface="Calibri" pitchFamily="34" charset="-120"/>
-              </a:rPr>
-              <a:t>Da casa come amministratore (Tailscale)</a:t>
-            </a:r>
-            <a:endParaRPr lang="en-US" sz="1700" dirty="0"/>
-          </a:p>
-          <a:p>
-            <a:pPr indent="0" marL="0">
-              <a:buNone/>
-            </a:pPr>
-            <a:r>
-              <a:rPr lang="en-US" sz="1400" dirty="0">
-                <a:solidFill>
-                  <a:srgbClr val="5F6478"/>
-                </a:solidFill>
-                <a:latin typeface="Calibri" pitchFamily="34" charset="0"/>
-                <a:ea typeface="Calibri" pitchFamily="34" charset="-122"/>
-                <a:cs typeface="Calibri" pitchFamily="34" charset="-120"/>
-              </a:rPr>
-              <a:t>funziona: il nome porta a 10.20.20.x, attraverso il router</a:t>
-            </a:r>
-            <a:endParaRPr lang="en-US" sz="1700" dirty="0"/>
-          </a:p>
-        </p:txBody>
-      </p:sp>
-      <p:sp>
-        <p:nvSpPr>
-          <p:cNvPr id="17" name="Shape 14"/>
-          <p:cNvSpPr/>
-          <p:nvPr/>
-        </p:nvSpPr>
-        <p:spPr>
-          <a:xfrm>
-            <a:off x="548640" y="4636008"/>
-            <a:ext cx="594360" cy="594360"/>
-          </a:xfrm>
-          <a:prstGeom prst="ellipse">
-            <a:avLst/>
-          </a:prstGeom>
-          <a:solidFill>
-            <a:srgbClr val="5B3FD0"/>
-          </a:solidFill>
-          <a:ln w="12700">
-            <a:solidFill>
-              <a:srgbClr val="5B3FD0"/>
-            </a:solidFill>
-            <a:prstDash val="solid"/>
-          </a:ln>
-        </p:spPr>
-      </p:sp>
-      <p:sp>
-        <p:nvSpPr>
-          <p:cNvPr id="18" name="Text 15"/>
-          <p:cNvSpPr txBox="1"/>
-          <p:nvPr/>
-        </p:nvSpPr>
-        <p:spPr>
-          <a:xfrm>
-            <a:off x="548640" y="4636008"/>
-            <a:ext cx="594360" cy="594360"/>
-          </a:xfrm>
-          <a:prstGeom prst="rect">
-            <a:avLst/>
-          </a:prstGeom>
-          <a:noFill/>
-          <a:ln/>
-        </p:spPr>
-        <p:txBody>
-          <a:bodyPr wrap="square" lIns="0" tIns="0" rIns="0" bIns="0" rtlCol="0" anchor="ctr"/>
-          <a:lstStyle/>
-          <a:p>
-            <a:pPr algn="ctr" indent="0" marL="0">
-              <a:buNone/>
-            </a:pPr>
-            <a:r>
-              <a:rPr lang="en-US" sz="1800" b="1" dirty="0">
-                <a:solidFill>
-                  <a:srgbClr val="FFFFFF"/>
-                </a:solidFill>
-                <a:latin typeface="Calibri" pitchFamily="34" charset="0"/>
-                <a:ea typeface="Calibri" pitchFamily="34" charset="-122"/>
-                <a:cs typeface="Calibri" pitchFamily="34" charset="-120"/>
-              </a:rPr>
-              <a:t>5</a:t>
-            </a:r>
-            <a:endParaRPr lang="en-US" sz="1800" dirty="0"/>
-          </a:p>
-        </p:txBody>
-      </p:sp>
-      <p:sp>
-        <p:nvSpPr>
-          <p:cNvPr id="19" name="Text 16"/>
-          <p:cNvSpPr txBox="1"/>
-          <p:nvPr/>
-        </p:nvSpPr>
-        <p:spPr>
-          <a:xfrm>
-            <a:off x="1325880" y="4498848"/>
-            <a:ext cx="10225735" cy="868680"/>
-          </a:xfrm>
-          <a:prstGeom prst="rect">
-            <a:avLst/>
-          </a:prstGeom>
-          <a:noFill/>
-          <a:ln/>
-        </p:spPr>
-        <p:txBody>
-          <a:bodyPr wrap="square" lIns="0" tIns="0" rIns="0" bIns="0" rtlCol="0" anchor="ctr"/>
-          <a:lstStyle/>
-          <a:p>
-            <a:pPr indent="0" marL="0">
-              <a:buNone/>
-            </a:pPr>
-            <a:r>
-              <a:rPr lang="en-US" sz="1700" b="1" dirty="0">
-                <a:solidFill>
-                  <a:srgbClr val="22253A"/>
-                </a:solidFill>
-                <a:latin typeface="Calibri" pitchFamily="34" charset="0"/>
-                <a:ea typeface="Calibri" pitchFamily="34" charset="-122"/>
-                <a:cs typeface="Calibri" pitchFamily="34" charset="-120"/>
-              </a:rPr>
-              <a:t>Da casa come sviluppatore</a:t>
-            </a:r>
-            <a:endParaRPr lang="en-US" sz="1700" dirty="0"/>
-          </a:p>
-          <a:p>
-            <a:pPr indent="0" marL="0">
-              <a:buNone/>
-            </a:pPr>
-            <a:r>
-              <a:rPr lang="en-US" sz="1400" dirty="0">
-                <a:solidFill>
-                  <a:srgbClr val="5F6478"/>
-                </a:solidFill>
-                <a:latin typeface="Calibri" pitchFamily="34" charset="0"/>
-                <a:ea typeface="Calibri" pitchFamily="34" charset="-122"/>
-                <a:cs typeface="Calibri" pitchFamily="34" charset="-120"/>
-              </a:rPr>
-              <a:t>la connessione scade: la blocca Tailscale, non il SG</a:t>
-            </a:r>
-            <a:endParaRPr lang="en-US" sz="1700" dirty="0"/>
-          </a:p>
-        </p:txBody>
-      </p:sp>
-      <p:sp>
-        <p:nvSpPr>
-          <p:cNvPr id="20" name="Shape 17"/>
-          <p:cNvSpPr/>
-          <p:nvPr/>
-        </p:nvSpPr>
-        <p:spPr>
-          <a:xfrm>
-            <a:off x="548640" y="5440680"/>
-            <a:ext cx="594360" cy="594360"/>
-          </a:xfrm>
-          <a:prstGeom prst="ellipse">
-            <a:avLst/>
-          </a:prstGeom>
-          <a:solidFill>
-            <a:srgbClr val="D64545"/>
-          </a:solidFill>
-          <a:ln w="12700">
-            <a:solidFill>
-              <a:srgbClr val="D64545"/>
-            </a:solidFill>
-            <a:prstDash val="solid"/>
-          </a:ln>
-        </p:spPr>
-      </p:sp>
-      <p:sp>
-        <p:nvSpPr>
-          <p:cNvPr id="21" name="Text 18"/>
-          <p:cNvSpPr txBox="1"/>
-          <p:nvPr/>
-        </p:nvSpPr>
-        <p:spPr>
-          <a:xfrm>
-            <a:off x="548640" y="5440680"/>
-            <a:ext cx="594360" cy="594360"/>
-          </a:xfrm>
-          <a:prstGeom prst="rect">
-            <a:avLst/>
-          </a:prstGeom>
-          <a:noFill/>
-          <a:ln/>
-        </p:spPr>
-        <p:txBody>
-          <a:bodyPr wrap="square" lIns="0" tIns="0" rIns="0" bIns="0" rtlCol="0" anchor="ctr"/>
-          <a:lstStyle/>
-          <a:p>
-            <a:pPr algn="ctr" indent="0" marL="0">
-              <a:buNone/>
-            </a:pPr>
-            <a:r>
-              <a:rPr lang="en-US" sz="1800" b="1" dirty="0">
-                <a:solidFill>
-                  <a:srgbClr val="FFFFFF"/>
-                </a:solidFill>
-                <a:latin typeface="Calibri" pitchFamily="34" charset="0"/>
-                <a:ea typeface="Calibri" pitchFamily="34" charset="-122"/>
-                <a:cs typeface="Calibri" pitchFamily="34" charset="-120"/>
-              </a:rPr>
-              <a:t>6</a:t>
-            </a:r>
-            <a:endParaRPr lang="en-US" sz="1800" dirty="0"/>
-          </a:p>
-        </p:txBody>
-      </p:sp>
-      <p:sp>
-        <p:nvSpPr>
-          <p:cNvPr id="22" name="Text 19"/>
-          <p:cNvSpPr txBox="1"/>
-          <p:nvPr/>
-        </p:nvSpPr>
-        <p:spPr>
-          <a:xfrm>
-            <a:off x="1325880" y="5303520"/>
-            <a:ext cx="10225735" cy="868680"/>
-          </a:xfrm>
-          <a:prstGeom prst="rect">
-            <a:avLst/>
-          </a:prstGeom>
-          <a:noFill/>
-          <a:ln/>
-        </p:spPr>
-        <p:txBody>
-          <a:bodyPr wrap="square" lIns="0" tIns="0" rIns="0" bIns="0" rtlCol="0" anchor="ctr"/>
-          <a:lstStyle/>
-          <a:p>
-            <a:pPr indent="0" marL="0">
-              <a:buNone/>
-            </a:pPr>
-            <a:r>
-              <a:rPr lang="en-US" sz="1700" b="1" dirty="0">
-                <a:solidFill>
-                  <a:srgbClr val="22253A"/>
-                </a:solidFill>
-                <a:latin typeface="Calibri" pitchFamily="34" charset="0"/>
-                <a:ea typeface="Calibri" pitchFamily="34" charset="-122"/>
-                <a:cs typeface="Calibri" pitchFamily="34" charset="-120"/>
-              </a:rPr>
-              <a:t>Togli le porte effimere dalla NACL (lezione 3) e applica</a:t>
-            </a:r>
-            <a:endParaRPr lang="en-US" sz="1700" dirty="0"/>
-          </a:p>
-          <a:p>
-            <a:pPr indent="0" marL="0">
-              <a:buNone/>
-            </a:pPr>
-            <a:r>
-              <a:rPr lang="en-US" sz="1400" dirty="0">
-                <a:solidFill>
-                  <a:srgbClr val="5F6478"/>
-                </a:solidFill>
-                <a:latin typeface="Calibri" pitchFamily="34" charset="0"/>
-                <a:ea typeface="Calibri" pitchFamily="34" charset="-122"/>
-                <a:cs typeface="Calibri" pitchFamily="34" charset="-120"/>
-              </a:rPr>
-              <a:t>la risposta non esce: psql resta appeso. Poi rimettile</a:t>
-            </a:r>
-            <a:endParaRPr lang="en-US" sz="1700" dirty="0"/>
+              <a:t>Già attivo di default dalla versione 15, ma lo scriviamo: un default invisibile può sparire.</a:t>
+            </a:r>
+            <a:endParaRPr lang="en-US" sz="1600" dirty="0"/>
           </a:p>
         </p:txBody>
       </p:sp>
@@ -12519,7 +12832,7 @@
                 <a:ea typeface="Calibri" pitchFamily="34" charset="-122"/>
                 <a:cs typeface="Calibri" pitchFamily="34" charset="-120"/>
               </a:rPr>
-              <a:t>Esercizio (2/2): fallo cadere</a:t>
+              <a:t>secrets.tf: il server legge SOLO quel segreto</a:t>
             </a:r>
             <a:endParaRPr lang="en-US" sz="3200" dirty="0"/>
           </a:p>
@@ -12573,11 +12886,11 @@
         <p:spPr>
           <a:xfrm>
             <a:off x="548640" y="1325880"/>
-            <a:ext cx="11094415" cy="1554480"/>
+            <a:ext cx="11094415" cy="4526280"/>
           </a:xfrm>
           <a:prstGeom prst="roundRect">
             <a:avLst>
-              <a:gd name="adj" fmla="val 4706"/>
+              <a:gd name="adj" fmla="val 1616"/>
             </a:avLst>
           </a:prstGeom>
           <a:solidFill>
@@ -12624,7 +12937,7 @@
                 <a:ea typeface="Calibri" pitchFamily="34" charset="-122"/>
                 <a:cs typeface="Calibri" pitchFamily="34" charset="-120"/>
               </a:rPr>
-              <a:t>sul server (SSM)</a:t>
+              <a:t>secrets.tf</a:t>
             </a:r>
             <a:endParaRPr lang="en-US" sz="1300" dirty="0"/>
           </a:p>
@@ -12639,7 +12952,7 @@
         <p:spPr>
           <a:xfrm>
             <a:off x="731520" y="1737360"/>
-            <a:ext cx="10728655" cy="1005840"/>
+            <a:ext cx="10728655" cy="3977640"/>
           </a:xfrm>
           <a:prstGeom prst="rect">
             <a:avLst/>
@@ -12663,7 +12976,7 @@
                 <a:ea typeface="Courier New" pitchFamily="34" charset="-122"/>
                 <a:cs typeface="Courier New" pitchFamily="34" charset="-120"/>
               </a:rPr>
-              <a:t>while true; do</a:t>
+              <a:t>data "aws_iam_policy_document" "app_read_db_secret" {</a:t>
             </a:r>
             <a:endParaRPr lang="en-US" sz="1600" dirty="0"/>
           </a:p>
@@ -12680,7 +12993,7 @@
                 <a:ea typeface="Courier New" pitchFamily="34" charset="-122"/>
                 <a:cs typeface="Courier New" pitchFamily="34" charset="-120"/>
               </a:rPr>
-              <a:t>  echo "$(date +%T)  $(psql "$DB" -tAc 'select inet_server_addr();' 2&gt;&amp;1 | head -1)"</a:t>
+              <a:t>  statement {</a:t>
             </a:r>
             <a:endParaRPr lang="en-US" sz="1600" dirty="0"/>
           </a:p>
@@ -12697,7 +13010,7 @@
                 <a:ea typeface="Courier New" pitchFamily="34" charset="-122"/>
                 <a:cs typeface="Courier New" pitchFamily="34" charset="-120"/>
               </a:rPr>
-              <a:t>  sleep 2</a:t>
+              <a:t>    actions   = ["secretsmanager:GetSecretValue"]</a:t>
             </a:r>
             <a:endParaRPr lang="en-US" sz="1600" dirty="0"/>
           </a:p>
@@ -12714,7 +13027,225 @@
                 <a:ea typeface="Courier New" pitchFamily="34" charset="-122"/>
                 <a:cs typeface="Courier New" pitchFamily="34" charset="-120"/>
               </a:rPr>
-              <a:t>done</a:t>
+              <a:t>    resources = [aws_db_instance.main.master_user_secret[0].secret_arn]</a:t>
+            </a:r>
+            <a:endParaRPr lang="en-US" sz="1600" dirty="0"/>
+          </a:p>
+          <a:p>
+            <a:pPr indent="0" marL="0">
+              <a:buNone/>
+            </a:pPr>
+            <a:r>
+              <a:rPr lang="en-US" sz="1600" dirty="0">
+                <a:solidFill>
+                  <a:srgbClr val="E6E6F0"/>
+                </a:solidFill>
+                <a:latin typeface="Courier New" pitchFamily="34" charset="0"/>
+                <a:ea typeface="Courier New" pitchFamily="34" charset="-122"/>
+                <a:cs typeface="Courier New" pitchFamily="34" charset="-120"/>
+              </a:rPr>
+              <a:t>  }</a:t>
+            </a:r>
+            <a:endParaRPr lang="en-US" sz="1600" dirty="0"/>
+          </a:p>
+          <a:p>
+            <a:pPr indent="0" marL="0">
+              <a:buNone/>
+            </a:pPr>
+            <a:r>
+              <a:rPr lang="en-US" sz="1600" dirty="0">
+                <a:solidFill>
+                  <a:srgbClr val="E6E6F0"/>
+                </a:solidFill>
+                <a:latin typeface="Courier New" pitchFamily="34" charset="0"/>
+                <a:ea typeface="Courier New" pitchFamily="34" charset="-122"/>
+                <a:cs typeface="Courier New" pitchFamily="34" charset="-120"/>
+              </a:rPr>
+              <a:t>}</a:t>
+            </a:r>
+            <a:endParaRPr lang="en-US" sz="1600" dirty="0"/>
+          </a:p>
+          <a:p>
+            <a:pPr indent="0" marL="0">
+              <a:buNone/>
+            </a:pPr>
+            <a:r>
+              <a:rPr lang="en-US" sz="1600" dirty="0">
+                <a:solidFill>
+                  <a:srgbClr val="E6E6F0"/>
+                </a:solidFill>
+                <a:latin typeface="Courier New" pitchFamily="34" charset="0"/>
+                <a:ea typeface="Courier New" pitchFamily="34" charset="-122"/>
+                <a:cs typeface="Courier New" pitchFamily="34" charset="-120"/>
+              </a:rPr>
+              <a:t> </a:t>
+            </a:r>
+            <a:endParaRPr lang="en-US" sz="1600" dirty="0"/>
+          </a:p>
+          <a:p>
+            <a:pPr indent="0" marL="0">
+              <a:buNone/>
+            </a:pPr>
+            <a:r>
+              <a:rPr lang="en-US" sz="1600" dirty="0">
+                <a:solidFill>
+                  <a:srgbClr val="E6E6F0"/>
+                </a:solidFill>
+                <a:latin typeface="Courier New" pitchFamily="34" charset="0"/>
+                <a:ea typeface="Courier New" pitchFamily="34" charset="-122"/>
+                <a:cs typeface="Courier New" pitchFamily="34" charset="-120"/>
+              </a:rPr>
+              <a:t>resource "aws_iam_policy" "app_read_db_secret" {</a:t>
+            </a:r>
+            <a:endParaRPr lang="en-US" sz="1600" dirty="0"/>
+          </a:p>
+          <a:p>
+            <a:pPr indent="0" marL="0">
+              <a:buNone/>
+            </a:pPr>
+            <a:r>
+              <a:rPr lang="en-US" sz="1600" dirty="0">
+                <a:solidFill>
+                  <a:srgbClr val="E6E6F0"/>
+                </a:solidFill>
+                <a:latin typeface="Courier New" pitchFamily="34" charset="0"/>
+                <a:ea typeface="Courier New" pitchFamily="34" charset="-122"/>
+                <a:cs typeface="Courier New" pitchFamily="34" charset="-120"/>
+              </a:rPr>
+              <a:t>  name   = "${var.project}-app-read-db-secret"</a:t>
+            </a:r>
+            <a:endParaRPr lang="en-US" sz="1600" dirty="0"/>
+          </a:p>
+          <a:p>
+            <a:pPr indent="0" marL="0">
+              <a:buNone/>
+            </a:pPr>
+            <a:r>
+              <a:rPr lang="en-US" sz="1600" dirty="0">
+                <a:solidFill>
+                  <a:srgbClr val="E6E6F0"/>
+                </a:solidFill>
+                <a:latin typeface="Courier New" pitchFamily="34" charset="0"/>
+                <a:ea typeface="Courier New" pitchFamily="34" charset="-122"/>
+                <a:cs typeface="Courier New" pitchFamily="34" charset="-120"/>
+              </a:rPr>
+              <a:t>  policy = data.aws_iam_policy_document.app_read_db_secret.json</a:t>
+            </a:r>
+            <a:endParaRPr lang="en-US" sz="1600" dirty="0"/>
+          </a:p>
+          <a:p>
+            <a:pPr indent="0" marL="0">
+              <a:buNone/>
+            </a:pPr>
+            <a:r>
+              <a:rPr lang="en-US" sz="1600" dirty="0">
+                <a:solidFill>
+                  <a:srgbClr val="E6E6F0"/>
+                </a:solidFill>
+                <a:latin typeface="Courier New" pitchFamily="34" charset="0"/>
+                <a:ea typeface="Courier New" pitchFamily="34" charset="-122"/>
+                <a:cs typeface="Courier New" pitchFamily="34" charset="-120"/>
+              </a:rPr>
+              <a:t>}</a:t>
+            </a:r>
+            <a:endParaRPr lang="en-US" sz="1600" dirty="0"/>
+          </a:p>
+          <a:p>
+            <a:pPr indent="0" marL="0">
+              <a:buNone/>
+            </a:pPr>
+            <a:r>
+              <a:rPr lang="en-US" sz="1600" dirty="0">
+                <a:solidFill>
+                  <a:srgbClr val="E6E6F0"/>
+                </a:solidFill>
+                <a:latin typeface="Courier New" pitchFamily="34" charset="0"/>
+                <a:ea typeface="Courier New" pitchFamily="34" charset="-122"/>
+                <a:cs typeface="Courier New" pitchFamily="34" charset="-120"/>
+              </a:rPr>
+              <a:t> </a:t>
+            </a:r>
+            <a:endParaRPr lang="en-US" sz="1600" dirty="0"/>
+          </a:p>
+          <a:p>
+            <a:pPr indent="0" marL="0">
+              <a:buNone/>
+            </a:pPr>
+            <a:r>
+              <a:rPr lang="en-US" sz="1600" dirty="0">
+                <a:solidFill>
+                  <a:srgbClr val="E6E6F0"/>
+                </a:solidFill>
+                <a:latin typeface="Courier New" pitchFamily="34" charset="0"/>
+                <a:ea typeface="Courier New" pitchFamily="34" charset="-122"/>
+                <a:cs typeface="Courier New" pitchFamily="34" charset="-120"/>
+              </a:rPr>
+              <a:t>resource "aws_iam_role_policy_attachment" "app_read_db_secret" {</a:t>
+            </a:r>
+            <a:endParaRPr lang="en-US" sz="1600" dirty="0"/>
+          </a:p>
+          <a:p>
+            <a:pPr indent="0" marL="0">
+              <a:buNone/>
+            </a:pPr>
+            <a:r>
+              <a:rPr lang="en-US" sz="1600" dirty="0">
+                <a:solidFill>
+                  <a:srgbClr val="E6E6F0"/>
+                </a:solidFill>
+                <a:latin typeface="Courier New" pitchFamily="34" charset="0"/>
+                <a:ea typeface="Courier New" pitchFamily="34" charset="-122"/>
+                <a:cs typeface="Courier New" pitchFamily="34" charset="-120"/>
+              </a:rPr>
+              <a:t>  role       = aws_iam_role.app.name        </a:t>
+            </a:r>
+            <a:pPr indent="0" marL="0">
+              <a:buNone/>
+            </a:pPr>
+            <a:r>
+              <a:rPr lang="en-US" sz="1600" dirty="0">
+                <a:solidFill>
+                  <a:srgbClr val="8FD694"/>
+                </a:solidFill>
+                <a:latin typeface="Courier New" pitchFamily="34" charset="0"/>
+                <a:ea typeface="Courier New" pitchFamily="34" charset="-122"/>
+                <a:cs typeface="Courier New" pitchFamily="34" charset="-120"/>
+              </a:rPr>
+              <a:t># lezione 4</a:t>
+            </a:r>
+            <a:endParaRPr lang="en-US" sz="1600" dirty="0"/>
+          </a:p>
+          <a:p>
+            <a:pPr indent="0" marL="0">
+              <a:buNone/>
+            </a:pPr>
+            <a:r>
+              <a:rPr lang="en-US" sz="1600" dirty="0">
+                <a:solidFill>
+                  <a:srgbClr val="E6E6F0"/>
+                </a:solidFill>
+                <a:latin typeface="Courier New" pitchFamily="34" charset="0"/>
+                <a:ea typeface="Courier New" pitchFamily="34" charset="-122"/>
+                <a:cs typeface="Courier New" pitchFamily="34" charset="-120"/>
+              </a:rPr>
+              <a:t>  policy_arn = aws_iam_policy.app_read_db_secret.arn</a:t>
+            </a:r>
+            <a:endParaRPr lang="en-US" sz="1600" dirty="0"/>
+          </a:p>
+          <a:p>
+            <a:pPr indent="0" marL="0">
+              <a:buNone/>
+            </a:pPr>
+            <a:r>
+              <a:rPr lang="en-US" sz="1600" dirty="0">
+                <a:solidFill>
+                  <a:srgbClr val="E6E6F0"/>
+                </a:solidFill>
+                <a:latin typeface="Courier New" pitchFamily="34" charset="0"/>
+                <a:ea typeface="Courier New" pitchFamily="34" charset="-122"/>
+                <a:cs typeface="Courier New" pitchFamily="34" charset="-120"/>
+              </a:rPr>
+              <a:t>}</a:t>
             </a:r>
             <a:endParaRPr lang="en-US" sz="1600" dirty="0"/>
           </a:p>
@@ -12728,20 +13259,20 @@
         </p:nvSpPr>
         <p:spPr>
           <a:xfrm>
-            <a:off x="548640" y="3017520"/>
-            <a:ext cx="11094415" cy="777240"/>
+            <a:off x="548640" y="5943600"/>
+            <a:ext cx="11094415" cy="548640"/>
           </a:xfrm>
           <a:prstGeom prst="roundRect">
             <a:avLst>
-              <a:gd name="adj" fmla="val 9412"/>
+              <a:gd name="adj" fmla="val 16667"/>
             </a:avLst>
           </a:prstGeom>
           <a:solidFill>
-            <a:srgbClr val="1E1E2E"/>
+            <a:srgbClr val="E5F4EC"/>
           </a:solidFill>
           <a:ln w="12700">
             <a:solidFill>
-              <a:srgbClr val="1E1E2E"/>
+              <a:srgbClr val="E5F4EC"/>
             </a:solidFill>
             <a:prstDash val="solid"/>
           </a:ln>
@@ -12755,8 +13286,8 @@
         </p:nvSpPr>
         <p:spPr>
           <a:xfrm>
-            <a:off x="731520" y="3090672"/>
-            <a:ext cx="10728655" cy="274320"/>
+            <a:off x="822960" y="5943600"/>
+            <a:ext cx="10545775" cy="548640"/>
           </a:xfrm>
           <a:prstGeom prst="rect">
             <a:avLst/>
@@ -12765,543 +13296,24 @@
           <a:ln/>
         </p:spPr>
         <p:txBody>
-          <a:bodyPr wrap="square" lIns="0" tIns="0" rIns="0" bIns="0" rtlCol="0" anchor="t"/>
+          <a:bodyPr wrap="square" lIns="0" tIns="0" rIns="0" bIns="0" rtlCol="0" anchor="ctr"/>
           <a:lstStyle/>
           <a:p>
-            <a:pPr indent="0" marL="0">
-              <a:buNone/>
-            </a:pPr>
-            <a:r>
-              <a:rPr lang="en-US" sz="1300" b="1" dirty="0">
-                <a:solidFill>
-                  <a:srgbClr val="F2B880"/>
+            <a:pPr algn="l" indent="0" marL="0">
+              <a:buNone/>
+            </a:pPr>
+            <a:r>
+              <a:rPr lang="en-US" sz="1600" b="1" dirty="0">
+                <a:solidFill>
+                  <a:srgbClr val="22253A"/>
                 </a:solidFill>
                 <a:latin typeface="Calibri" pitchFamily="34" charset="0"/>
                 <a:ea typeface="Calibri" pitchFamily="34" charset="-122"/>
                 <a:cs typeface="Calibri" pitchFamily="34" charset="-120"/>
               </a:rPr>
-              <a:t>dal tuo computer</a:t>
-            </a:r>
-            <a:endParaRPr lang="en-US" sz="1300" dirty="0"/>
-          </a:p>
-        </p:txBody>
-      </p:sp>
-      <p:sp>
-        <p:nvSpPr>
-          <p:cNvPr id="10" name="Text 7"/>
-          <p:cNvSpPr txBox="1"/>
-          <p:nvPr/>
-        </p:nvSpPr>
-        <p:spPr>
-          <a:xfrm>
-            <a:off x="731520" y="3429000"/>
-            <a:ext cx="10728655" cy="228600"/>
-          </a:xfrm>
-          <a:prstGeom prst="rect">
-            <a:avLst/>
-          </a:prstGeom>
-          <a:noFill/>
-          <a:ln/>
-        </p:spPr>
-        <p:txBody>
-          <a:bodyPr wrap="square" lIns="0" tIns="0" rIns="0" bIns="0" rtlCol="0" anchor="t"/>
-          <a:lstStyle/>
-          <a:p>
-            <a:pPr indent="0" marL="0">
-              <a:buNone/>
-            </a:pPr>
-            <a:r>
-              <a:rPr lang="en-US" sz="1600" dirty="0">
-                <a:solidFill>
-                  <a:srgbClr val="E6E6F0"/>
-                </a:solidFill>
-                <a:latin typeface="Courier New" pitchFamily="34" charset="0"/>
-                <a:ea typeface="Courier New" pitchFamily="34" charset="-122"/>
-                <a:cs typeface="Courier New" pitchFamily="34" charset="-120"/>
-              </a:rPr>
-              <a:t>aws rds reboot-db-instance --db-instance-identifier corso-aws-db --force-failover</a:t>
+              <a:t>Una sola azione (GetSecretValue) su una sola risorsa (il segreto del database): privilegio minimo.</a:t>
             </a:r>
             <a:endParaRPr lang="en-US" sz="1600" dirty="0"/>
-          </a:p>
-        </p:txBody>
-      </p:sp>
-      <p:sp>
-        <p:nvSpPr>
-          <p:cNvPr id="11" name="Shape 8"/>
-          <p:cNvSpPr/>
-          <p:nvPr/>
-        </p:nvSpPr>
-        <p:spPr>
-          <a:xfrm>
-            <a:off x="548640" y="4160520"/>
-            <a:ext cx="594360" cy="594360"/>
-          </a:xfrm>
-          <a:prstGeom prst="ellipse">
-            <a:avLst/>
-          </a:prstGeom>
-          <a:solidFill>
-            <a:srgbClr val="5B3FD0"/>
-          </a:solidFill>
-          <a:ln w="12700">
-            <a:solidFill>
-              <a:srgbClr val="5B3FD0"/>
-            </a:solidFill>
-            <a:prstDash val="solid"/>
-          </a:ln>
-        </p:spPr>
-      </p:sp>
-      <p:sp>
-        <p:nvSpPr>
-          <p:cNvPr id="12" name="Text 9"/>
-          <p:cNvSpPr txBox="1"/>
-          <p:nvPr/>
-        </p:nvSpPr>
-        <p:spPr>
-          <a:xfrm>
-            <a:off x="548640" y="4160520"/>
-            <a:ext cx="594360" cy="594360"/>
-          </a:xfrm>
-          <a:prstGeom prst="rect">
-            <a:avLst/>
-          </a:prstGeom>
-          <a:noFill/>
-          <a:ln/>
-        </p:spPr>
-        <p:txBody>
-          <a:bodyPr wrap="square" lIns="0" tIns="0" rIns="0" bIns="0" rtlCol="0" anchor="ctr"/>
-          <a:lstStyle/>
-          <a:p>
-            <a:pPr algn="ctr" indent="0" marL="0">
-              <a:buNone/>
-            </a:pPr>
-            <a:r>
-              <a:rPr lang="en-US" sz="1800" b="1" dirty="0">
-                <a:solidFill>
-                  <a:srgbClr val="FFFFFF"/>
-                </a:solidFill>
-                <a:latin typeface="Calibri" pitchFamily="34" charset="0"/>
-                <a:ea typeface="Calibri" pitchFamily="34" charset="-122"/>
-                <a:cs typeface="Calibri" pitchFamily="34" charset="-120"/>
-              </a:rPr>
-              <a:t>7</a:t>
-            </a:r>
-            <a:endParaRPr lang="en-US" sz="1800" dirty="0"/>
-          </a:p>
-        </p:txBody>
-      </p:sp>
-      <p:sp>
-        <p:nvSpPr>
-          <p:cNvPr id="13" name="Text 10"/>
-          <p:cNvSpPr txBox="1"/>
-          <p:nvPr/>
-        </p:nvSpPr>
-        <p:spPr>
-          <a:xfrm>
-            <a:off x="1325880" y="4023360"/>
-            <a:ext cx="4663440" cy="868680"/>
-          </a:xfrm>
-          <a:prstGeom prst="rect">
-            <a:avLst/>
-          </a:prstGeom>
-          <a:noFill/>
-          <a:ln/>
-        </p:spPr>
-        <p:txBody>
-          <a:bodyPr wrap="square" lIns="0" tIns="0" rIns="0" bIns="0" rtlCol="0" anchor="ctr"/>
-          <a:lstStyle/>
-          <a:p>
-            <a:pPr indent="0" marL="0">
-              <a:buNone/>
-            </a:pPr>
-            <a:r>
-              <a:rPr lang="en-US" sz="1700" b="1" dirty="0">
-                <a:solidFill>
-                  <a:srgbClr val="22253A"/>
-                </a:solidFill>
-                <a:latin typeface="Calibri" pitchFamily="34" charset="0"/>
-                <a:ea typeface="Calibri" pitchFamily="34" charset="-122"/>
-                <a:cs typeface="Calibri" pitchFamily="34" charset="-120"/>
-              </a:rPr>
-              <a:t>Guarda il ciclo</a:t>
-            </a:r>
-            <a:endParaRPr lang="en-US" sz="1700" dirty="0"/>
-          </a:p>
-          <a:p>
-            <a:pPr indent="0" marL="0">
-              <a:buNone/>
-            </a:pPr>
-            <a:r>
-              <a:rPr lang="en-US" sz="1400" dirty="0">
-                <a:solidFill>
-                  <a:srgbClr val="5F6478"/>
-                </a:solidFill>
-                <a:latin typeface="Calibri" pitchFamily="34" charset="0"/>
-                <a:ea typeface="Calibri" pitchFamily="34" charset="-122"/>
-                <a:cs typeface="Calibri" pitchFamily="34" charset="-120"/>
-              </a:rPr>
-              <a:t>10.20.20.x → errori per 1-2 minuti → 10.20.21.x</a:t>
-            </a:r>
-            <a:endParaRPr lang="en-US" sz="1700" dirty="0"/>
-          </a:p>
-        </p:txBody>
-      </p:sp>
-      <p:sp>
-        <p:nvSpPr>
-          <p:cNvPr id="14" name="Shape 11"/>
-          <p:cNvSpPr/>
-          <p:nvPr/>
-        </p:nvSpPr>
-        <p:spPr>
-          <a:xfrm>
-            <a:off x="6172200" y="4160520"/>
-            <a:ext cx="594360" cy="594360"/>
-          </a:xfrm>
-          <a:prstGeom prst="ellipse">
-            <a:avLst/>
-          </a:prstGeom>
-          <a:solidFill>
-            <a:srgbClr val="5B3FD0"/>
-          </a:solidFill>
-          <a:ln w="12700">
-            <a:solidFill>
-              <a:srgbClr val="5B3FD0"/>
-            </a:solidFill>
-            <a:prstDash val="solid"/>
-          </a:ln>
-        </p:spPr>
-      </p:sp>
-      <p:sp>
-        <p:nvSpPr>
-          <p:cNvPr id="15" name="Text 12"/>
-          <p:cNvSpPr txBox="1"/>
-          <p:nvPr/>
-        </p:nvSpPr>
-        <p:spPr>
-          <a:xfrm>
-            <a:off x="6172200" y="4160520"/>
-            <a:ext cx="594360" cy="594360"/>
-          </a:xfrm>
-          <a:prstGeom prst="rect">
-            <a:avLst/>
-          </a:prstGeom>
-          <a:noFill/>
-          <a:ln/>
-        </p:spPr>
-        <p:txBody>
-          <a:bodyPr wrap="square" lIns="0" tIns="0" rIns="0" bIns="0" rtlCol="0" anchor="ctr"/>
-          <a:lstStyle/>
-          <a:p>
-            <a:pPr algn="ctr" indent="0" marL="0">
-              <a:buNone/>
-            </a:pPr>
-            <a:r>
-              <a:rPr lang="en-US" sz="1800" b="1" dirty="0">
-                <a:solidFill>
-                  <a:srgbClr val="FFFFFF"/>
-                </a:solidFill>
-                <a:latin typeface="Calibri" pitchFamily="34" charset="0"/>
-                <a:ea typeface="Calibri" pitchFamily="34" charset="-122"/>
-                <a:cs typeface="Calibri" pitchFamily="34" charset="-120"/>
-              </a:rPr>
-              <a:t>8</a:t>
-            </a:r>
-            <a:endParaRPr lang="en-US" sz="1800" dirty="0"/>
-          </a:p>
-        </p:txBody>
-      </p:sp>
-      <p:sp>
-        <p:nvSpPr>
-          <p:cNvPr id="16" name="Text 13"/>
-          <p:cNvSpPr txBox="1"/>
-          <p:nvPr/>
-        </p:nvSpPr>
-        <p:spPr>
-          <a:xfrm>
-            <a:off x="6949440" y="4023360"/>
-            <a:ext cx="4663440" cy="868680"/>
-          </a:xfrm>
-          <a:prstGeom prst="rect">
-            <a:avLst/>
-          </a:prstGeom>
-          <a:noFill/>
-          <a:ln/>
-        </p:spPr>
-        <p:txBody>
-          <a:bodyPr wrap="square" lIns="0" tIns="0" rIns="0" bIns="0" rtlCol="0" anchor="ctr"/>
-          <a:lstStyle/>
-          <a:p>
-            <a:pPr indent="0" marL="0">
-              <a:buNone/>
-            </a:pPr>
-            <a:r>
-              <a:rPr lang="en-US" sz="1700" b="1" dirty="0">
-                <a:solidFill>
-                  <a:srgbClr val="22253A"/>
-                </a:solidFill>
-                <a:latin typeface="Calibri" pitchFamily="34" charset="0"/>
-                <a:ea typeface="Calibri" pitchFamily="34" charset="-122"/>
-                <a:cs typeface="Calibri" pitchFamily="34" charset="-120"/>
-              </a:rPr>
-              <a:t>Eventi di RDS</a:t>
-            </a:r>
-            <a:endParaRPr lang="en-US" sz="1700" dirty="0"/>
-          </a:p>
-          <a:p>
-            <a:pPr indent="0" marL="0">
-              <a:buNone/>
-            </a:pPr>
-            <a:r>
-              <a:rPr lang="en-US" sz="1400" dirty="0">
-                <a:solidFill>
-                  <a:srgbClr val="5F6478"/>
-                </a:solidFill>
-                <a:latin typeface="Calibri" pitchFamily="34" charset="0"/>
-                <a:ea typeface="Calibri" pitchFamily="34" charset="-122"/>
-                <a:cs typeface="Calibri" pitchFamily="34" charset="-120"/>
-              </a:rPr>
-              <a:t>Logs &amp; events: inizio e fine del failover</a:t>
-            </a:r>
-            <a:endParaRPr lang="en-US" sz="1700" dirty="0"/>
-          </a:p>
-        </p:txBody>
-      </p:sp>
-      <p:sp>
-        <p:nvSpPr>
-          <p:cNvPr id="17" name="Shape 14"/>
-          <p:cNvSpPr/>
-          <p:nvPr/>
-        </p:nvSpPr>
-        <p:spPr>
-          <a:xfrm>
-            <a:off x="548640" y="5257800"/>
-            <a:ext cx="594360" cy="594360"/>
-          </a:xfrm>
-          <a:prstGeom prst="ellipse">
-            <a:avLst/>
-          </a:prstGeom>
-          <a:solidFill>
-            <a:srgbClr val="5B3FD0"/>
-          </a:solidFill>
-          <a:ln w="12700">
-            <a:solidFill>
-              <a:srgbClr val="5B3FD0"/>
-            </a:solidFill>
-            <a:prstDash val="solid"/>
-          </a:ln>
-        </p:spPr>
-      </p:sp>
-      <p:sp>
-        <p:nvSpPr>
-          <p:cNvPr id="18" name="Text 15"/>
-          <p:cNvSpPr txBox="1"/>
-          <p:nvPr/>
-        </p:nvSpPr>
-        <p:spPr>
-          <a:xfrm>
-            <a:off x="548640" y="5257800"/>
-            <a:ext cx="594360" cy="594360"/>
-          </a:xfrm>
-          <a:prstGeom prst="rect">
-            <a:avLst/>
-          </a:prstGeom>
-          <a:noFill/>
-          <a:ln/>
-        </p:spPr>
-        <p:txBody>
-          <a:bodyPr wrap="square" lIns="0" tIns="0" rIns="0" bIns="0" rtlCol="0" anchor="ctr"/>
-          <a:lstStyle/>
-          <a:p>
-            <a:pPr algn="ctr" indent="0" marL="0">
-              <a:buNone/>
-            </a:pPr>
-            <a:r>
-              <a:rPr lang="en-US" sz="1800" b="1" dirty="0">
-                <a:solidFill>
-                  <a:srgbClr val="FFFFFF"/>
-                </a:solidFill>
-                <a:latin typeface="Calibri" pitchFamily="34" charset="0"/>
-                <a:ea typeface="Calibri" pitchFamily="34" charset="-122"/>
-                <a:cs typeface="Calibri" pitchFamily="34" charset="-120"/>
-              </a:rPr>
-              <a:t>9</a:t>
-            </a:r>
-            <a:endParaRPr lang="en-US" sz="1800" dirty="0"/>
-          </a:p>
-        </p:txBody>
-      </p:sp>
-      <p:sp>
-        <p:nvSpPr>
-          <p:cNvPr id="19" name="Text 16"/>
-          <p:cNvSpPr txBox="1"/>
-          <p:nvPr/>
-        </p:nvSpPr>
-        <p:spPr>
-          <a:xfrm>
-            <a:off x="1325880" y="5120640"/>
-            <a:ext cx="4663440" cy="868680"/>
-          </a:xfrm>
-          <a:prstGeom prst="rect">
-            <a:avLst/>
-          </a:prstGeom>
-          <a:noFill/>
-          <a:ln/>
-        </p:spPr>
-        <p:txBody>
-          <a:bodyPr wrap="square" lIns="0" tIns="0" rIns="0" bIns="0" rtlCol="0" anchor="ctr"/>
-          <a:lstStyle/>
-          <a:p>
-            <a:pPr indent="0" marL="0">
-              <a:buNone/>
-            </a:pPr>
-            <a:r>
-              <a:rPr lang="en-US" sz="1700" b="1" dirty="0">
-                <a:solidFill>
-                  <a:srgbClr val="22253A"/>
-                </a:solidFill>
-                <a:latin typeface="Calibri" pitchFamily="34" charset="0"/>
-                <a:ea typeface="Calibri" pitchFamily="34" charset="-122"/>
-                <a:cs typeface="Calibri" pitchFamily="34" charset="-120"/>
-              </a:rPr>
-              <a:t>Prova a cancellarlo dalla CLI</a:t>
-            </a:r>
-            <a:endParaRPr lang="en-US" sz="1700" dirty="0"/>
-          </a:p>
-          <a:p>
-            <a:pPr indent="0" marL="0">
-              <a:buNone/>
-            </a:pPr>
-            <a:r>
-              <a:rPr lang="en-US" sz="1400" dirty="0">
-                <a:solidFill>
-                  <a:srgbClr val="5F6478"/>
-                </a:solidFill>
-                <a:latin typeface="Calibri" pitchFamily="34" charset="0"/>
-                <a:ea typeface="Calibri" pitchFamily="34" charset="-122"/>
-                <a:cs typeface="Calibri" pitchFamily="34" charset="-120"/>
-              </a:rPr>
-              <a:t>AWS rifiuta: protected DB Instance</a:t>
-            </a:r>
-            <a:endParaRPr lang="en-US" sz="1700" dirty="0"/>
-          </a:p>
-        </p:txBody>
-      </p:sp>
-      <p:sp>
-        <p:nvSpPr>
-          <p:cNvPr id="20" name="Shape 17"/>
-          <p:cNvSpPr/>
-          <p:nvPr/>
-        </p:nvSpPr>
-        <p:spPr>
-          <a:xfrm>
-            <a:off x="6172200" y="5257800"/>
-            <a:ext cx="594360" cy="594360"/>
-          </a:xfrm>
-          <a:prstGeom prst="ellipse">
-            <a:avLst/>
-          </a:prstGeom>
-          <a:solidFill>
-            <a:srgbClr val="D64545"/>
-          </a:solidFill>
-          <a:ln w="12700">
-            <a:solidFill>
-              <a:srgbClr val="D64545"/>
-            </a:solidFill>
-            <a:prstDash val="solid"/>
-          </a:ln>
-        </p:spPr>
-      </p:sp>
-      <p:sp>
-        <p:nvSpPr>
-          <p:cNvPr id="21" name="Text 18"/>
-          <p:cNvSpPr txBox="1"/>
-          <p:nvPr/>
-        </p:nvSpPr>
-        <p:spPr>
-          <a:xfrm>
-            <a:off x="6172200" y="5257800"/>
-            <a:ext cx="594360" cy="594360"/>
-          </a:xfrm>
-          <a:prstGeom prst="rect">
-            <a:avLst/>
-          </a:prstGeom>
-          <a:noFill/>
-          <a:ln/>
-        </p:spPr>
-        <p:txBody>
-          <a:bodyPr wrap="square" lIns="0" tIns="0" rIns="0" bIns="0" rtlCol="0" anchor="ctr"/>
-          <a:lstStyle/>
-          <a:p>
-            <a:pPr algn="ctr" indent="0" marL="0">
-              <a:buNone/>
-            </a:pPr>
-            <a:r>
-              <a:rPr lang="en-US" sz="1800" b="1" dirty="0">
-                <a:solidFill>
-                  <a:srgbClr val="FFFFFF"/>
-                </a:solidFill>
-                <a:latin typeface="Calibri" pitchFamily="34" charset="0"/>
-                <a:ea typeface="Calibri" pitchFamily="34" charset="-122"/>
-                <a:cs typeface="Calibri" pitchFamily="34" charset="-120"/>
-              </a:rPr>
-              <a:t>10</a:t>
-            </a:r>
-            <a:endParaRPr lang="en-US" sz="1800" dirty="0"/>
-          </a:p>
-        </p:txBody>
-      </p:sp>
-      <p:sp>
-        <p:nvSpPr>
-          <p:cNvPr id="22" name="Text 19"/>
-          <p:cNvSpPr txBox="1"/>
-          <p:nvPr/>
-        </p:nvSpPr>
-        <p:spPr>
-          <a:xfrm>
-            <a:off x="6949440" y="5120640"/>
-            <a:ext cx="4663440" cy="868680"/>
-          </a:xfrm>
-          <a:prstGeom prst="rect">
-            <a:avLst/>
-          </a:prstGeom>
-          <a:noFill/>
-          <a:ln/>
-        </p:spPr>
-        <p:txBody>
-          <a:bodyPr wrap="square" lIns="0" tIns="0" rIns="0" bIns="0" rtlCol="0" anchor="ctr"/>
-          <a:lstStyle/>
-          <a:p>
-            <a:pPr indent="0" marL="0">
-              <a:buNone/>
-            </a:pPr>
-            <a:r>
-              <a:rPr lang="en-US" sz="1700" b="1" dirty="0">
-                <a:solidFill>
-                  <a:srgbClr val="22253A"/>
-                </a:solidFill>
-                <a:latin typeface="Calibri" pitchFamily="34" charset="0"/>
-                <a:ea typeface="Calibri" pitchFamily="34" charset="-122"/>
-                <a:cs typeface="Calibri" pitchFamily="34" charset="-120"/>
-              </a:rPr>
-              <a:t>Pulizia in due tempi</a:t>
-            </a:r>
-            <a:endParaRPr lang="en-US" sz="1700" dirty="0"/>
-          </a:p>
-          <a:p>
-            <a:pPr indent="0" marL="0">
-              <a:buNone/>
-            </a:pPr>
-            <a:r>
-              <a:rPr lang="en-US" sz="1400" dirty="0">
-                <a:solidFill>
-                  <a:srgbClr val="5F6478"/>
-                </a:solidFill>
-                <a:latin typeface="Calibri" pitchFamily="34" charset="0"/>
-                <a:ea typeface="Calibri" pitchFamily="34" charset="-122"/>
-                <a:cs typeface="Calibri" pitchFamily="34" charset="-120"/>
-              </a:rPr>
-              <a:t>protezione false + apply, poi destroy; cancella lo snapshot finale</a:t>
-            </a:r>
-            <a:endParaRPr lang="en-US" sz="1700" dirty="0"/>
           </a:p>
         </p:txBody>
       </p:sp>
@@ -13418,7 +13430,7 @@
                 <a:ea typeface="Calibri" pitchFamily="34" charset="-122"/>
                 <a:cs typeface="Calibri" pitchFamily="34" charset="-120"/>
               </a:rPr>
-              <a:t>Le parole della lezione</a:t>
+              <a:t>Esercizio (1/2): crea, collegati, fatti bloccare</a:t>
             </a:r>
             <a:endParaRPr lang="en-US" sz="3200" dirty="0"/>
           </a:p>
@@ -13463,9 +13475,1786 @@
           </a:p>
         </p:txBody>
       </p:sp>
+      <p:sp>
+        <p:nvSpPr>
+          <p:cNvPr id="5" name="Shape 2"/>
+          <p:cNvSpPr/>
+          <p:nvPr/>
+        </p:nvSpPr>
+        <p:spPr>
+          <a:xfrm>
+            <a:off x="548640" y="1417320"/>
+            <a:ext cx="594360" cy="594360"/>
+          </a:xfrm>
+          <a:prstGeom prst="ellipse">
+            <a:avLst/>
+          </a:prstGeom>
+          <a:solidFill>
+            <a:srgbClr val="5B3FD0"/>
+          </a:solidFill>
+          <a:ln w="12700">
+            <a:solidFill>
+              <a:srgbClr val="5B3FD0"/>
+            </a:solidFill>
+            <a:prstDash val="solid"/>
+          </a:ln>
+        </p:spPr>
+      </p:sp>
+      <p:sp>
+        <p:nvSpPr>
+          <p:cNvPr id="6" name="Text 3"/>
+          <p:cNvSpPr txBox="1"/>
+          <p:nvPr/>
+        </p:nvSpPr>
+        <p:spPr>
+          <a:xfrm>
+            <a:off x="548640" y="1417320"/>
+            <a:ext cx="594360" cy="594360"/>
+          </a:xfrm>
+          <a:prstGeom prst="rect">
+            <a:avLst/>
+          </a:prstGeom>
+          <a:noFill/>
+          <a:ln/>
+        </p:spPr>
+        <p:txBody>
+          <a:bodyPr wrap="square" lIns="0" tIns="0" rIns="0" bIns="0" rtlCol="0" anchor="ctr"/>
+          <a:lstStyle/>
+          <a:p>
+            <a:pPr algn="ctr" indent="0" marL="0">
+              <a:buNone/>
+            </a:pPr>
+            <a:r>
+              <a:rPr lang="en-US" sz="1800" b="1" dirty="0">
+                <a:solidFill>
+                  <a:srgbClr val="FFFFFF"/>
+                </a:solidFill>
+                <a:latin typeface="Calibri" pitchFamily="34" charset="0"/>
+                <a:ea typeface="Calibri" pitchFamily="34" charset="-122"/>
+                <a:cs typeface="Calibri" pitchFamily="34" charset="-120"/>
+              </a:rPr>
+              <a:t>1</a:t>
+            </a:r>
+            <a:endParaRPr lang="en-US" sz="1800" dirty="0"/>
+          </a:p>
+        </p:txBody>
+      </p:sp>
+      <p:sp>
+        <p:nvSpPr>
+          <p:cNvPr id="7" name="Text 4"/>
+          <p:cNvSpPr txBox="1"/>
+          <p:nvPr/>
+        </p:nvSpPr>
+        <p:spPr>
+          <a:xfrm>
+            <a:off x="1325880" y="1280160"/>
+            <a:ext cx="10225735" cy="868680"/>
+          </a:xfrm>
+          <a:prstGeom prst="rect">
+            <a:avLst/>
+          </a:prstGeom>
+          <a:noFill/>
+          <a:ln/>
+        </p:spPr>
+        <p:txBody>
+          <a:bodyPr wrap="square" lIns="0" tIns="0" rIns="0" bIns="0" rtlCol="0" anchor="ctr"/>
+          <a:lstStyle/>
+          <a:p>
+            <a:pPr indent="0" marL="0">
+              <a:buNone/>
+            </a:pPr>
+            <a:r>
+              <a:rPr lang="en-US" sz="1700" b="1" dirty="0">
+                <a:solidFill>
+                  <a:srgbClr val="22253A"/>
+                </a:solidFill>
+                <a:latin typeface="Calibri" pitchFamily="34" charset="0"/>
+                <a:ea typeface="Calibri" pitchFamily="34" charset="-122"/>
+                <a:cs typeface="Calibri" pitchFamily="34" charset="-120"/>
+              </a:rPr>
+              <a:t>terraform apply, poi 15-20 minuti</a:t>
+            </a:r>
+            <a:endParaRPr lang="en-US" sz="1700" dirty="0"/>
+          </a:p>
+          <a:p>
+            <a:pPr indent="0" marL="0">
+              <a:buNone/>
+            </a:pPr>
+            <a:r>
+              <a:rPr lang="en-US" sz="1400" dirty="0">
+                <a:solidFill>
+                  <a:srgbClr val="5F6478"/>
+                </a:solidFill>
+                <a:latin typeface="Calibri" pitchFamily="34" charset="0"/>
+                <a:ea typeface="Calibri" pitchFamily="34" charset="-122"/>
+                <a:cs typeface="Calibri" pitchFamily="34" charset="-120"/>
+              </a:rPr>
+              <a:t>C'è una password nel plan? (no)</a:t>
+            </a:r>
+            <a:endParaRPr lang="en-US" sz="1700" dirty="0"/>
+          </a:p>
+        </p:txBody>
+      </p:sp>
+      <p:sp>
+        <p:nvSpPr>
+          <p:cNvPr id="8" name="Shape 5"/>
+          <p:cNvSpPr/>
+          <p:nvPr/>
+        </p:nvSpPr>
+        <p:spPr>
+          <a:xfrm>
+            <a:off x="548640" y="2221992"/>
+            <a:ext cx="594360" cy="594360"/>
+          </a:xfrm>
+          <a:prstGeom prst="ellipse">
+            <a:avLst/>
+          </a:prstGeom>
+          <a:solidFill>
+            <a:srgbClr val="5B3FD0"/>
+          </a:solidFill>
+          <a:ln w="12700">
+            <a:solidFill>
+              <a:srgbClr val="5B3FD0"/>
+            </a:solidFill>
+            <a:prstDash val="solid"/>
+          </a:ln>
+        </p:spPr>
+      </p:sp>
+      <p:sp>
+        <p:nvSpPr>
+          <p:cNvPr id="9" name="Text 6"/>
+          <p:cNvSpPr txBox="1"/>
+          <p:nvPr/>
+        </p:nvSpPr>
+        <p:spPr>
+          <a:xfrm>
+            <a:off x="548640" y="2221992"/>
+            <a:ext cx="594360" cy="594360"/>
+          </a:xfrm>
+          <a:prstGeom prst="rect">
+            <a:avLst/>
+          </a:prstGeom>
+          <a:noFill/>
+          <a:ln/>
+        </p:spPr>
+        <p:txBody>
+          <a:bodyPr wrap="square" lIns="0" tIns="0" rIns="0" bIns="0" rtlCol="0" anchor="ctr"/>
+          <a:lstStyle/>
+          <a:p>
+            <a:pPr algn="ctr" indent="0" marL="0">
+              <a:buNone/>
+            </a:pPr>
+            <a:r>
+              <a:rPr lang="en-US" sz="1800" b="1" dirty="0">
+                <a:solidFill>
+                  <a:srgbClr val="FFFFFF"/>
+                </a:solidFill>
+                <a:latin typeface="Calibri" pitchFamily="34" charset="0"/>
+                <a:ea typeface="Calibri" pitchFamily="34" charset="-122"/>
+                <a:cs typeface="Calibri" pitchFamily="34" charset="-120"/>
+              </a:rPr>
+              <a:t>2</a:t>
+            </a:r>
+            <a:endParaRPr lang="en-US" sz="1800" dirty="0"/>
+          </a:p>
+        </p:txBody>
+      </p:sp>
+      <p:sp>
+        <p:nvSpPr>
+          <p:cNvPr id="10" name="Text 7"/>
+          <p:cNvSpPr txBox="1"/>
+          <p:nvPr/>
+        </p:nvSpPr>
+        <p:spPr>
+          <a:xfrm>
+            <a:off x="1325880" y="2084832"/>
+            <a:ext cx="10225735" cy="868680"/>
+          </a:xfrm>
+          <a:prstGeom prst="rect">
+            <a:avLst/>
+          </a:prstGeom>
+          <a:noFill/>
+          <a:ln/>
+        </p:spPr>
+        <p:txBody>
+          <a:bodyPr wrap="square" lIns="0" tIns="0" rIns="0" bIns="0" rtlCol="0" anchor="ctr"/>
+          <a:lstStyle/>
+          <a:p>
+            <a:pPr indent="0" marL="0">
+              <a:buNone/>
+            </a:pPr>
+            <a:r>
+              <a:rPr lang="en-US" sz="1700" b="1" dirty="0">
+                <a:solidFill>
+                  <a:srgbClr val="22253A"/>
+                </a:solidFill>
+                <a:latin typeface="Calibri" pitchFamily="34" charset="0"/>
+                <a:ea typeface="Calibri" pitchFamily="34" charset="-122"/>
+                <a:cs typeface="Calibri" pitchFamily="34" charset="-120"/>
+              </a:rPr>
+              <a:t>Secrets Manager: il segreto rds!db-…</a:t>
+            </a:r>
+            <a:endParaRPr lang="en-US" sz="1700" dirty="0"/>
+          </a:p>
+          <a:p>
+            <a:pPr indent="0" marL="0">
+              <a:buNone/>
+            </a:pPr>
+            <a:r>
+              <a:rPr lang="en-US" sz="1400" dirty="0">
+                <a:solidFill>
+                  <a:srgbClr val="5F6478"/>
+                </a:solidFill>
+                <a:latin typeface="Calibri" pitchFamily="34" charset="0"/>
+                <a:ea typeface="Calibri" pitchFamily="34" charset="-122"/>
+                <a:cs typeface="Calibri" pitchFamily="34" charset="-120"/>
+              </a:rPr>
+              <a:t>rotazione ogni 7 giorni; nello state solo l'ARN</a:t>
+            </a:r>
+            <a:endParaRPr lang="en-US" sz="1700" dirty="0"/>
+          </a:p>
+        </p:txBody>
+      </p:sp>
+      <p:sp>
+        <p:nvSpPr>
+          <p:cNvPr id="11" name="Shape 8"/>
+          <p:cNvSpPr/>
+          <p:nvPr/>
+        </p:nvSpPr>
+        <p:spPr>
+          <a:xfrm>
+            <a:off x="548640" y="3026664"/>
+            <a:ext cx="594360" cy="594360"/>
+          </a:xfrm>
+          <a:prstGeom prst="ellipse">
+            <a:avLst/>
+          </a:prstGeom>
+          <a:solidFill>
+            <a:srgbClr val="5B3FD0"/>
+          </a:solidFill>
+          <a:ln w="12700">
+            <a:solidFill>
+              <a:srgbClr val="5B3FD0"/>
+            </a:solidFill>
+            <a:prstDash val="solid"/>
+          </a:ln>
+        </p:spPr>
+      </p:sp>
+      <p:sp>
+        <p:nvSpPr>
+          <p:cNvPr id="12" name="Text 9"/>
+          <p:cNvSpPr txBox="1"/>
+          <p:nvPr/>
+        </p:nvSpPr>
+        <p:spPr>
+          <a:xfrm>
+            <a:off x="548640" y="3026664"/>
+            <a:ext cx="594360" cy="594360"/>
+          </a:xfrm>
+          <a:prstGeom prst="rect">
+            <a:avLst/>
+          </a:prstGeom>
+          <a:noFill/>
+          <a:ln/>
+        </p:spPr>
+        <p:txBody>
+          <a:bodyPr wrap="square" lIns="0" tIns="0" rIns="0" bIns="0" rtlCol="0" anchor="ctr"/>
+          <a:lstStyle/>
+          <a:p>
+            <a:pPr algn="ctr" indent="0" marL="0">
+              <a:buNone/>
+            </a:pPr>
+            <a:r>
+              <a:rPr lang="en-US" sz="1800" b="1" dirty="0">
+                <a:solidFill>
+                  <a:srgbClr val="FFFFFF"/>
+                </a:solidFill>
+                <a:latin typeface="Calibri" pitchFamily="34" charset="0"/>
+                <a:ea typeface="Calibri" pitchFamily="34" charset="-122"/>
+                <a:cs typeface="Calibri" pitchFamily="34" charset="-120"/>
+              </a:rPr>
+              <a:t>3</a:t>
+            </a:r>
+            <a:endParaRPr lang="en-US" sz="1800" dirty="0"/>
+          </a:p>
+        </p:txBody>
+      </p:sp>
+      <p:sp>
+        <p:nvSpPr>
+          <p:cNvPr id="13" name="Text 10"/>
+          <p:cNvSpPr txBox="1"/>
+          <p:nvPr/>
+        </p:nvSpPr>
+        <p:spPr>
+          <a:xfrm>
+            <a:off x="1325880" y="2889504"/>
+            <a:ext cx="10225735" cy="868680"/>
+          </a:xfrm>
+          <a:prstGeom prst="rect">
+            <a:avLst/>
+          </a:prstGeom>
+          <a:noFill/>
+          <a:ln/>
+        </p:spPr>
+        <p:txBody>
+          <a:bodyPr wrap="square" lIns="0" tIns="0" rIns="0" bIns="0" rtlCol="0" anchor="ctr"/>
+          <a:lstStyle/>
+          <a:p>
+            <a:pPr indent="0" marL="0">
+              <a:buNone/>
+            </a:pPr>
+            <a:r>
+              <a:rPr lang="en-US" sz="1700" b="1" dirty="0">
+                <a:solidFill>
+                  <a:srgbClr val="22253A"/>
+                </a:solidFill>
+                <a:latin typeface="Calibri" pitchFamily="34" charset="0"/>
+                <a:ea typeface="Calibri" pitchFamily="34" charset="-122"/>
+                <a:cs typeface="Calibri" pitchFamily="34" charset="-120"/>
+              </a:rPr>
+              <a:t>Dal server (SSM): certificato + password, poi psql con verify-full</a:t>
+            </a:r>
+            <a:endParaRPr lang="en-US" sz="1700" dirty="0"/>
+          </a:p>
+          <a:p>
+            <a:pPr indent="0" marL="0">
+              <a:buNone/>
+            </a:pPr>
+            <a:r>
+              <a:rPr lang="en-US" sz="1400" dirty="0">
+                <a:solidFill>
+                  <a:srgbClr val="5F6478"/>
+                </a:solidFill>
+                <a:latin typeface="Calibri" pitchFamily="34" charset="0"/>
+                <a:ea typeface="Calibri" pitchFamily="34" charset="-122"/>
+                <a:cs typeface="Calibri" pitchFamily="34" charset="-120"/>
+              </a:rPr>
+              <a:t>funziona; senza TLS o con l'IP invece del nome: rifiutato</a:t>
+            </a:r>
+            <a:endParaRPr lang="en-US" sz="1700" dirty="0"/>
+          </a:p>
+        </p:txBody>
+      </p:sp>
+      <p:sp>
+        <p:nvSpPr>
+          <p:cNvPr id="14" name="Shape 11"/>
+          <p:cNvSpPr/>
+          <p:nvPr/>
+        </p:nvSpPr>
+        <p:spPr>
+          <a:xfrm>
+            <a:off x="548640" y="3831336"/>
+            <a:ext cx="594360" cy="594360"/>
+          </a:xfrm>
+          <a:prstGeom prst="ellipse">
+            <a:avLst/>
+          </a:prstGeom>
+          <a:solidFill>
+            <a:srgbClr val="5B3FD0"/>
+          </a:solidFill>
+          <a:ln w="12700">
+            <a:solidFill>
+              <a:srgbClr val="5B3FD0"/>
+            </a:solidFill>
+            <a:prstDash val="solid"/>
+          </a:ln>
+        </p:spPr>
+      </p:sp>
+      <p:sp>
+        <p:nvSpPr>
+          <p:cNvPr id="15" name="Text 12"/>
+          <p:cNvSpPr txBox="1"/>
+          <p:nvPr/>
+        </p:nvSpPr>
+        <p:spPr>
+          <a:xfrm>
+            <a:off x="548640" y="3831336"/>
+            <a:ext cx="594360" cy="594360"/>
+          </a:xfrm>
+          <a:prstGeom prst="rect">
+            <a:avLst/>
+          </a:prstGeom>
+          <a:noFill/>
+          <a:ln/>
+        </p:spPr>
+        <p:txBody>
+          <a:bodyPr wrap="square" lIns="0" tIns="0" rIns="0" bIns="0" rtlCol="0" anchor="ctr"/>
+          <a:lstStyle/>
+          <a:p>
+            <a:pPr algn="ctr" indent="0" marL="0">
+              <a:buNone/>
+            </a:pPr>
+            <a:r>
+              <a:rPr lang="en-US" sz="1800" b="1" dirty="0">
+                <a:solidFill>
+                  <a:srgbClr val="FFFFFF"/>
+                </a:solidFill>
+                <a:latin typeface="Calibri" pitchFamily="34" charset="0"/>
+                <a:ea typeface="Calibri" pitchFamily="34" charset="-122"/>
+                <a:cs typeface="Calibri" pitchFamily="34" charset="-120"/>
+              </a:rPr>
+              <a:t>4</a:t>
+            </a:r>
+            <a:endParaRPr lang="en-US" sz="1800" dirty="0"/>
+          </a:p>
+        </p:txBody>
+      </p:sp>
+      <p:sp>
+        <p:nvSpPr>
+          <p:cNvPr id="16" name="Text 13"/>
+          <p:cNvSpPr txBox="1"/>
+          <p:nvPr/>
+        </p:nvSpPr>
+        <p:spPr>
+          <a:xfrm>
+            <a:off x="1325880" y="3694176"/>
+            <a:ext cx="10225735" cy="868680"/>
+          </a:xfrm>
+          <a:prstGeom prst="rect">
+            <a:avLst/>
+          </a:prstGeom>
+          <a:noFill/>
+          <a:ln/>
+        </p:spPr>
+        <p:txBody>
+          <a:bodyPr wrap="square" lIns="0" tIns="0" rIns="0" bIns="0" rtlCol="0" anchor="ctr"/>
+          <a:lstStyle/>
+          <a:p>
+            <a:pPr indent="0" marL="0">
+              <a:buNone/>
+            </a:pPr>
+            <a:r>
+              <a:rPr lang="en-US" sz="1700" b="1" dirty="0">
+                <a:solidFill>
+                  <a:srgbClr val="22253A"/>
+                </a:solidFill>
+                <a:latin typeface="Calibri" pitchFamily="34" charset="0"/>
+                <a:ea typeface="Calibri" pitchFamily="34" charset="-122"/>
+                <a:cs typeface="Calibri" pitchFamily="34" charset="-120"/>
+              </a:rPr>
+              <a:t>Da casa come amministratore (Tailscale)</a:t>
+            </a:r>
+            <a:endParaRPr lang="en-US" sz="1700" dirty="0"/>
+          </a:p>
+          <a:p>
+            <a:pPr indent="0" marL="0">
+              <a:buNone/>
+            </a:pPr>
+            <a:r>
+              <a:rPr lang="en-US" sz="1400" dirty="0">
+                <a:solidFill>
+                  <a:srgbClr val="5F6478"/>
+                </a:solidFill>
+                <a:latin typeface="Calibri" pitchFamily="34" charset="0"/>
+                <a:ea typeface="Calibri" pitchFamily="34" charset="-122"/>
+                <a:cs typeface="Calibri" pitchFamily="34" charset="-120"/>
+              </a:rPr>
+              <a:t>funziona: il nome porta a 10.20.20.x, attraverso il router</a:t>
+            </a:r>
+            <a:endParaRPr lang="en-US" sz="1700" dirty="0"/>
+          </a:p>
+        </p:txBody>
+      </p:sp>
+      <p:sp>
+        <p:nvSpPr>
+          <p:cNvPr id="17" name="Shape 14"/>
+          <p:cNvSpPr/>
+          <p:nvPr/>
+        </p:nvSpPr>
+        <p:spPr>
+          <a:xfrm>
+            <a:off x="548640" y="4636008"/>
+            <a:ext cx="594360" cy="594360"/>
+          </a:xfrm>
+          <a:prstGeom prst="ellipse">
+            <a:avLst/>
+          </a:prstGeom>
+          <a:solidFill>
+            <a:srgbClr val="5B3FD0"/>
+          </a:solidFill>
+          <a:ln w="12700">
+            <a:solidFill>
+              <a:srgbClr val="5B3FD0"/>
+            </a:solidFill>
+            <a:prstDash val="solid"/>
+          </a:ln>
+        </p:spPr>
+      </p:sp>
+      <p:sp>
+        <p:nvSpPr>
+          <p:cNvPr id="18" name="Text 15"/>
+          <p:cNvSpPr txBox="1"/>
+          <p:nvPr/>
+        </p:nvSpPr>
+        <p:spPr>
+          <a:xfrm>
+            <a:off x="548640" y="4636008"/>
+            <a:ext cx="594360" cy="594360"/>
+          </a:xfrm>
+          <a:prstGeom prst="rect">
+            <a:avLst/>
+          </a:prstGeom>
+          <a:noFill/>
+          <a:ln/>
+        </p:spPr>
+        <p:txBody>
+          <a:bodyPr wrap="square" lIns="0" tIns="0" rIns="0" bIns="0" rtlCol="0" anchor="ctr"/>
+          <a:lstStyle/>
+          <a:p>
+            <a:pPr algn="ctr" indent="0" marL="0">
+              <a:buNone/>
+            </a:pPr>
+            <a:r>
+              <a:rPr lang="en-US" sz="1800" b="1" dirty="0">
+                <a:solidFill>
+                  <a:srgbClr val="FFFFFF"/>
+                </a:solidFill>
+                <a:latin typeface="Calibri" pitchFamily="34" charset="0"/>
+                <a:ea typeface="Calibri" pitchFamily="34" charset="-122"/>
+                <a:cs typeface="Calibri" pitchFamily="34" charset="-120"/>
+              </a:rPr>
+              <a:t>5</a:t>
+            </a:r>
+            <a:endParaRPr lang="en-US" sz="1800" dirty="0"/>
+          </a:p>
+        </p:txBody>
+      </p:sp>
+      <p:sp>
+        <p:nvSpPr>
+          <p:cNvPr id="19" name="Text 16"/>
+          <p:cNvSpPr txBox="1"/>
+          <p:nvPr/>
+        </p:nvSpPr>
+        <p:spPr>
+          <a:xfrm>
+            <a:off x="1325880" y="4498848"/>
+            <a:ext cx="10225735" cy="868680"/>
+          </a:xfrm>
+          <a:prstGeom prst="rect">
+            <a:avLst/>
+          </a:prstGeom>
+          <a:noFill/>
+          <a:ln/>
+        </p:spPr>
+        <p:txBody>
+          <a:bodyPr wrap="square" lIns="0" tIns="0" rIns="0" bIns="0" rtlCol="0" anchor="ctr"/>
+          <a:lstStyle/>
+          <a:p>
+            <a:pPr indent="0" marL="0">
+              <a:buNone/>
+            </a:pPr>
+            <a:r>
+              <a:rPr lang="en-US" sz="1700" b="1" dirty="0">
+                <a:solidFill>
+                  <a:srgbClr val="22253A"/>
+                </a:solidFill>
+                <a:latin typeface="Calibri" pitchFamily="34" charset="0"/>
+                <a:ea typeface="Calibri" pitchFamily="34" charset="-122"/>
+                <a:cs typeface="Calibri" pitchFamily="34" charset="-120"/>
+              </a:rPr>
+              <a:t>Da casa come sviluppatore</a:t>
+            </a:r>
+            <a:endParaRPr lang="en-US" sz="1700" dirty="0"/>
+          </a:p>
+          <a:p>
+            <a:pPr indent="0" marL="0">
+              <a:buNone/>
+            </a:pPr>
+            <a:r>
+              <a:rPr lang="en-US" sz="1400" dirty="0">
+                <a:solidFill>
+                  <a:srgbClr val="5F6478"/>
+                </a:solidFill>
+                <a:latin typeface="Calibri" pitchFamily="34" charset="0"/>
+                <a:ea typeface="Calibri" pitchFamily="34" charset="-122"/>
+                <a:cs typeface="Calibri" pitchFamily="34" charset="-120"/>
+              </a:rPr>
+              <a:t>la connessione scade: la blocca Tailscale, non il SG</a:t>
+            </a:r>
+            <a:endParaRPr lang="en-US" sz="1700" dirty="0"/>
+          </a:p>
+        </p:txBody>
+      </p:sp>
+      <p:sp>
+        <p:nvSpPr>
+          <p:cNvPr id="20" name="Shape 17"/>
+          <p:cNvSpPr/>
+          <p:nvPr/>
+        </p:nvSpPr>
+        <p:spPr>
+          <a:xfrm>
+            <a:off x="548640" y="5440680"/>
+            <a:ext cx="594360" cy="594360"/>
+          </a:xfrm>
+          <a:prstGeom prst="ellipse">
+            <a:avLst/>
+          </a:prstGeom>
+          <a:solidFill>
+            <a:srgbClr val="D64545"/>
+          </a:solidFill>
+          <a:ln w="12700">
+            <a:solidFill>
+              <a:srgbClr val="D64545"/>
+            </a:solidFill>
+            <a:prstDash val="solid"/>
+          </a:ln>
+        </p:spPr>
+      </p:sp>
+      <p:sp>
+        <p:nvSpPr>
+          <p:cNvPr id="21" name="Text 18"/>
+          <p:cNvSpPr txBox="1"/>
+          <p:nvPr/>
+        </p:nvSpPr>
+        <p:spPr>
+          <a:xfrm>
+            <a:off x="548640" y="5440680"/>
+            <a:ext cx="594360" cy="594360"/>
+          </a:xfrm>
+          <a:prstGeom prst="rect">
+            <a:avLst/>
+          </a:prstGeom>
+          <a:noFill/>
+          <a:ln/>
+        </p:spPr>
+        <p:txBody>
+          <a:bodyPr wrap="square" lIns="0" tIns="0" rIns="0" bIns="0" rtlCol="0" anchor="ctr"/>
+          <a:lstStyle/>
+          <a:p>
+            <a:pPr algn="ctr" indent="0" marL="0">
+              <a:buNone/>
+            </a:pPr>
+            <a:r>
+              <a:rPr lang="en-US" sz="1800" b="1" dirty="0">
+                <a:solidFill>
+                  <a:srgbClr val="FFFFFF"/>
+                </a:solidFill>
+                <a:latin typeface="Calibri" pitchFamily="34" charset="0"/>
+                <a:ea typeface="Calibri" pitchFamily="34" charset="-122"/>
+                <a:cs typeface="Calibri" pitchFamily="34" charset="-120"/>
+              </a:rPr>
+              <a:t>6</a:t>
+            </a:r>
+            <a:endParaRPr lang="en-US" sz="1800" dirty="0"/>
+          </a:p>
+        </p:txBody>
+      </p:sp>
+      <p:sp>
+        <p:nvSpPr>
+          <p:cNvPr id="22" name="Text 19"/>
+          <p:cNvSpPr txBox="1"/>
+          <p:nvPr/>
+        </p:nvSpPr>
+        <p:spPr>
+          <a:xfrm>
+            <a:off x="1325880" y="5303520"/>
+            <a:ext cx="10225735" cy="868680"/>
+          </a:xfrm>
+          <a:prstGeom prst="rect">
+            <a:avLst/>
+          </a:prstGeom>
+          <a:noFill/>
+          <a:ln/>
+        </p:spPr>
+        <p:txBody>
+          <a:bodyPr wrap="square" lIns="0" tIns="0" rIns="0" bIns="0" rtlCol="0" anchor="ctr"/>
+          <a:lstStyle/>
+          <a:p>
+            <a:pPr indent="0" marL="0">
+              <a:buNone/>
+            </a:pPr>
+            <a:r>
+              <a:rPr lang="en-US" sz="1700" b="1" dirty="0">
+                <a:solidFill>
+                  <a:srgbClr val="22253A"/>
+                </a:solidFill>
+                <a:latin typeface="Calibri" pitchFamily="34" charset="0"/>
+                <a:ea typeface="Calibri" pitchFamily="34" charset="-122"/>
+                <a:cs typeface="Calibri" pitchFamily="34" charset="-120"/>
+              </a:rPr>
+              <a:t>Togli le porte effimere dalla NACL (lezione 3) e applica</a:t>
+            </a:r>
+            <a:endParaRPr lang="en-US" sz="1700" dirty="0"/>
+          </a:p>
+          <a:p>
+            <a:pPr indent="0" marL="0">
+              <a:buNone/>
+            </a:pPr>
+            <a:r>
+              <a:rPr lang="en-US" sz="1400" dirty="0">
+                <a:solidFill>
+                  <a:srgbClr val="5F6478"/>
+                </a:solidFill>
+                <a:latin typeface="Calibri" pitchFamily="34" charset="0"/>
+                <a:ea typeface="Calibri" pitchFamily="34" charset="-122"/>
+                <a:cs typeface="Calibri" pitchFamily="34" charset="-120"/>
+              </a:rPr>
+              <a:t>la risposta non esce: psql resta appeso. Poi rimettile</a:t>
+            </a:r>
+            <a:endParaRPr lang="en-US" sz="1700" dirty="0"/>
+          </a:p>
+        </p:txBody>
+      </p:sp>
+      <p:sp>
+        <p:nvSpPr>
+          <p:cNvPr id="25" name="Slide Number Placeholder 0"/>
+          <p:cNvSpPr>
+            <a:spLocks noGrp="1"/>
+          </p:cNvSpPr>
+          <p:nvPr>
+            <p:ph type="sldNum" sz="quarter" idx="4294967295"/>
+          </p:nvPr>
+        </p:nvSpPr>
+        <p:spPr>
+          <a:xfrm>
+            <a:off x="11155680" y="6400800"/>
+            <a:ext cx="548640" cy="274320"/>
+          </a:xfrm>
+          <a:prstGeom prst="rect">
+            <a:avLst/>
+          </a:prstGeom>
+          <a:extLst>
+            <a:ext uri="{C572A759-6A51-4108-AA02-DFA0A04FC94B}">
+              <ma14:wrappingTextBoxFlag xmlns:ma14="http://schemas.microsoft.com/office/mac/drawingml/2011/main" val="0"/>
+            </a:ext>
+          </a:extLst>
+        </p:spPr>
+        <p:txBody>
+          <a:bodyPr/>
+          <a:lstStyle>
+            <a:lvl1pPr>
+              <a:defRPr sz="1000">
+                <a:solidFill>
+                  <a:srgbClr val="5F6478"/>
+                </a:solidFill>
+                <a:latin typeface="Calibri"/>
+                <a:ea typeface="Calibri"/>
+                <a:cs typeface="Calibri"/>
+              </a:defRPr>
+            </a:lvl1pPr>
+          </a:lstStyle>
+          <a:p>
+            <a:pPr algn="r"/>
+            <a:fld id="{F7021451-1387-4CA6-816F-3879F97B5CBC}" type="slidenum">
+              <a:rPr b="0" lang="en-US"/>
+              <a:t>21</a:t>
+            </a:fld>
+            <a:endParaRPr lang="en-US"/>
+          </a:p>
+        </p:txBody>
+      </p:sp>
+    </p:spTree>
+  </p:cSld>
+  <p:clrMapOvr>
+    <a:masterClrMapping/>
+  </p:clrMapOvr>
+</p:sld>
+</file>
+
+<file path=ppt/slides/slide22.xml><?xml version="1.0" encoding="utf-8"?>
+<p:sld xmlns:a="http://schemas.openxmlformats.org/drawingml/2006/main" xmlns:r="http://schemas.openxmlformats.org/officeDocument/2006/relationships" xmlns:p="http://schemas.openxmlformats.org/presentationml/2006/main">
+  <p:cSld name="Slide 22">
+    <p:bg>
+      <p:bgPr>
+        <a:solidFill>
+          <a:srgbClr val="FFFFFF"/>
+        </a:solidFill>
+      </p:bgPr>
+    </p:bg>
+    <p:spTree>
+      <p:nvGrpSpPr>
+        <p:cNvPr id="1" name=""/>
+        <p:cNvGrpSpPr/>
+        <p:nvPr/>
+      </p:nvGrpSpPr>
+      <p:grpSpPr>
+        <a:xfrm>
+          <a:off x="0" y="0"/>
+          <a:ext cx="0" cy="0"/>
+          <a:chOff x="0" y="0"/>
+          <a:chExt cx="0" cy="0"/>
+        </a:xfrm>
+      </p:grpSpPr>
+      <p:sp>
+        <p:nvSpPr>
+          <p:cNvPr id="2" name="Text 0"/>
+          <p:cNvSpPr txBox="1"/>
+          <p:nvPr/>
+        </p:nvSpPr>
+        <p:spPr>
+          <a:xfrm>
+            <a:off x="548640" y="365760"/>
+            <a:ext cx="11094415" cy="777240"/>
+          </a:xfrm>
+          <a:prstGeom prst="rect">
+            <a:avLst/>
+          </a:prstGeom>
+          <a:noFill/>
+          <a:ln/>
+        </p:spPr>
+        <p:txBody>
+          <a:bodyPr wrap="square" lIns="0" tIns="0" rIns="0" bIns="0" rtlCol="0" anchor="ctr"/>
+          <a:lstStyle/>
+          <a:p>
+            <a:pPr indent="0" marL="0">
+              <a:buNone/>
+            </a:pPr>
+            <a:r>
+              <a:rPr lang="en-US" sz="3200" b="1" dirty="0">
+                <a:solidFill>
+                  <a:srgbClr val="22253A"/>
+                </a:solidFill>
+                <a:latin typeface="Calibri" pitchFamily="34" charset="0"/>
+                <a:ea typeface="Calibri" pitchFamily="34" charset="-122"/>
+                <a:cs typeface="Calibri" pitchFamily="34" charset="-120"/>
+              </a:rPr>
+              <a:t>Esercizio (2/2): fallo cadere</a:t>
+            </a:r>
+            <a:endParaRPr lang="en-US" sz="3200" dirty="0"/>
+          </a:p>
+        </p:txBody>
+      </p:sp>
+      <p:sp>
+        <p:nvSpPr>
+          <p:cNvPr id="3" name="Text 1"/>
+          <p:cNvSpPr txBox="1"/>
+          <p:nvPr/>
+        </p:nvSpPr>
+        <p:spPr>
+          <a:xfrm>
+            <a:off x="548640" y="6400800"/>
+            <a:ext cx="7315200" cy="274320"/>
+          </a:xfrm>
+          <a:prstGeom prst="rect">
+            <a:avLst/>
+          </a:prstGeom>
+          <a:noFill/>
+          <a:ln/>
+        </p:spPr>
+        <p:txBody>
+          <a:bodyPr wrap="square" lIns="0" tIns="0" rIns="0" bIns="0" rtlCol="0" anchor="ctr"/>
+          <a:lstStyle/>
+          <a:p>
+            <a:pPr indent="0" marL="0">
+              <a:buNone/>
+            </a:pPr>
+            <a:r>
+              <a:rPr lang="en-US" sz="1000" dirty="0">
+                <a:solidFill>
+                  <a:srgbClr val="5F6478"/>
+                </a:solidFill>
+                <a:latin typeface="Calibri" pitchFamily="34" charset="0"/>
+                <a:ea typeface="Calibri" pitchFamily="34" charset="-122"/>
+                <a:cs typeface="Calibri" pitchFamily="34" charset="-120"/>
+              </a:rPr>
+              <a:t>Dispensa 6 · RDS PostgreSQL in alta affidabilità</a:t>
+            </a:r>
+            <a:endParaRPr lang="en-US" sz="1000" dirty="0"/>
+          </a:p>
+        </p:txBody>
+      </p:sp>
+      <p:sp>
+        <p:nvSpPr>
+          <p:cNvPr id="5" name="Shape 2"/>
+          <p:cNvSpPr/>
+          <p:nvPr/>
+        </p:nvSpPr>
+        <p:spPr>
+          <a:xfrm>
+            <a:off x="548640" y="1325880"/>
+            <a:ext cx="11094415" cy="1554480"/>
+          </a:xfrm>
+          <a:prstGeom prst="roundRect">
+            <a:avLst>
+              <a:gd name="adj" fmla="val 4706"/>
+            </a:avLst>
+          </a:prstGeom>
+          <a:solidFill>
+            <a:srgbClr val="1E1E2E"/>
+          </a:solidFill>
+          <a:ln w="12700">
+            <a:solidFill>
+              <a:srgbClr val="1E1E2E"/>
+            </a:solidFill>
+            <a:prstDash val="solid"/>
+          </a:ln>
+        </p:spPr>
+      </p:sp>
+      <p:sp>
+        <p:nvSpPr>
+          <p:cNvPr id="6" name="Text 3"/>
+          <p:cNvSpPr txBox="1"/>
+          <p:nvPr/>
+        </p:nvSpPr>
+        <p:spPr>
+          <a:xfrm>
+            <a:off x="731520" y="1399032"/>
+            <a:ext cx="10728655" cy="274320"/>
+          </a:xfrm>
+          <a:prstGeom prst="rect">
+            <a:avLst/>
+          </a:prstGeom>
+          <a:noFill/>
+          <a:ln/>
+        </p:spPr>
+        <p:txBody>
+          <a:bodyPr wrap="square" lIns="0" tIns="0" rIns="0" bIns="0" rtlCol="0" anchor="t"/>
+          <a:lstStyle/>
+          <a:p>
+            <a:pPr indent="0" marL="0">
+              <a:buNone/>
+            </a:pPr>
+            <a:r>
+              <a:rPr lang="en-US" sz="1300" b="1" dirty="0">
+                <a:solidFill>
+                  <a:srgbClr val="F2B880"/>
+                </a:solidFill>
+                <a:latin typeface="Calibri" pitchFamily="34" charset="0"/>
+                <a:ea typeface="Calibri" pitchFamily="34" charset="-122"/>
+                <a:cs typeface="Calibri" pitchFamily="34" charset="-120"/>
+              </a:rPr>
+              <a:t>sul server (SSM)</a:t>
+            </a:r>
+            <a:endParaRPr lang="en-US" sz="1300" dirty="0"/>
+          </a:p>
+        </p:txBody>
+      </p:sp>
+      <p:sp>
+        <p:nvSpPr>
+          <p:cNvPr id="7" name="Text 4"/>
+          <p:cNvSpPr txBox="1"/>
+          <p:nvPr/>
+        </p:nvSpPr>
+        <p:spPr>
+          <a:xfrm>
+            <a:off x="731520" y="1737360"/>
+            <a:ext cx="10728655" cy="1005840"/>
+          </a:xfrm>
+          <a:prstGeom prst="rect">
+            <a:avLst/>
+          </a:prstGeom>
+          <a:noFill/>
+          <a:ln/>
+        </p:spPr>
+        <p:txBody>
+          <a:bodyPr wrap="square" lIns="0" tIns="0" rIns="0" bIns="0" rtlCol="0" anchor="t"/>
+          <a:lstStyle/>
+          <a:p>
+            <a:pPr indent="0" marL="0">
+              <a:buNone/>
+            </a:pPr>
+            <a:r>
+              <a:rPr lang="en-US" sz="1600" dirty="0">
+                <a:solidFill>
+                  <a:srgbClr val="E6E6F0"/>
+                </a:solidFill>
+                <a:latin typeface="Courier New" pitchFamily="34" charset="0"/>
+                <a:ea typeface="Courier New" pitchFamily="34" charset="-122"/>
+                <a:cs typeface="Courier New" pitchFamily="34" charset="-120"/>
+              </a:rPr>
+              <a:t>while true; do</a:t>
+            </a:r>
+            <a:endParaRPr lang="en-US" sz="1600" dirty="0"/>
+          </a:p>
+          <a:p>
+            <a:pPr indent="0" marL="0">
+              <a:buNone/>
+            </a:pPr>
+            <a:r>
+              <a:rPr lang="en-US" sz="1600" dirty="0">
+                <a:solidFill>
+                  <a:srgbClr val="E6E6F0"/>
+                </a:solidFill>
+                <a:latin typeface="Courier New" pitchFamily="34" charset="0"/>
+                <a:ea typeface="Courier New" pitchFamily="34" charset="-122"/>
+                <a:cs typeface="Courier New" pitchFamily="34" charset="-120"/>
+              </a:rPr>
+              <a:t>  echo "$(date +%T)  $(psql "$DB" -tAc 'select inet_server_addr();' 2&gt;&amp;1 | head -1)"</a:t>
+            </a:r>
+            <a:endParaRPr lang="en-US" sz="1600" dirty="0"/>
+          </a:p>
+          <a:p>
+            <a:pPr indent="0" marL="0">
+              <a:buNone/>
+            </a:pPr>
+            <a:r>
+              <a:rPr lang="en-US" sz="1600" dirty="0">
+                <a:solidFill>
+                  <a:srgbClr val="E6E6F0"/>
+                </a:solidFill>
+                <a:latin typeface="Courier New" pitchFamily="34" charset="0"/>
+                <a:ea typeface="Courier New" pitchFamily="34" charset="-122"/>
+                <a:cs typeface="Courier New" pitchFamily="34" charset="-120"/>
+              </a:rPr>
+              <a:t>  sleep 2</a:t>
+            </a:r>
+            <a:endParaRPr lang="en-US" sz="1600" dirty="0"/>
+          </a:p>
+          <a:p>
+            <a:pPr indent="0" marL="0">
+              <a:buNone/>
+            </a:pPr>
+            <a:r>
+              <a:rPr lang="en-US" sz="1600" dirty="0">
+                <a:solidFill>
+                  <a:srgbClr val="E6E6F0"/>
+                </a:solidFill>
+                <a:latin typeface="Courier New" pitchFamily="34" charset="0"/>
+                <a:ea typeface="Courier New" pitchFamily="34" charset="-122"/>
+                <a:cs typeface="Courier New" pitchFamily="34" charset="-120"/>
+              </a:rPr>
+              <a:t>done</a:t>
+            </a:r>
+            <a:endParaRPr lang="en-US" sz="1600" dirty="0"/>
+          </a:p>
+        </p:txBody>
+      </p:sp>
+      <p:sp>
+        <p:nvSpPr>
+          <p:cNvPr id="8" name="Shape 5"/>
+          <p:cNvSpPr/>
+          <p:nvPr/>
+        </p:nvSpPr>
+        <p:spPr>
+          <a:xfrm>
+            <a:off x="548640" y="3017520"/>
+            <a:ext cx="11094415" cy="777240"/>
+          </a:xfrm>
+          <a:prstGeom prst="roundRect">
+            <a:avLst>
+              <a:gd name="adj" fmla="val 9412"/>
+            </a:avLst>
+          </a:prstGeom>
+          <a:solidFill>
+            <a:srgbClr val="1E1E2E"/>
+          </a:solidFill>
+          <a:ln w="12700">
+            <a:solidFill>
+              <a:srgbClr val="1E1E2E"/>
+            </a:solidFill>
+            <a:prstDash val="solid"/>
+          </a:ln>
+        </p:spPr>
+      </p:sp>
+      <p:sp>
+        <p:nvSpPr>
+          <p:cNvPr id="9" name="Text 6"/>
+          <p:cNvSpPr txBox="1"/>
+          <p:nvPr/>
+        </p:nvSpPr>
+        <p:spPr>
+          <a:xfrm>
+            <a:off x="731520" y="3090672"/>
+            <a:ext cx="10728655" cy="274320"/>
+          </a:xfrm>
+          <a:prstGeom prst="rect">
+            <a:avLst/>
+          </a:prstGeom>
+          <a:noFill/>
+          <a:ln/>
+        </p:spPr>
+        <p:txBody>
+          <a:bodyPr wrap="square" lIns="0" tIns="0" rIns="0" bIns="0" rtlCol="0" anchor="t"/>
+          <a:lstStyle/>
+          <a:p>
+            <a:pPr indent="0" marL="0">
+              <a:buNone/>
+            </a:pPr>
+            <a:r>
+              <a:rPr lang="en-US" sz="1300" b="1" dirty="0">
+                <a:solidFill>
+                  <a:srgbClr val="F2B880"/>
+                </a:solidFill>
+                <a:latin typeface="Calibri" pitchFamily="34" charset="0"/>
+                <a:ea typeface="Calibri" pitchFamily="34" charset="-122"/>
+                <a:cs typeface="Calibri" pitchFamily="34" charset="-120"/>
+              </a:rPr>
+              <a:t>dal tuo computer</a:t>
+            </a:r>
+            <a:endParaRPr lang="en-US" sz="1300" dirty="0"/>
+          </a:p>
+        </p:txBody>
+      </p:sp>
+      <p:sp>
+        <p:nvSpPr>
+          <p:cNvPr id="10" name="Text 7"/>
+          <p:cNvSpPr txBox="1"/>
+          <p:nvPr/>
+        </p:nvSpPr>
+        <p:spPr>
+          <a:xfrm>
+            <a:off x="731520" y="3429000"/>
+            <a:ext cx="10728655" cy="228600"/>
+          </a:xfrm>
+          <a:prstGeom prst="rect">
+            <a:avLst/>
+          </a:prstGeom>
+          <a:noFill/>
+          <a:ln/>
+        </p:spPr>
+        <p:txBody>
+          <a:bodyPr wrap="square" lIns="0" tIns="0" rIns="0" bIns="0" rtlCol="0" anchor="t"/>
+          <a:lstStyle/>
+          <a:p>
+            <a:pPr indent="0" marL="0">
+              <a:buNone/>
+            </a:pPr>
+            <a:r>
+              <a:rPr lang="en-US" sz="1600" dirty="0">
+                <a:solidFill>
+                  <a:srgbClr val="E6E6F0"/>
+                </a:solidFill>
+                <a:latin typeface="Courier New" pitchFamily="34" charset="0"/>
+                <a:ea typeface="Courier New" pitchFamily="34" charset="-122"/>
+                <a:cs typeface="Courier New" pitchFamily="34" charset="-120"/>
+              </a:rPr>
+              <a:t>aws rds reboot-db-instance --db-instance-identifier corso-aws-db --force-failover</a:t>
+            </a:r>
+            <a:endParaRPr lang="en-US" sz="1600" dirty="0"/>
+          </a:p>
+        </p:txBody>
+      </p:sp>
+      <p:sp>
+        <p:nvSpPr>
+          <p:cNvPr id="11" name="Shape 8"/>
+          <p:cNvSpPr/>
+          <p:nvPr/>
+        </p:nvSpPr>
+        <p:spPr>
+          <a:xfrm>
+            <a:off x="548640" y="4160520"/>
+            <a:ext cx="594360" cy="594360"/>
+          </a:xfrm>
+          <a:prstGeom prst="ellipse">
+            <a:avLst/>
+          </a:prstGeom>
+          <a:solidFill>
+            <a:srgbClr val="5B3FD0"/>
+          </a:solidFill>
+          <a:ln w="12700">
+            <a:solidFill>
+              <a:srgbClr val="5B3FD0"/>
+            </a:solidFill>
+            <a:prstDash val="solid"/>
+          </a:ln>
+        </p:spPr>
+      </p:sp>
+      <p:sp>
+        <p:nvSpPr>
+          <p:cNvPr id="12" name="Text 9"/>
+          <p:cNvSpPr txBox="1"/>
+          <p:nvPr/>
+        </p:nvSpPr>
+        <p:spPr>
+          <a:xfrm>
+            <a:off x="548640" y="4160520"/>
+            <a:ext cx="594360" cy="594360"/>
+          </a:xfrm>
+          <a:prstGeom prst="rect">
+            <a:avLst/>
+          </a:prstGeom>
+          <a:noFill/>
+          <a:ln/>
+        </p:spPr>
+        <p:txBody>
+          <a:bodyPr wrap="square" lIns="0" tIns="0" rIns="0" bIns="0" rtlCol="0" anchor="ctr"/>
+          <a:lstStyle/>
+          <a:p>
+            <a:pPr algn="ctr" indent="0" marL="0">
+              <a:buNone/>
+            </a:pPr>
+            <a:r>
+              <a:rPr lang="en-US" sz="1800" b="1" dirty="0">
+                <a:solidFill>
+                  <a:srgbClr val="FFFFFF"/>
+                </a:solidFill>
+                <a:latin typeface="Calibri" pitchFamily="34" charset="0"/>
+                <a:ea typeface="Calibri" pitchFamily="34" charset="-122"/>
+                <a:cs typeface="Calibri" pitchFamily="34" charset="-120"/>
+              </a:rPr>
+              <a:t>7</a:t>
+            </a:r>
+            <a:endParaRPr lang="en-US" sz="1800" dirty="0"/>
+          </a:p>
+        </p:txBody>
+      </p:sp>
+      <p:sp>
+        <p:nvSpPr>
+          <p:cNvPr id="13" name="Text 10"/>
+          <p:cNvSpPr txBox="1"/>
+          <p:nvPr/>
+        </p:nvSpPr>
+        <p:spPr>
+          <a:xfrm>
+            <a:off x="1325880" y="4023360"/>
+            <a:ext cx="4663440" cy="868680"/>
+          </a:xfrm>
+          <a:prstGeom prst="rect">
+            <a:avLst/>
+          </a:prstGeom>
+          <a:noFill/>
+          <a:ln/>
+        </p:spPr>
+        <p:txBody>
+          <a:bodyPr wrap="square" lIns="0" tIns="0" rIns="0" bIns="0" rtlCol="0" anchor="ctr"/>
+          <a:lstStyle/>
+          <a:p>
+            <a:pPr indent="0" marL="0">
+              <a:buNone/>
+            </a:pPr>
+            <a:r>
+              <a:rPr lang="en-US" sz="1700" b="1" dirty="0">
+                <a:solidFill>
+                  <a:srgbClr val="22253A"/>
+                </a:solidFill>
+                <a:latin typeface="Calibri" pitchFamily="34" charset="0"/>
+                <a:ea typeface="Calibri" pitchFamily="34" charset="-122"/>
+                <a:cs typeface="Calibri" pitchFamily="34" charset="-120"/>
+              </a:rPr>
+              <a:t>Guarda il ciclo</a:t>
+            </a:r>
+            <a:endParaRPr lang="en-US" sz="1700" dirty="0"/>
+          </a:p>
+          <a:p>
+            <a:pPr indent="0" marL="0">
+              <a:buNone/>
+            </a:pPr>
+            <a:r>
+              <a:rPr lang="en-US" sz="1400" dirty="0">
+                <a:solidFill>
+                  <a:srgbClr val="5F6478"/>
+                </a:solidFill>
+                <a:latin typeface="Calibri" pitchFamily="34" charset="0"/>
+                <a:ea typeface="Calibri" pitchFamily="34" charset="-122"/>
+                <a:cs typeface="Calibri" pitchFamily="34" charset="-120"/>
+              </a:rPr>
+              <a:t>10.20.20.x → errori per 1-2 minuti → 10.20.21.x</a:t>
+            </a:r>
+            <a:endParaRPr lang="en-US" sz="1700" dirty="0"/>
+          </a:p>
+        </p:txBody>
+      </p:sp>
+      <p:sp>
+        <p:nvSpPr>
+          <p:cNvPr id="14" name="Shape 11"/>
+          <p:cNvSpPr/>
+          <p:nvPr/>
+        </p:nvSpPr>
+        <p:spPr>
+          <a:xfrm>
+            <a:off x="6172200" y="4160520"/>
+            <a:ext cx="594360" cy="594360"/>
+          </a:xfrm>
+          <a:prstGeom prst="ellipse">
+            <a:avLst/>
+          </a:prstGeom>
+          <a:solidFill>
+            <a:srgbClr val="5B3FD0"/>
+          </a:solidFill>
+          <a:ln w="12700">
+            <a:solidFill>
+              <a:srgbClr val="5B3FD0"/>
+            </a:solidFill>
+            <a:prstDash val="solid"/>
+          </a:ln>
+        </p:spPr>
+      </p:sp>
+      <p:sp>
+        <p:nvSpPr>
+          <p:cNvPr id="15" name="Text 12"/>
+          <p:cNvSpPr txBox="1"/>
+          <p:nvPr/>
+        </p:nvSpPr>
+        <p:spPr>
+          <a:xfrm>
+            <a:off x="6172200" y="4160520"/>
+            <a:ext cx="594360" cy="594360"/>
+          </a:xfrm>
+          <a:prstGeom prst="rect">
+            <a:avLst/>
+          </a:prstGeom>
+          <a:noFill/>
+          <a:ln/>
+        </p:spPr>
+        <p:txBody>
+          <a:bodyPr wrap="square" lIns="0" tIns="0" rIns="0" bIns="0" rtlCol="0" anchor="ctr"/>
+          <a:lstStyle/>
+          <a:p>
+            <a:pPr algn="ctr" indent="0" marL="0">
+              <a:buNone/>
+            </a:pPr>
+            <a:r>
+              <a:rPr lang="en-US" sz="1800" b="1" dirty="0">
+                <a:solidFill>
+                  <a:srgbClr val="FFFFFF"/>
+                </a:solidFill>
+                <a:latin typeface="Calibri" pitchFamily="34" charset="0"/>
+                <a:ea typeface="Calibri" pitchFamily="34" charset="-122"/>
+                <a:cs typeface="Calibri" pitchFamily="34" charset="-120"/>
+              </a:rPr>
+              <a:t>8</a:t>
+            </a:r>
+            <a:endParaRPr lang="en-US" sz="1800" dirty="0"/>
+          </a:p>
+        </p:txBody>
+      </p:sp>
+      <p:sp>
+        <p:nvSpPr>
+          <p:cNvPr id="16" name="Text 13"/>
+          <p:cNvSpPr txBox="1"/>
+          <p:nvPr/>
+        </p:nvSpPr>
+        <p:spPr>
+          <a:xfrm>
+            <a:off x="6949440" y="4023360"/>
+            <a:ext cx="4663440" cy="868680"/>
+          </a:xfrm>
+          <a:prstGeom prst="rect">
+            <a:avLst/>
+          </a:prstGeom>
+          <a:noFill/>
+          <a:ln/>
+        </p:spPr>
+        <p:txBody>
+          <a:bodyPr wrap="square" lIns="0" tIns="0" rIns="0" bIns="0" rtlCol="0" anchor="ctr"/>
+          <a:lstStyle/>
+          <a:p>
+            <a:pPr indent="0" marL="0">
+              <a:buNone/>
+            </a:pPr>
+            <a:r>
+              <a:rPr lang="en-US" sz="1700" b="1" dirty="0">
+                <a:solidFill>
+                  <a:srgbClr val="22253A"/>
+                </a:solidFill>
+                <a:latin typeface="Calibri" pitchFamily="34" charset="0"/>
+                <a:ea typeface="Calibri" pitchFamily="34" charset="-122"/>
+                <a:cs typeface="Calibri" pitchFamily="34" charset="-120"/>
+              </a:rPr>
+              <a:t>Eventi di RDS</a:t>
+            </a:r>
+            <a:endParaRPr lang="en-US" sz="1700" dirty="0"/>
+          </a:p>
+          <a:p>
+            <a:pPr indent="0" marL="0">
+              <a:buNone/>
+            </a:pPr>
+            <a:r>
+              <a:rPr lang="en-US" sz="1400" dirty="0">
+                <a:solidFill>
+                  <a:srgbClr val="5F6478"/>
+                </a:solidFill>
+                <a:latin typeface="Calibri" pitchFamily="34" charset="0"/>
+                <a:ea typeface="Calibri" pitchFamily="34" charset="-122"/>
+                <a:cs typeface="Calibri" pitchFamily="34" charset="-120"/>
+              </a:rPr>
+              <a:t>Logs &amp; events: inizio e fine del failover</a:t>
+            </a:r>
+            <a:endParaRPr lang="en-US" sz="1700" dirty="0"/>
+          </a:p>
+        </p:txBody>
+      </p:sp>
+      <p:sp>
+        <p:nvSpPr>
+          <p:cNvPr id="17" name="Shape 14"/>
+          <p:cNvSpPr/>
+          <p:nvPr/>
+        </p:nvSpPr>
+        <p:spPr>
+          <a:xfrm>
+            <a:off x="548640" y="5257800"/>
+            <a:ext cx="594360" cy="594360"/>
+          </a:xfrm>
+          <a:prstGeom prst="ellipse">
+            <a:avLst/>
+          </a:prstGeom>
+          <a:solidFill>
+            <a:srgbClr val="5B3FD0"/>
+          </a:solidFill>
+          <a:ln w="12700">
+            <a:solidFill>
+              <a:srgbClr val="5B3FD0"/>
+            </a:solidFill>
+            <a:prstDash val="solid"/>
+          </a:ln>
+        </p:spPr>
+      </p:sp>
+      <p:sp>
+        <p:nvSpPr>
+          <p:cNvPr id="18" name="Text 15"/>
+          <p:cNvSpPr txBox="1"/>
+          <p:nvPr/>
+        </p:nvSpPr>
+        <p:spPr>
+          <a:xfrm>
+            <a:off x="548640" y="5257800"/>
+            <a:ext cx="594360" cy="594360"/>
+          </a:xfrm>
+          <a:prstGeom prst="rect">
+            <a:avLst/>
+          </a:prstGeom>
+          <a:noFill/>
+          <a:ln/>
+        </p:spPr>
+        <p:txBody>
+          <a:bodyPr wrap="square" lIns="0" tIns="0" rIns="0" bIns="0" rtlCol="0" anchor="ctr"/>
+          <a:lstStyle/>
+          <a:p>
+            <a:pPr algn="ctr" indent="0" marL="0">
+              <a:buNone/>
+            </a:pPr>
+            <a:r>
+              <a:rPr lang="en-US" sz="1800" b="1" dirty="0">
+                <a:solidFill>
+                  <a:srgbClr val="FFFFFF"/>
+                </a:solidFill>
+                <a:latin typeface="Calibri" pitchFamily="34" charset="0"/>
+                <a:ea typeface="Calibri" pitchFamily="34" charset="-122"/>
+                <a:cs typeface="Calibri" pitchFamily="34" charset="-120"/>
+              </a:rPr>
+              <a:t>9</a:t>
+            </a:r>
+            <a:endParaRPr lang="en-US" sz="1800" dirty="0"/>
+          </a:p>
+        </p:txBody>
+      </p:sp>
+      <p:sp>
+        <p:nvSpPr>
+          <p:cNvPr id="19" name="Text 16"/>
+          <p:cNvSpPr txBox="1"/>
+          <p:nvPr/>
+        </p:nvSpPr>
+        <p:spPr>
+          <a:xfrm>
+            <a:off x="1325880" y="5120640"/>
+            <a:ext cx="4663440" cy="868680"/>
+          </a:xfrm>
+          <a:prstGeom prst="rect">
+            <a:avLst/>
+          </a:prstGeom>
+          <a:noFill/>
+          <a:ln/>
+        </p:spPr>
+        <p:txBody>
+          <a:bodyPr wrap="square" lIns="0" tIns="0" rIns="0" bIns="0" rtlCol="0" anchor="ctr"/>
+          <a:lstStyle/>
+          <a:p>
+            <a:pPr indent="0" marL="0">
+              <a:buNone/>
+            </a:pPr>
+            <a:r>
+              <a:rPr lang="en-US" sz="1700" b="1" dirty="0">
+                <a:solidFill>
+                  <a:srgbClr val="22253A"/>
+                </a:solidFill>
+                <a:latin typeface="Calibri" pitchFamily="34" charset="0"/>
+                <a:ea typeface="Calibri" pitchFamily="34" charset="-122"/>
+                <a:cs typeface="Calibri" pitchFamily="34" charset="-120"/>
+              </a:rPr>
+              <a:t>Prova a cancellarlo dalla CLI</a:t>
+            </a:r>
+            <a:endParaRPr lang="en-US" sz="1700" dirty="0"/>
+          </a:p>
+          <a:p>
+            <a:pPr indent="0" marL="0">
+              <a:buNone/>
+            </a:pPr>
+            <a:r>
+              <a:rPr lang="en-US" sz="1400" dirty="0">
+                <a:solidFill>
+                  <a:srgbClr val="5F6478"/>
+                </a:solidFill>
+                <a:latin typeface="Calibri" pitchFamily="34" charset="0"/>
+                <a:ea typeface="Calibri" pitchFamily="34" charset="-122"/>
+                <a:cs typeface="Calibri" pitchFamily="34" charset="-120"/>
+              </a:rPr>
+              <a:t>AWS rifiuta: protected DB Instance</a:t>
+            </a:r>
+            <a:endParaRPr lang="en-US" sz="1700" dirty="0"/>
+          </a:p>
+        </p:txBody>
+      </p:sp>
+      <p:sp>
+        <p:nvSpPr>
+          <p:cNvPr id="20" name="Shape 17"/>
+          <p:cNvSpPr/>
+          <p:nvPr/>
+        </p:nvSpPr>
+        <p:spPr>
+          <a:xfrm>
+            <a:off x="6172200" y="5257800"/>
+            <a:ext cx="594360" cy="594360"/>
+          </a:xfrm>
+          <a:prstGeom prst="ellipse">
+            <a:avLst/>
+          </a:prstGeom>
+          <a:solidFill>
+            <a:srgbClr val="D64545"/>
+          </a:solidFill>
+          <a:ln w="12700">
+            <a:solidFill>
+              <a:srgbClr val="D64545"/>
+            </a:solidFill>
+            <a:prstDash val="solid"/>
+          </a:ln>
+        </p:spPr>
+      </p:sp>
+      <p:sp>
+        <p:nvSpPr>
+          <p:cNvPr id="21" name="Text 18"/>
+          <p:cNvSpPr txBox="1"/>
+          <p:nvPr/>
+        </p:nvSpPr>
+        <p:spPr>
+          <a:xfrm>
+            <a:off x="6172200" y="5257800"/>
+            <a:ext cx="594360" cy="594360"/>
+          </a:xfrm>
+          <a:prstGeom prst="rect">
+            <a:avLst/>
+          </a:prstGeom>
+          <a:noFill/>
+          <a:ln/>
+        </p:spPr>
+        <p:txBody>
+          <a:bodyPr wrap="square" lIns="0" tIns="0" rIns="0" bIns="0" rtlCol="0" anchor="ctr"/>
+          <a:lstStyle/>
+          <a:p>
+            <a:pPr algn="ctr" indent="0" marL="0">
+              <a:buNone/>
+            </a:pPr>
+            <a:r>
+              <a:rPr lang="en-US" sz="1800" b="1" dirty="0">
+                <a:solidFill>
+                  <a:srgbClr val="FFFFFF"/>
+                </a:solidFill>
+                <a:latin typeface="Calibri" pitchFamily="34" charset="0"/>
+                <a:ea typeface="Calibri" pitchFamily="34" charset="-122"/>
+                <a:cs typeface="Calibri" pitchFamily="34" charset="-120"/>
+              </a:rPr>
+              <a:t>10</a:t>
+            </a:r>
+            <a:endParaRPr lang="en-US" sz="1800" dirty="0"/>
+          </a:p>
+        </p:txBody>
+      </p:sp>
+      <p:sp>
+        <p:nvSpPr>
+          <p:cNvPr id="22" name="Text 19"/>
+          <p:cNvSpPr txBox="1"/>
+          <p:nvPr/>
+        </p:nvSpPr>
+        <p:spPr>
+          <a:xfrm>
+            <a:off x="6949440" y="5120640"/>
+            <a:ext cx="4663440" cy="868680"/>
+          </a:xfrm>
+          <a:prstGeom prst="rect">
+            <a:avLst/>
+          </a:prstGeom>
+          <a:noFill/>
+          <a:ln/>
+        </p:spPr>
+        <p:txBody>
+          <a:bodyPr wrap="square" lIns="0" tIns="0" rIns="0" bIns="0" rtlCol="0" anchor="ctr"/>
+          <a:lstStyle/>
+          <a:p>
+            <a:pPr indent="0" marL="0">
+              <a:buNone/>
+            </a:pPr>
+            <a:r>
+              <a:rPr lang="en-US" sz="1700" b="1" dirty="0">
+                <a:solidFill>
+                  <a:srgbClr val="22253A"/>
+                </a:solidFill>
+                <a:latin typeface="Calibri" pitchFamily="34" charset="0"/>
+                <a:ea typeface="Calibri" pitchFamily="34" charset="-122"/>
+                <a:cs typeface="Calibri" pitchFamily="34" charset="-120"/>
+              </a:rPr>
+              <a:t>Pulizia in due tempi</a:t>
+            </a:r>
+            <a:endParaRPr lang="en-US" sz="1700" dirty="0"/>
+          </a:p>
+          <a:p>
+            <a:pPr indent="0" marL="0">
+              <a:buNone/>
+            </a:pPr>
+            <a:r>
+              <a:rPr lang="en-US" sz="1400" dirty="0">
+                <a:solidFill>
+                  <a:srgbClr val="5F6478"/>
+                </a:solidFill>
+                <a:latin typeface="Calibri" pitchFamily="34" charset="0"/>
+                <a:ea typeface="Calibri" pitchFamily="34" charset="-122"/>
+                <a:cs typeface="Calibri" pitchFamily="34" charset="-120"/>
+              </a:rPr>
+              <a:t>protezione false + apply, poi destroy; cancella lo snapshot finale</a:t>
+            </a:r>
+            <a:endParaRPr lang="en-US" sz="1700" dirty="0"/>
+          </a:p>
+        </p:txBody>
+      </p:sp>
+      <p:sp>
+        <p:nvSpPr>
+          <p:cNvPr id="25" name="Slide Number Placeholder 0"/>
+          <p:cNvSpPr>
+            <a:spLocks noGrp="1"/>
+          </p:cNvSpPr>
+          <p:nvPr>
+            <p:ph type="sldNum" sz="quarter" idx="4294967295"/>
+          </p:nvPr>
+        </p:nvSpPr>
+        <p:spPr>
+          <a:xfrm>
+            <a:off x="11155680" y="6400800"/>
+            <a:ext cx="548640" cy="274320"/>
+          </a:xfrm>
+          <a:prstGeom prst="rect">
+            <a:avLst/>
+          </a:prstGeom>
+          <a:extLst>
+            <a:ext uri="{C572A759-6A51-4108-AA02-DFA0A04FC94B}">
+              <ma14:wrappingTextBoxFlag xmlns:ma14="http://schemas.microsoft.com/office/mac/drawingml/2011/main" val="0"/>
+            </a:ext>
+          </a:extLst>
+        </p:spPr>
+        <p:txBody>
+          <a:bodyPr/>
+          <a:lstStyle>
+            <a:lvl1pPr>
+              <a:defRPr sz="1000">
+                <a:solidFill>
+                  <a:srgbClr val="5F6478"/>
+                </a:solidFill>
+                <a:latin typeface="Calibri"/>
+                <a:ea typeface="Calibri"/>
+                <a:cs typeface="Calibri"/>
+              </a:defRPr>
+            </a:lvl1pPr>
+          </a:lstStyle>
+          <a:p>
+            <a:pPr algn="r"/>
+            <a:fld id="{F7021451-1387-4CA6-816F-3879F97B5CBC}" type="slidenum">
+              <a:rPr b="0" lang="en-US"/>
+              <a:t>22</a:t>
+            </a:fld>
+            <a:endParaRPr lang="en-US"/>
+          </a:p>
+        </p:txBody>
+      </p:sp>
+    </p:spTree>
+  </p:cSld>
+  <p:clrMapOvr>
+    <a:masterClrMapping/>
+  </p:clrMapOvr>
+</p:sld>
+</file>
+
+<file path=ppt/slides/slide23.xml><?xml version="1.0" encoding="utf-8"?>
+<p:sld xmlns:a="http://schemas.openxmlformats.org/drawingml/2006/main" xmlns:r="http://schemas.openxmlformats.org/officeDocument/2006/relationships" xmlns:p="http://schemas.openxmlformats.org/presentationml/2006/main">
+  <p:cSld name="Slide 23">
+    <p:bg>
+      <p:bgPr>
+        <a:solidFill>
+          <a:srgbClr val="FFFFFF"/>
+        </a:solidFill>
+      </p:bgPr>
+    </p:bg>
+    <p:spTree>
+      <p:nvGrpSpPr>
+        <p:cNvPr id="1" name=""/>
+        <p:cNvGrpSpPr/>
+        <p:nvPr/>
+      </p:nvGrpSpPr>
+      <p:grpSpPr>
+        <a:xfrm>
+          <a:off x="0" y="0"/>
+          <a:ext cx="0" cy="0"/>
+          <a:chOff x="0" y="0"/>
+          <a:chExt cx="0" cy="0"/>
+        </a:xfrm>
+      </p:grpSpPr>
+      <p:sp>
+        <p:nvSpPr>
+          <p:cNvPr id="2" name="Text 0"/>
+          <p:cNvSpPr txBox="1"/>
+          <p:nvPr/>
+        </p:nvSpPr>
+        <p:spPr>
+          <a:xfrm>
+            <a:off x="548640" y="365760"/>
+            <a:ext cx="11094415" cy="777240"/>
+          </a:xfrm>
+          <a:prstGeom prst="rect">
+            <a:avLst/>
+          </a:prstGeom>
+          <a:noFill/>
+          <a:ln/>
+        </p:spPr>
+        <p:txBody>
+          <a:bodyPr wrap="square" lIns="0" tIns="0" rIns="0" bIns="0" rtlCol="0" anchor="ctr"/>
+          <a:lstStyle/>
+          <a:p>
+            <a:pPr indent="0" marL="0">
+              <a:buNone/>
+            </a:pPr>
+            <a:r>
+              <a:rPr lang="en-US" sz="3200" b="1" dirty="0">
+                <a:solidFill>
+                  <a:srgbClr val="22253A"/>
+                </a:solidFill>
+                <a:latin typeface="Calibri" pitchFamily="34" charset="0"/>
+                <a:ea typeface="Calibri" pitchFamily="34" charset="-122"/>
+                <a:cs typeface="Calibri" pitchFamily="34" charset="-120"/>
+              </a:rPr>
+              <a:t>Le parole della lezione</a:t>
+            </a:r>
+            <a:endParaRPr lang="en-US" sz="3200" dirty="0"/>
+          </a:p>
+        </p:txBody>
+      </p:sp>
+      <p:sp>
+        <p:nvSpPr>
+          <p:cNvPr id="3" name="Text 1"/>
+          <p:cNvSpPr txBox="1"/>
+          <p:nvPr/>
+        </p:nvSpPr>
+        <p:spPr>
+          <a:xfrm>
+            <a:off x="548640" y="6400800"/>
+            <a:ext cx="7315200" cy="274320"/>
+          </a:xfrm>
+          <a:prstGeom prst="rect">
+            <a:avLst/>
+          </a:prstGeom>
+          <a:noFill/>
+          <a:ln/>
+        </p:spPr>
+        <p:txBody>
+          <a:bodyPr wrap="square" lIns="0" tIns="0" rIns="0" bIns="0" rtlCol="0" anchor="ctr"/>
+          <a:lstStyle/>
+          <a:p>
+            <a:pPr indent="0" marL="0">
+              <a:buNone/>
+            </a:pPr>
+            <a:r>
+              <a:rPr lang="en-US" sz="1000" dirty="0">
+                <a:solidFill>
+                  <a:srgbClr val="5F6478"/>
+                </a:solidFill>
+                <a:latin typeface="Calibri" pitchFamily="34" charset="0"/>
+                <a:ea typeface="Calibri" pitchFamily="34" charset="-122"/>
+                <a:cs typeface="Calibri" pitchFamily="34" charset="-120"/>
+              </a:rPr>
+              <a:t>Dispensa 6 · RDS PostgreSQL in alta affidabilità</a:t>
+            </a:r>
+            <a:endParaRPr lang="en-US" sz="1000" dirty="0"/>
+          </a:p>
+        </p:txBody>
+      </p:sp>
       <p:graphicFrame>
         <p:nvGraphicFramePr>
-          <p:cNvPr id="22" name="Table 0"/>
+          <p:cNvPr id="24" name="Table 0"/>
           <p:cNvGraphicFramePr>
             <a:graphicFrameLocks noGrp="1"/>
           </p:cNvGraphicFramePr>
@@ -15455,7 +17244,7 @@
             <a:pPr algn="r"/>
             <a:fld id="{F7021451-1387-4CA6-816F-3879F97B5CBC}" type="slidenum">
               <a:rPr b="0" lang="en-US"/>
-              <a:t>21</a:t>
+              <a:t>23</a:t>
             </a:fld>
             <a:endParaRPr lang="en-US"/>
           </a:p>
@@ -15469,9 +17258,9 @@
 </p:sld>
 </file>
 
-<file path=ppt/slides/slide22.xml><?xml version="1.0" encoding="utf-8"?>
+<file path=ppt/slides/slide24.xml><?xml version="1.0" encoding="utf-8"?>
 <p:sld xmlns:a="http://schemas.openxmlformats.org/drawingml/2006/main" xmlns:r="http://schemas.openxmlformats.org/officeDocument/2006/relationships" xmlns:p="http://schemas.openxmlformats.org/presentationml/2006/main">
-  <p:cSld name="Slide 22">
+  <p:cSld name="Slide 24">
     <p:bg>
       <p:bgPr>
         <a:solidFill>
@@ -15632,7 +17421,7 @@
                 <a:ea typeface="Calibri" pitchFamily="34" charset="-122"/>
                 <a:cs typeface="Calibri" pitchFamily="34" charset="-120"/>
               </a:rPr>
-              <a:t>Backup 7 giorni e PITR (in un DB nuovo); tutto cifrato con KMS</a:t>
+              <a:t>Backup e PITR; disco cifrato (KMS), connessioni TLS verificate</a:t>
             </a:r>
             <a:endParaRPr lang="en-US" sz="1800" dirty="0"/>
           </a:p>

--- a/slide/slide-6-rds.pptx
+++ b/slide/slide-6-rds.pptx
@@ -1933,7 +1933,7 @@
           <a:p>
             <a:r>
               <a:rPr lang="en-US" dirty="0"/>
-              <a:t>Riassumendo. Il materiale di studio è la dispensa 6, con il codice completo di rds.tf e secrets.tf spiegato blocco per blocco e l'esercizio con tutti i comandi. La prossima volta prepariamo il bucket S3 da cui il server scaricherà le nuove versioni dell'applicazione.</a:t>
+              <a:t>Riassumendo. Il materiale di studio è la dispensa 6, con il codice completo di rds.tf e secrets.tf spiegato blocco per blocco e l'esercizio con tutti i comandi. La prossima volta prepariamo i due magazzini da cui il server prenderà l'applicazione: ECR per le immagini e S3 per i file di deploy.</a:t>
             </a:r>
             <a:endParaRPr lang="en-US" dirty="0"/>
           </a:p>
@@ -17629,7 +17629,7 @@
                 <a:ea typeface="Calibri" pitchFamily="34" charset="-122"/>
                 <a:cs typeface="Calibri" pitchFamily="34" charset="-120"/>
               </a:rPr>
-              <a:t>S3: il repository degli artefatti</a:t>
+              <a:t>Immagini e artefatti: ECR e S3</a:t>
             </a:r>
             <a:endParaRPr lang="en-US" sz="1400" dirty="0"/>
           </a:p>
@@ -20680,7 +20680,7 @@
                           <a:ea typeface="Calibri" pitchFamily="34" charset="-122"/>
                           <a:cs typeface="Calibri" pitchFamily="34" charset="-120"/>
                         </a:rPr>
-                        <a:t>da 1 a 15</a:t>
+                        <a:t>una o più</a:t>
                       </a:r>
                       <a:endParaRPr lang="en-US" sz="1600" dirty="0">
                         <a:latin typeface="Calibri" charset="0"/>
